--- a/data-eng/decks/w5d4s3.pptx
+++ b/data-eng/decks/w5d4s3.pptx
@@ -3100,7 +3100,7 @@
       <p:grpSpPr/>
       <p:sp>
         <p:nvSpPr>
-          <p:cNvPr id="2" name="Oval 1"/>
+          <p:cNvPr id="2" name="deckgen:decor"/>
           <p:cNvSpPr/>
           <p:nvPr/>
         </p:nvSpPr>
@@ -3130,7 +3130,7 @@
       </p:sp>
       <p:sp>
         <p:nvSpPr>
-          <p:cNvPr id="3" name="Oval 2"/>
+          <p:cNvPr id="3" name="deckgen:decor"/>
           <p:cNvSpPr/>
           <p:nvPr/>
         </p:nvSpPr>
@@ -3160,7 +3160,7 @@
       </p:sp>
       <p:sp>
         <p:nvSpPr>
-          <p:cNvPr id="4" name="Oval 3"/>
+          <p:cNvPr id="4" name="deckgen:decor"/>
           <p:cNvSpPr/>
           <p:nvPr/>
         </p:nvSpPr>
@@ -3190,7 +3190,7 @@
       </p:sp>
       <p:sp>
         <p:nvSpPr>
-          <p:cNvPr id="5" name="Rectangle 4"/>
+          <p:cNvPr id="5" name="deckgen:decor"/>
           <p:cNvSpPr/>
           <p:nvPr/>
         </p:nvSpPr>
@@ -3220,7 +3220,7 @@
       </p:sp>
       <p:sp>
         <p:nvSpPr>
-          <p:cNvPr id="6" name="Oval 5"/>
+          <p:cNvPr id="6" name="deckgen:decor"/>
           <p:cNvSpPr/>
           <p:nvPr/>
         </p:nvSpPr>
@@ -3250,7 +3250,7 @@
       </p:sp>
       <p:sp>
         <p:nvSpPr>
-          <p:cNvPr id="7" name="Oval 6"/>
+          <p:cNvPr id="7" name="deckgen:decor"/>
           <p:cNvSpPr/>
           <p:nvPr/>
         </p:nvSpPr>
@@ -3280,7 +3280,7 @@
       </p:sp>
       <p:sp>
         <p:nvSpPr>
-          <p:cNvPr id="8" name="Oval 7"/>
+          <p:cNvPr id="8" name="deckgen:decor"/>
           <p:cNvSpPr/>
           <p:nvPr/>
         </p:nvSpPr>
@@ -3310,7 +3310,7 @@
       </p:sp>
       <p:sp>
         <p:nvSpPr>
-          <p:cNvPr id="9" name="Oval 8"/>
+          <p:cNvPr id="9" name="deckgen:decor"/>
           <p:cNvSpPr/>
           <p:nvPr/>
         </p:nvSpPr>
@@ -3340,7 +3340,7 @@
       </p:sp>
       <p:sp>
         <p:nvSpPr>
-          <p:cNvPr id="10" name="Rectangle 9"/>
+          <p:cNvPr id="10" name="deckgen:decor"/>
           <p:cNvSpPr/>
           <p:nvPr/>
         </p:nvSpPr>
@@ -3516,7 +3516,7 @@
                 <a:ea typeface="Pretendard"/>
                 <a:cs typeface="Pretendard"/>
               </a:rPr>
-              <a:t>같은 가공을 SQL 로 — 계획을 대조하고 Iceberg 에 저장</a:t>
+              <a:t>같은 가공을 SQL 로 — 계획 대조와 저장</a:t>
             </a:r>
           </a:p>
         </p:txBody>
@@ -3600,7 +3600,7 @@
       <p:grpSpPr/>
       <p:sp>
         <p:nvSpPr>
-          <p:cNvPr id="2" name="Oval 1"/>
+          <p:cNvPr id="2" name="deckgen:decor"/>
           <p:cNvSpPr/>
           <p:nvPr/>
         </p:nvSpPr>
@@ -3630,7 +3630,7 @@
       </p:sp>
       <p:sp>
         <p:nvSpPr>
-          <p:cNvPr id="3" name="Oval 2"/>
+          <p:cNvPr id="3" name="deckgen:decor"/>
           <p:cNvSpPr/>
           <p:nvPr/>
         </p:nvSpPr>
@@ -3660,7 +3660,7 @@
       </p:sp>
       <p:sp>
         <p:nvSpPr>
-          <p:cNvPr id="4" name="Oval 3"/>
+          <p:cNvPr id="4" name="deckgen:decor"/>
           <p:cNvSpPr/>
           <p:nvPr/>
         </p:nvSpPr>
@@ -3941,7 +3941,7 @@
                 <a:ea typeface="Pretendard"/>
                 <a:cs typeface="Pretendard"/>
               </a:rPr>
-              <a:t>SHOW VIEWS 에 orders_v · products_v 가 보인다</a:t>
+              <a:t>SHOW VIEWS IN default 에 orders_v · products_v</a:t>
             </a:r>
           </a:p>
         </p:txBody>
@@ -4233,7 +4233,7 @@
                 <a:ea typeface="Pretendard"/>
                 <a:cs typeface="Pretendard"/>
               </a:rPr>
-              <a:t>두 explain() 이 Join → HashAggregate → Sort 같은 구조다</a:t>
+              <a:t>두 explain() 이 SortMergeJoin 기반 같은 모양이다</a:t>
             </a:r>
           </a:p>
         </p:txBody>
@@ -4379,7 +4379,7 @@
                 <a:ea typeface="Pretendard"/>
                 <a:cs typeface="Pretendard"/>
               </a:rPr>
-              <a:t>CTE 쿼리에 날짜별 매출과 누적 매출이 나온다</a:t>
+              <a:t>q.show() 에 날짜별 매출과 누적 매출이 나온다</a:t>
             </a:r>
           </a:p>
         </p:txBody>
@@ -4525,7 +4525,7 @@
                 <a:ea typeface="Pretendard"/>
                 <a:cs typeface="Pretendard"/>
               </a:rPr>
-              <a:t>lake.db 의 product_sales · daily_revenue 가 조회되고 MinIO 에 파일이 있다</a:t>
+              <a:t>product_sales · daily_revenue 조회 · MinIO 에 parquet</a:t>
             </a:r>
           </a:p>
         </p:txBody>
@@ -4671,7 +4671,7 @@
                 <a:ea typeface="Pretendard"/>
                 <a:cs typeface="Pretendard"/>
               </a:rPr>
-              <a:t>left_anti 결과 0행 · 비중의 합이 100 에 가깝다</a:t>
+              <a:t>left_anti 0행 · 비중 70.8 · 24.0 · 5.3</a:t>
             </a:r>
           </a:p>
         </p:txBody>
@@ -4808,7 +4808,7 @@
       <p:grpSpPr/>
       <p:sp>
         <p:nvSpPr>
-          <p:cNvPr id="2" name="Oval 1"/>
+          <p:cNvPr id="2" name="deckgen:decor"/>
           <p:cNvSpPr/>
           <p:nvPr/>
         </p:nvSpPr>
@@ -4838,7 +4838,7 @@
       </p:sp>
       <p:sp>
         <p:nvSpPr>
-          <p:cNvPr id="3" name="Oval 2"/>
+          <p:cNvPr id="3" name="deckgen:decor"/>
           <p:cNvSpPr/>
           <p:nvPr/>
         </p:nvSpPr>
@@ -5014,7 +5014,7 @@
                 <a:ea typeface="Pretendard"/>
                 <a:cs typeface="Pretendard"/>
               </a:rPr>
-              <a:t>Pandas · PySpark · SQL 세 도구를 한 표로 나란히 놓고, 5-5 파티셔닝을 위한 준비를 확인합니다</a:t>
+              <a:t>Pandas · PySpark · SQL 세 도구를 한 표로 놓고, 5-5 파티셔닝 준비를 확인합니다</a:t>
             </a:r>
           </a:p>
         </p:txBody>
@@ -5246,7 +5246,7 @@
                 <a:ea typeface="Pretendard"/>
                 <a:cs typeface="Pretendard"/>
               </a:rPr>
-              <a:t>SHOW TABLES IN lake.db 로 테이블 세 개</a:t>
+              <a:t>SHOW TABLES IN lake.db 로 테이블 셋</a:t>
             </a:r>
           </a:p>
         </p:txBody>
@@ -5362,7 +5362,7 @@
                 <a:ea typeface="Pretendard"/>
                 <a:cs typeface="Pretendard"/>
               </a:rPr>
-              <a:t>셔플 파티션 200 확인</a:t>
+              <a:t>sales 파티션 1 · 셔플 파티션 200</a:t>
             </a:r>
           </a:p>
         </p:txBody>
@@ -5478,7 +5478,7 @@
                 <a:ea typeface="Pretendard"/>
                 <a:cs typeface="Pretendard"/>
               </a:rPr>
-              <a:t>자주 겪는 오류 네 가지</a:t>
+              <a:t>exit() 뒤 docker compose stop</a:t>
             </a:r>
           </a:p>
         </p:txBody>
@@ -5615,7 +5615,7 @@
       <p:grpSpPr/>
       <p:sp>
         <p:nvSpPr>
-          <p:cNvPr id="2" name="Oval 1"/>
+          <p:cNvPr id="2" name="deckgen:decor"/>
           <p:cNvSpPr/>
           <p:nvPr/>
         </p:nvSpPr>
@@ -5645,7 +5645,7 @@
       </p:sp>
       <p:sp>
         <p:nvSpPr>
-          <p:cNvPr id="3" name="Oval 2"/>
+          <p:cNvPr id="3" name="deckgen:decor"/>
           <p:cNvSpPr/>
           <p:nvPr/>
         </p:nvSpPr>
@@ -5675,7 +5675,7 @@
       </p:sp>
       <p:sp>
         <p:nvSpPr>
-          <p:cNvPr id="4" name="Oval 3"/>
+          <p:cNvPr id="4" name="deckgen:decor"/>
           <p:cNvSpPr/>
           <p:nvPr/>
         </p:nvSpPr>
@@ -5956,7 +5956,7 @@
                 <a:ea typeface="Pretendard"/>
                 <a:cs typeface="Pretendard"/>
               </a:rPr>
-              <a:t>임시 뷰 orders_v·products_v 를 등록하고 SHOW VIEWS 로 확인한다</a:t>
+              <a:t>임시 뷰 둘을 등록하고 SHOW VIEWS IN default 로 확인한다</a:t>
             </a:r>
           </a:p>
         </p:txBody>
@@ -6102,7 +6102,7 @@
                 <a:ea typeface="Pretendard"/>
                 <a:cs typeface="Pretendard"/>
               </a:rPr>
-              <a:t>같은 집계를 SQL 로 써서 API 결과와 완전히 같은지 대조한다</a:t>
+              <a:t>같은 집계를 SQL 로 써서 API 의 sales 와 같은지 대조한다</a:t>
             </a:r>
           </a:p>
         </p:txBody>
@@ -6248,7 +6248,7 @@
                 <a:ea typeface="Pretendard"/>
                 <a:cs typeface="Pretendard"/>
               </a:rPr>
-              <a:t>두 explain() 의 Physical Plan 이 같은 구조임을 눈으로 확인한다</a:t>
+              <a:t>두 explain() 이 SortMergeJoin 기반 같은 모양임을 확인한다</a:t>
             </a:r>
           </a:p>
         </p:txBody>
@@ -6469,7 +6469,7 @@
                 <a:ea typeface="Pretendard"/>
                 <a:cs typeface="Pretendard"/>
               </a:rPr>
-              <a:t>앞 챕터의 셸과 orders · products · sales 변수를 그대로 이어서 씁니다</a:t>
+              <a:t>앞 메뉴의 셸과 orders · products · sales 변수를 그대로 이어서 씁니다</a:t>
             </a:r>
           </a:p>
         </p:txBody>
@@ -6606,7 +6606,7 @@
       <p:grpSpPr/>
       <p:sp>
         <p:nvSpPr>
-          <p:cNvPr id="2" name="Oval 1"/>
+          <p:cNvPr id="2" name="deckgen:decor"/>
           <p:cNvSpPr/>
           <p:nvPr/>
         </p:nvSpPr>
@@ -6636,7 +6636,7 @@
       </p:sp>
       <p:sp>
         <p:nvSpPr>
-          <p:cNvPr id="3" name="Oval 2"/>
+          <p:cNvPr id="3" name="deckgen:decor"/>
           <p:cNvSpPr/>
           <p:nvPr/>
         </p:nvSpPr>
@@ -6666,7 +6666,7 @@
       </p:sp>
       <p:sp>
         <p:nvSpPr>
-          <p:cNvPr id="4" name="Oval 3"/>
+          <p:cNvPr id="4" name="deckgen:decor"/>
           <p:cNvSpPr/>
           <p:nvPr/>
         </p:nvSpPr>
@@ -6842,7 +6842,7 @@
                 <a:ea typeface="Pretendard"/>
                 <a:cs typeface="Pretendard"/>
               </a:rPr>
-              <a:t>임시 뷰는 이 셸(세션)이 살아 있는 동안만 존재합니다 — 셸을 나가면 사라집니다</a:t>
+              <a:t>셸을 다시 띄웠다면 NameError — 앞 메뉴 1~3단계와 6단계(sales)부터 다시</a:t>
             </a:r>
           </a:p>
         </p:txBody>
@@ -7799,7 +7799,7 @@
       <p:grpSpPr/>
       <p:sp>
         <p:nvSpPr>
-          <p:cNvPr id="2" name="Oval 1"/>
+          <p:cNvPr id="2" name="deckgen:decor"/>
           <p:cNvSpPr/>
           <p:nvPr/>
         </p:nvSpPr>
@@ -7829,7 +7829,7 @@
       </p:sp>
       <p:sp>
         <p:nvSpPr>
-          <p:cNvPr id="3" name="Oval 2"/>
+          <p:cNvPr id="3" name="deckgen:decor"/>
           <p:cNvSpPr/>
           <p:nvPr/>
         </p:nvSpPr>
@@ -7859,7 +7859,7 @@
       </p:sp>
       <p:sp>
         <p:nvSpPr>
-          <p:cNvPr id="4" name="Oval 3"/>
+          <p:cNvPr id="4" name="deckgen:decor"/>
           <p:cNvSpPr/>
           <p:nvPr/>
         </p:nvSpPr>
@@ -8282,7 +8282,7 @@
                 <a:ea typeface="Pretendard"/>
                 <a:cs typeface="Pretendard"/>
               </a:rPr>
-              <a:t>spark.sql("SHOW VIEWS").show()</a:t>
+              <a:t>spark.sql("SHOW VIEWS IN default").show()</a:t>
             </a:r>
           </a:p>
         </p:txBody>
@@ -8755,7 +8755,7 @@
                 <a:ea typeface="Pretendard"/>
                 <a:cs typeface="Pretendard"/>
               </a:rPr>
-              <a:t>SQL 결과가 앞 챕터의 API 결과와 완전히 같아야 한다 — 값이 다르면 조인 조건이나 집계 대상을 다시</a:t>
+              <a:t>결과 monitor 930000·3 / keyboard 315000·7 / mouse 69000·3 — 앞 메뉴의 sales 와 같아야</a:t>
             </a:r>
           </a:p>
         </p:txBody>
@@ -8892,7 +8892,7 @@
       <p:grpSpPr/>
       <p:sp>
         <p:nvSpPr>
-          <p:cNvPr id="2" name="Oval 1"/>
+          <p:cNvPr id="2" name="deckgen:decor"/>
           <p:cNvSpPr/>
           <p:nvPr/>
         </p:nvSpPr>
@@ -8922,7 +8922,7 @@
       </p:sp>
       <p:sp>
         <p:nvSpPr>
-          <p:cNvPr id="3" name="Oval 2"/>
+          <p:cNvPr id="3" name="deckgen:decor"/>
           <p:cNvSpPr/>
           <p:nvPr/>
         </p:nvSpPr>
@@ -8952,7 +8952,7 @@
       </p:sp>
       <p:sp>
         <p:nvSpPr>
-          <p:cNvPr id="4" name="Oval 3"/>
+          <p:cNvPr id="4" name="deckgen:decor"/>
           <p:cNvSpPr/>
           <p:nvPr/>
         </p:nvSpPr>
@@ -9016,7 +9016,7 @@
                 <a:ea typeface="Pretendard"/>
                 <a:cs typeface="Pretendard"/>
               </a:rPr>
-              <a:t>3단계</a:t>
+              <a:t>일부러 실패시키기</a:t>
             </a:r>
           </a:p>
         </p:txBody>
@@ -9057,7 +9057,7 @@
                 <a:ea typeface="Pretendard"/>
                 <a:cs typeface="Pretendard"/>
               </a:rPr>
-              <a:t>두 explain() 을 나란히 — 같은 엔진의 증거</a:t>
+              <a:t>IN default 를 빼면 — AssertionError</a:t>
             </a:r>
           </a:p>
         </p:txBody>
@@ -9100,8 +9100,8 @@
         </p:nvSpPr>
         <p:spPr>
           <a:xfrm>
-            <a:off x="1143000" y="2857500"/>
-            <a:ext cx="7372350" cy="533400"/>
+            <a:off x="1143000" y="3067050"/>
+            <a:ext cx="16002000" cy="438150"/>
           </a:xfrm>
           <a:prstGeom prst="rect">
             <a:avLst/>
@@ -9116,52 +9116,11 @@
           <a:p>
             <a:pPr algn="l">
               <a:lnSpc>
-                <a:spcPct val="110000"/>
-              </a:lnSpc>
-            </a:pPr>
-            <a:r>
-              <a:rPr sz="3150" b="1">
-                <a:solidFill>
-                  <a:srgbClr val="0D2B5E"/>
-                </a:solidFill>
-                <a:latin typeface="Pretendard"/>
-                <a:ea typeface="Pretendard"/>
-                <a:cs typeface="Pretendard"/>
-              </a:rPr>
-              <a:t>sql_sales.explain()</a:t>
-            </a:r>
-          </a:p>
-        </p:txBody>
-      </p:sp>
-      <p:sp>
-        <p:nvSpPr>
-          <p:cNvPr id="9" name="TextBox 8"/>
-          <p:cNvSpPr txBox="1"/>
-          <p:nvPr/>
-        </p:nvSpPr>
-        <p:spPr>
-          <a:xfrm>
-            <a:off x="1143000" y="3467100"/>
-            <a:ext cx="7372350" cy="876300"/>
-          </a:xfrm>
-          <a:prstGeom prst="rect">
-            <a:avLst/>
-          </a:prstGeom>
-          <a:noFill/>
-        </p:spPr>
-        <p:txBody>
-          <a:bodyPr wrap="square" lIns="0" rIns="0" tIns="0" bIns="0" anchor="t">
-            <a:spAutoFit/>
-          </a:bodyPr>
-          <a:lstStyle/>
-          <a:p>
-            <a:pPr algn="l">
-              <a:lnSpc>
-                <a:spcPct val="146000"/>
-              </a:lnSpc>
-            </a:pPr>
-            <a:r>
-              <a:rPr sz="2250" b="0">
+                <a:spcPct val="130000"/>
+              </a:lnSpc>
+            </a:pPr>
+            <a:r>
+              <a:rPr sz="2550" b="1">
                 <a:solidFill>
                   <a:srgbClr val="3D3D3D"/>
                 </a:solidFill>
@@ -9169,25 +9128,25 @@
                 <a:ea typeface="Pretendard"/>
                 <a:cs typeface="Pretendard"/>
               </a:rPr>
-              <a:t>SQL 문장에서 나온 Physical Plan</a:t>
-            </a:r>
-          </a:p>
-        </p:txBody>
-      </p:sp>
-      <p:sp>
-        <p:nvSpPr>
-          <p:cNvPr id="10" name="Rounded Rectangle 9"/>
-          <p:cNvSpPr/>
-          <p:nvPr/>
-        </p:nvSpPr>
-        <p:spPr>
-          <a:xfrm>
-            <a:off x="1143000" y="4610100"/>
-            <a:ext cx="7372350" cy="2857500"/>
+              <a:t>SHOW VIEWS IN default 결과: namespace 빈칸 · orders_v · products_v · isTemporary true</a:t>
+            </a:r>
+          </a:p>
+        </p:txBody>
+      </p:sp>
+      <p:sp>
+        <p:nvSpPr>
+          <p:cNvPr id="9" name="Rounded Rectangle 8"/>
+          <p:cNvSpPr/>
+          <p:nvPr/>
+        </p:nvSpPr>
+        <p:spPr>
+          <a:xfrm>
+            <a:off x="1143000" y="3924300"/>
+            <a:ext cx="2895600" cy="3143250"/>
           </a:xfrm>
           <a:prstGeom prst="roundRect">
             <a:avLst>
-              <a:gd name="adj" fmla="val 1666"/>
+              <a:gd name="adj" fmla="val 1644"/>
             </a:avLst>
           </a:prstGeom>
           <a:solidFill>
@@ -9210,14 +9169,14 @@
       </p:sp>
       <p:sp>
         <p:nvSpPr>
-          <p:cNvPr id="11" name="Rectangle 10"/>
-          <p:cNvSpPr/>
-          <p:nvPr/>
-        </p:nvSpPr>
-        <p:spPr>
-          <a:xfrm>
-            <a:off x="1390650" y="4838700"/>
-            <a:ext cx="2152015" cy="599122"/>
+          <p:cNvPr id="10" name="Rectangle 9"/>
+          <p:cNvSpPr/>
+          <p:nvPr/>
+        </p:nvSpPr>
+        <p:spPr>
+          <a:xfrm>
+            <a:off x="1143000" y="3924300"/>
+            <a:ext cx="2895600" cy="914400"/>
           </a:xfrm>
           <a:prstGeom prst="rect">
             <a:avLst/>
@@ -9240,41 +9199,100 @@
       </p:sp>
       <p:sp>
         <p:nvSpPr>
+          <p:cNvPr id="11" name="TextBox 10"/>
+          <p:cNvSpPr txBox="1"/>
+          <p:nvPr/>
+        </p:nvSpPr>
+        <p:spPr>
+          <a:xfrm>
+            <a:off x="1143000" y="4171950"/>
+            <a:ext cx="2895600" cy="419100"/>
+          </a:xfrm>
+          <a:prstGeom prst="rect">
+            <a:avLst/>
+          </a:prstGeom>
+          <a:noFill/>
+        </p:spPr>
+        <p:txBody>
+          <a:bodyPr wrap="square" lIns="0" rIns="0" tIns="0" bIns="0" anchor="t">
+            <a:spAutoFit/>
+          </a:bodyPr>
+          <a:lstStyle/>
+          <a:p>
+            <a:pPr algn="ctr">
+              <a:lnSpc>
+                <a:spcPct val="100000"/>
+              </a:lnSpc>
+            </a:pPr>
+            <a:r>
+              <a:rPr sz="2475" b="1">
+                <a:solidFill>
+                  <a:srgbClr val="FFFFFF"/>
+                </a:solidFill>
+                <a:latin typeface="Pretendard"/>
+                <a:ea typeface="Pretendard"/>
+                <a:cs typeface="Pretendard"/>
+              </a:rPr>
+              <a:t>1. IN default 없이</a:t>
+            </a:r>
+          </a:p>
+        </p:txBody>
+      </p:sp>
+      <p:sp>
+        <p:nvSpPr>
           <p:cNvPr id="12" name="TextBox 11"/>
           <p:cNvSpPr txBox="1"/>
           <p:nvPr/>
         </p:nvSpPr>
         <p:spPr>
           <a:xfrm>
-            <a:off x="1390650" y="4838700"/>
-            <a:ext cx="2152015" cy="599122"/>
-          </a:xfrm>
-          <a:prstGeom prst="rect">
-            <a:avLst/>
-          </a:prstGeom>
-          <a:noFill/>
-        </p:spPr>
-        <p:txBody>
-          <a:bodyPr wrap="square" lIns="0" rIns="0" tIns="0" bIns="0" anchor="ctr">
+            <a:off x="1352550" y="5143500"/>
+            <a:ext cx="2476500" cy="1524000"/>
+          </a:xfrm>
+          <a:prstGeom prst="rect">
+            <a:avLst/>
+          </a:prstGeom>
+          <a:noFill/>
+        </p:spPr>
+        <p:txBody>
+          <a:bodyPr wrap="square" lIns="0" rIns="0" tIns="0" bIns="0" anchor="t">
             <a:spAutoFit/>
           </a:bodyPr>
           <a:lstStyle/>
           <a:p>
             <a:pPr algn="ctr">
               <a:lnSpc>
-                <a:spcPct val="100000"/>
-              </a:lnSpc>
-            </a:pPr>
-            <a:r>
-              <a:rPr sz="2025" b="1">
-                <a:solidFill>
-                  <a:srgbClr val="FFFFFF"/>
-                </a:solidFill>
-                <a:latin typeface="Pretendard"/>
-                <a:ea typeface="Pretendard"/>
-                <a:cs typeface="Pretendard"/>
-              </a:rPr>
-              <a:t>Join</a:t>
+                <a:spcPct val="146000"/>
+              </a:lnSpc>
+            </a:pPr>
+            <a:r>
+              <a:rPr sz="2100" b="0">
+                <a:solidFill>
+                  <a:srgbClr val="3D3D3D"/>
+                </a:solidFill>
+                <a:latin typeface="Pretendard"/>
+                <a:ea typeface="Pretendard"/>
+                <a:cs typeface="Pretendard"/>
+              </a:rPr>
+              <a:t>spark.sql(</a:t>
+            </a:r>
+          </a:p>
+          <a:p>
+            <a:pPr algn="ctr">
+              <a:lnSpc>
+                <a:spcPct val="146000"/>
+              </a:lnSpc>
+            </a:pPr>
+            <a:r>
+              <a:rPr sz="2100" b="0">
+                <a:solidFill>
+                  <a:srgbClr val="3D3D3D"/>
+                </a:solidFill>
+                <a:latin typeface="Pretendard"/>
+                <a:ea typeface="Pretendard"/>
+                <a:cs typeface="Pretendard"/>
+              </a:rPr>
+              <a:t>"SHOW VIEWS")</a:t>
             </a:r>
           </a:p>
         </p:txBody>
@@ -9287,12 +9305,12 @@
         </p:nvSpPr>
         <p:spPr>
           <a:xfrm>
-            <a:off x="1390650" y="5583555"/>
-            <a:ext cx="2152015" cy="1214438"/>
+            <a:off x="4419600" y="3924300"/>
+            <a:ext cx="2895600" cy="3143250"/>
           </a:xfrm>
           <a:prstGeom prst="roundRect">
             <a:avLst>
-              <a:gd name="adj" fmla="val 3921"/>
+              <a:gd name="adj" fmla="val 1644"/>
             </a:avLst>
           </a:prstGeom>
           <a:solidFill>
@@ -9315,57 +9333,16 @@
       </p:sp>
       <p:sp>
         <p:nvSpPr>
-          <p:cNvPr id="14" name="TextBox 13"/>
-          <p:cNvSpPr txBox="1"/>
-          <p:nvPr/>
-        </p:nvSpPr>
-        <p:spPr>
-          <a:xfrm>
-            <a:off x="1524000" y="5583555"/>
-            <a:ext cx="1885315" cy="1214438"/>
-          </a:xfrm>
-          <a:prstGeom prst="rect">
-            <a:avLst/>
-          </a:prstGeom>
-          <a:noFill/>
-        </p:spPr>
-        <p:txBody>
-          <a:bodyPr wrap="square" lIns="0" rIns="0" tIns="0" bIns="0" anchor="ctr">
-            <a:spAutoFit/>
-          </a:bodyPr>
-          <a:lstStyle/>
-          <a:p>
-            <a:pPr algn="ctr">
-              <a:lnSpc>
-                <a:spcPct val="135000"/>
-              </a:lnSpc>
-            </a:pPr>
-            <a:r>
-              <a:rPr sz="1500" b="0">
-                <a:solidFill>
-                  <a:srgbClr val="3D3D3D"/>
-                </a:solidFill>
-                <a:latin typeface="Pretendard"/>
-                <a:ea typeface="Pretendard"/>
-                <a:cs typeface="Pretendard"/>
-              </a:rPr>
-              <a:t>Broadcast</a:t>
-            </a:r>
-          </a:p>
-        </p:txBody>
-      </p:sp>
-      <p:sp>
-        <p:nvSpPr>
-          <p:cNvPr id="15" name="Right Arrow 14"/>
-          <p:cNvSpPr/>
-          <p:nvPr/>
-        </p:nvSpPr>
-        <p:spPr>
-          <a:xfrm>
-            <a:off x="3561715" y="5049202"/>
-            <a:ext cx="172402" cy="178118"/>
-          </a:xfrm>
-          <a:prstGeom prst="rightArrow">
+          <p:cNvPr id="14" name="Rectangle 13"/>
+          <p:cNvSpPr/>
+          <p:nvPr/>
+        </p:nvSpPr>
+        <p:spPr>
+          <a:xfrm>
+            <a:off x="4419600" y="3924300"/>
+            <a:ext cx="2895600" cy="914400"/>
+          </a:xfrm>
+          <a:prstGeom prst="rect">
             <a:avLst/>
           </a:prstGeom>
           <a:solidFill>
@@ -9386,52 +9363,22 @@
       </p:sp>
       <p:sp>
         <p:nvSpPr>
-          <p:cNvPr id="16" name="Rectangle 15"/>
-          <p:cNvSpPr/>
-          <p:nvPr/>
-        </p:nvSpPr>
-        <p:spPr>
-          <a:xfrm>
-            <a:off x="3753167" y="4838700"/>
-            <a:ext cx="2152015" cy="599122"/>
-          </a:xfrm>
-          <a:prstGeom prst="rect">
-            <a:avLst/>
-          </a:prstGeom>
-          <a:solidFill>
-            <a:srgbClr val="1E5BC6"/>
-          </a:solidFill>
-          <a:ln>
-            <a:noFill/>
-          </a:ln>
-          <a:effectLst/>
-        </p:spPr>
-        <p:txBody>
-          <a:bodyPr rtlCol="0" anchor="ctr" wrap="square"/>
-          <a:lstStyle/>
-          <a:p>
-            <a:pPr algn="ctr"/>
-          </a:p>
-        </p:txBody>
-      </p:sp>
-      <p:sp>
-        <p:nvSpPr>
-          <p:cNvPr id="17" name="TextBox 16"/>
-          <p:cNvSpPr txBox="1"/>
-          <p:nvPr/>
-        </p:nvSpPr>
-        <p:spPr>
-          <a:xfrm>
-            <a:off x="3753167" y="4838700"/>
-            <a:ext cx="2152015" cy="599122"/>
-          </a:xfrm>
-          <a:prstGeom prst="rect">
-            <a:avLst/>
-          </a:prstGeom>
-          <a:noFill/>
-        </p:spPr>
-        <p:txBody>
-          <a:bodyPr wrap="square" lIns="0" rIns="0" tIns="0" bIns="0" anchor="ctr">
+          <p:cNvPr id="15" name="TextBox 14"/>
+          <p:cNvSpPr txBox="1"/>
+          <p:nvPr/>
+        </p:nvSpPr>
+        <p:spPr>
+          <a:xfrm>
+            <a:off x="4419600" y="4171950"/>
+            <a:ext cx="2895600" cy="419100"/>
+          </a:xfrm>
+          <a:prstGeom prst="rect">
+            <a:avLst/>
+          </a:prstGeom>
+          <a:noFill/>
+        </p:spPr>
+        <p:txBody>
+          <a:bodyPr wrap="square" lIns="0" rIns="0" tIns="0" bIns="0" anchor="t">
             <a:spAutoFit/>
           </a:bodyPr>
           <a:lstStyle/>
@@ -9442,7 +9389,7 @@
               </a:lnSpc>
             </a:pPr>
             <a:r>
-              <a:rPr sz="2025" b="1">
+              <a:rPr sz="2475" b="1">
                 <a:solidFill>
                   <a:srgbClr val="FFFFFF"/>
                 </a:solidFill>
@@ -9450,25 +9397,84 @@
                 <a:ea typeface="Pretendard"/>
                 <a:cs typeface="Pretendard"/>
               </a:rPr>
-              <a:t>HashAggregate</a:t>
-            </a:r>
-          </a:p>
-        </p:txBody>
-      </p:sp>
-      <p:sp>
-        <p:nvSpPr>
-          <p:cNvPr id="18" name="Rounded Rectangle 17"/>
-          <p:cNvSpPr/>
-          <p:nvPr/>
-        </p:nvSpPr>
-        <p:spPr>
-          <a:xfrm>
-            <a:off x="3753167" y="5583555"/>
-            <a:ext cx="2152015" cy="1214438"/>
+              <a:t>2. 오류</a:t>
+            </a:r>
+          </a:p>
+        </p:txBody>
+      </p:sp>
+      <p:sp>
+        <p:nvSpPr>
+          <p:cNvPr id="16" name="TextBox 15"/>
+          <p:cNvSpPr txBox="1"/>
+          <p:nvPr/>
+        </p:nvSpPr>
+        <p:spPr>
+          <a:xfrm>
+            <a:off x="4629150" y="5143500"/>
+            <a:ext cx="2476500" cy="1524000"/>
+          </a:xfrm>
+          <a:prstGeom prst="rect">
+            <a:avLst/>
+          </a:prstGeom>
+          <a:noFill/>
+        </p:spPr>
+        <p:txBody>
+          <a:bodyPr wrap="square" lIns="0" rIns="0" tIns="0" bIns="0" anchor="t">
+            <a:spAutoFit/>
+          </a:bodyPr>
+          <a:lstStyle/>
+          <a:p>
+            <a:pPr algn="ctr">
+              <a:lnSpc>
+                <a:spcPct val="146000"/>
+              </a:lnSpc>
+            </a:pPr>
+            <a:r>
+              <a:rPr sz="2100" b="0">
+                <a:solidFill>
+                  <a:srgbClr val="3D3D3D"/>
+                </a:solidFill>
+                <a:latin typeface="Pretendard"/>
+                <a:ea typeface="Pretendard"/>
+                <a:cs typeface="Pretendard"/>
+              </a:rPr>
+              <a:t>AssertionError:</a:t>
+            </a:r>
+          </a:p>
+          <a:p>
+            <a:pPr algn="ctr">
+              <a:lnSpc>
+                <a:spcPct val="146000"/>
+              </a:lnSpc>
+            </a:pPr>
+            <a:r>
+              <a:rPr sz="2100" b="0">
+                <a:solidFill>
+                  <a:srgbClr val="3D3D3D"/>
+                </a:solidFill>
+                <a:latin typeface="Pretendard"/>
+                <a:ea typeface="Pretendard"/>
+                <a:cs typeface="Pretendard"/>
+              </a:rPr>
+              <a:t>assertion failed</a:t>
+            </a:r>
+          </a:p>
+        </p:txBody>
+      </p:sp>
+      <p:sp>
+        <p:nvSpPr>
+          <p:cNvPr id="17" name="Rounded Rectangle 16"/>
+          <p:cNvSpPr/>
+          <p:nvPr/>
+        </p:nvSpPr>
+        <p:spPr>
+          <a:xfrm>
+            <a:off x="7696200" y="3924300"/>
+            <a:ext cx="2895600" cy="3143250"/>
           </a:xfrm>
           <a:prstGeom prst="roundRect">
             <a:avLst>
-              <a:gd name="adj" fmla="val 3921"/>
+              <a:gd name="adj" fmla="val 1644"/>
             </a:avLst>
           </a:prstGeom>
           <a:solidFill>
@@ -9491,61 +9497,20 @@
       </p:sp>
       <p:sp>
         <p:nvSpPr>
-          <p:cNvPr id="19" name="TextBox 18"/>
-          <p:cNvSpPr txBox="1"/>
-          <p:nvPr/>
-        </p:nvSpPr>
-        <p:spPr>
-          <a:xfrm>
-            <a:off x="3886517" y="5583555"/>
-            <a:ext cx="1885315" cy="1214438"/>
-          </a:xfrm>
-          <a:prstGeom prst="rect">
-            <a:avLst/>
-          </a:prstGeom>
-          <a:noFill/>
-        </p:spPr>
-        <p:txBody>
-          <a:bodyPr wrap="square" lIns="0" rIns="0" tIns="0" bIns="0" anchor="ctr">
-            <a:spAutoFit/>
-          </a:bodyPr>
-          <a:lstStyle/>
-          <a:p>
-            <a:pPr algn="ctr">
-              <a:lnSpc>
-                <a:spcPct val="135000"/>
-              </a:lnSpc>
-            </a:pPr>
-            <a:r>
-              <a:rPr sz="1500" b="0">
-                <a:solidFill>
-                  <a:srgbClr val="3D3D3D"/>
-                </a:solidFill>
-                <a:latin typeface="Pretendard"/>
-                <a:ea typeface="Pretendard"/>
-                <a:cs typeface="Pretendard"/>
-              </a:rPr>
-              <a:t>GROUP BY</a:t>
-            </a:r>
-          </a:p>
-        </p:txBody>
-      </p:sp>
-      <p:sp>
-        <p:nvSpPr>
-          <p:cNvPr id="20" name="Right Arrow 19"/>
-          <p:cNvSpPr/>
-          <p:nvPr/>
-        </p:nvSpPr>
-        <p:spPr>
-          <a:xfrm>
-            <a:off x="5924232" y="5049202"/>
-            <a:ext cx="172402" cy="178118"/>
-          </a:xfrm>
-          <a:prstGeom prst="rightArrow">
-            <a:avLst/>
-          </a:prstGeom>
-          <a:solidFill>
-            <a:srgbClr val="1E5BC6"/>
+          <p:cNvPr id="18" name="Rectangle 17"/>
+          <p:cNvSpPr/>
+          <p:nvPr/>
+        </p:nvSpPr>
+        <p:spPr>
+          <a:xfrm>
+            <a:off x="7696200" y="3924300"/>
+            <a:ext cx="2895600" cy="914400"/>
+          </a:xfrm>
+          <a:prstGeom prst="rect">
+            <a:avLst/>
+          </a:prstGeom>
+          <a:solidFill>
+            <a:srgbClr val="0D2B5E"/>
           </a:solidFill>
           <a:ln>
             <a:noFill/>
@@ -9562,52 +9527,22 @@
       </p:sp>
       <p:sp>
         <p:nvSpPr>
-          <p:cNvPr id="21" name="Rectangle 20"/>
-          <p:cNvSpPr/>
-          <p:nvPr/>
-        </p:nvSpPr>
-        <p:spPr>
-          <a:xfrm>
-            <a:off x="6115685" y="4838700"/>
-            <a:ext cx="2152015" cy="599122"/>
-          </a:xfrm>
-          <a:prstGeom prst="rect">
-            <a:avLst/>
-          </a:prstGeom>
-          <a:solidFill>
-            <a:srgbClr val="0D2B5E"/>
-          </a:solidFill>
-          <a:ln>
-            <a:noFill/>
-          </a:ln>
-          <a:effectLst/>
-        </p:spPr>
-        <p:txBody>
-          <a:bodyPr rtlCol="0" anchor="ctr" wrap="square"/>
-          <a:lstStyle/>
-          <a:p>
-            <a:pPr algn="ctr"/>
-          </a:p>
-        </p:txBody>
-      </p:sp>
-      <p:sp>
-        <p:nvSpPr>
-          <p:cNvPr id="22" name="TextBox 21"/>
-          <p:cNvSpPr txBox="1"/>
-          <p:nvPr/>
-        </p:nvSpPr>
-        <p:spPr>
-          <a:xfrm>
-            <a:off x="6115685" y="4838700"/>
-            <a:ext cx="2152015" cy="599122"/>
-          </a:xfrm>
-          <a:prstGeom prst="rect">
-            <a:avLst/>
-          </a:prstGeom>
-          <a:noFill/>
-        </p:spPr>
-        <p:txBody>
-          <a:bodyPr wrap="square" lIns="0" rIns="0" tIns="0" bIns="0" anchor="ctr">
+          <p:cNvPr id="19" name="TextBox 18"/>
+          <p:cNvSpPr txBox="1"/>
+          <p:nvPr/>
+        </p:nvSpPr>
+        <p:spPr>
+          <a:xfrm>
+            <a:off x="7696200" y="4171950"/>
+            <a:ext cx="2895600" cy="419100"/>
+          </a:xfrm>
+          <a:prstGeom prst="rect">
+            <a:avLst/>
+          </a:prstGeom>
+          <a:noFill/>
+        </p:spPr>
+        <p:txBody>
+          <a:bodyPr wrap="square" lIns="0" rIns="0" tIns="0" bIns="0" anchor="t">
             <a:spAutoFit/>
           </a:bodyPr>
           <a:lstStyle/>
@@ -9618,7 +9553,7 @@
               </a:lnSpc>
             </a:pPr>
             <a:r>
-              <a:rPr sz="2025" b="1">
+              <a:rPr sz="2475" b="1">
                 <a:solidFill>
                   <a:srgbClr val="FFFFFF"/>
                 </a:solidFill>
@@ -9626,25 +9561,84 @@
                 <a:ea typeface="Pretendard"/>
                 <a:cs typeface="Pretendard"/>
               </a:rPr>
-              <a:t>Sort</a:t>
-            </a:r>
-          </a:p>
-        </p:txBody>
-      </p:sp>
-      <p:sp>
-        <p:nvSpPr>
-          <p:cNvPr id="23" name="Rounded Rectangle 22"/>
-          <p:cNvSpPr/>
-          <p:nvPr/>
-        </p:nvSpPr>
-        <p:spPr>
-          <a:xfrm>
-            <a:off x="6115685" y="5583555"/>
-            <a:ext cx="2152015" cy="1214438"/>
+              <a:t>3. 원인</a:t>
+            </a:r>
+          </a:p>
+        </p:txBody>
+      </p:sp>
+      <p:sp>
+        <p:nvSpPr>
+          <p:cNvPr id="20" name="TextBox 19"/>
+          <p:cNvSpPr txBox="1"/>
+          <p:nvPr/>
+        </p:nvSpPr>
+        <p:spPr>
+          <a:xfrm>
+            <a:off x="7905750" y="5143500"/>
+            <a:ext cx="2476500" cy="1524000"/>
+          </a:xfrm>
+          <a:prstGeom prst="rect">
+            <a:avLst/>
+          </a:prstGeom>
+          <a:noFill/>
+        </p:spPr>
+        <p:txBody>
+          <a:bodyPr wrap="square" lIns="0" rIns="0" tIns="0" bIns="0" anchor="t">
+            <a:spAutoFit/>
+          </a:bodyPr>
+          <a:lstStyle/>
+          <a:p>
+            <a:pPr algn="ctr">
+              <a:lnSpc>
+                <a:spcPct val="146000"/>
+              </a:lnSpc>
+            </a:pPr>
+            <a:r>
+              <a:rPr sz="2100" b="0">
+                <a:solidFill>
+                  <a:srgbClr val="3D3D3D"/>
+                </a:solidFill>
+                <a:latin typeface="Pretendard"/>
+                <a:ea typeface="Pretendard"/>
+                <a:cs typeface="Pretendard"/>
+              </a:rPr>
+              <a:t>Iceberg 확장이</a:t>
+            </a:r>
+          </a:p>
+          <a:p>
+            <a:pPr algn="ctr">
+              <a:lnSpc>
+                <a:spcPct val="146000"/>
+              </a:lnSpc>
+            </a:pPr>
+            <a:r>
+              <a:rPr sz="2100" b="0">
+                <a:solidFill>
+                  <a:srgbClr val="3D3D3D"/>
+                </a:solidFill>
+                <a:latin typeface="Pretendard"/>
+                <a:ea typeface="Pretendard"/>
+                <a:cs typeface="Pretendard"/>
+              </a:rPr>
+              <a:t>뷰 명령을 가로챔</a:t>
+            </a:r>
+          </a:p>
+        </p:txBody>
+      </p:sp>
+      <p:sp>
+        <p:nvSpPr>
+          <p:cNvPr id="21" name="Rounded Rectangle 20"/>
+          <p:cNvSpPr/>
+          <p:nvPr/>
+        </p:nvSpPr>
+        <p:spPr>
+          <a:xfrm>
+            <a:off x="10972800" y="3924300"/>
+            <a:ext cx="2895600" cy="3143250"/>
           </a:xfrm>
           <a:prstGeom prst="roundRect">
             <a:avLst>
-              <a:gd name="adj" fmla="val 3921"/>
+              <a:gd name="adj" fmla="val 1644"/>
             </a:avLst>
           </a:prstGeom>
           <a:solidFill>
@@ -9667,33 +9661,104 @@
       </p:sp>
       <p:sp>
         <p:nvSpPr>
+          <p:cNvPr id="22" name="Rectangle 21"/>
+          <p:cNvSpPr/>
+          <p:nvPr/>
+        </p:nvSpPr>
+        <p:spPr>
+          <a:xfrm>
+            <a:off x="10972800" y="3924300"/>
+            <a:ext cx="2895600" cy="914400"/>
+          </a:xfrm>
+          <a:prstGeom prst="rect">
+            <a:avLst/>
+          </a:prstGeom>
+          <a:solidFill>
+            <a:srgbClr val="1E5BC6"/>
+          </a:solidFill>
+          <a:ln>
+            <a:noFill/>
+          </a:ln>
+          <a:effectLst/>
+        </p:spPr>
+        <p:txBody>
+          <a:bodyPr rtlCol="0" anchor="ctr" wrap="square"/>
+          <a:lstStyle/>
+          <a:p>
+            <a:pPr algn="ctr"/>
+          </a:p>
+        </p:txBody>
+      </p:sp>
+      <p:sp>
+        <p:nvSpPr>
+          <p:cNvPr id="23" name="TextBox 22"/>
+          <p:cNvSpPr txBox="1"/>
+          <p:nvPr/>
+        </p:nvSpPr>
+        <p:spPr>
+          <a:xfrm>
+            <a:off x="10972800" y="4171950"/>
+            <a:ext cx="2895600" cy="419100"/>
+          </a:xfrm>
+          <a:prstGeom prst="rect">
+            <a:avLst/>
+          </a:prstGeom>
+          <a:noFill/>
+        </p:spPr>
+        <p:txBody>
+          <a:bodyPr wrap="square" lIns="0" rIns="0" tIns="0" bIns="0" anchor="t">
+            <a:spAutoFit/>
+          </a:bodyPr>
+          <a:lstStyle/>
+          <a:p>
+            <a:pPr algn="ctr">
+              <a:lnSpc>
+                <a:spcPct val="100000"/>
+              </a:lnSpc>
+            </a:pPr>
+            <a:r>
+              <a:rPr sz="2475" b="1">
+                <a:solidFill>
+                  <a:srgbClr val="FFFFFF"/>
+                </a:solidFill>
+                <a:latin typeface="Pretendard"/>
+                <a:ea typeface="Pretendard"/>
+                <a:cs typeface="Pretendard"/>
+              </a:rPr>
+              <a:t>4. 뷰는 무사</a:t>
+            </a:r>
+          </a:p>
+        </p:txBody>
+      </p:sp>
+      <p:sp>
+        <p:nvSpPr>
           <p:cNvPr id="24" name="TextBox 23"/>
           <p:cNvSpPr txBox="1"/>
           <p:nvPr/>
         </p:nvSpPr>
         <p:spPr>
           <a:xfrm>
-            <a:off x="6249035" y="5583555"/>
-            <a:ext cx="1885315" cy="1214438"/>
-          </a:xfrm>
-          <a:prstGeom prst="rect">
-            <a:avLst/>
-          </a:prstGeom>
-          <a:noFill/>
-        </p:spPr>
-        <p:txBody>
-          <a:bodyPr wrap="square" lIns="0" rIns="0" tIns="0" bIns="0" anchor="ctr">
+            <a:off x="11182350" y="5143500"/>
+            <a:ext cx="2476500" cy="1524000"/>
+          </a:xfrm>
+          <a:prstGeom prst="rect">
+            <a:avLst/>
+          </a:prstGeom>
+          <a:noFill/>
+        </p:spPr>
+        <p:txBody>
+          <a:bodyPr wrap="square" lIns="0" rIns="0" tIns="0" bIns="0" anchor="t">
             <a:spAutoFit/>
           </a:bodyPr>
           <a:lstStyle/>
           <a:p>
             <a:pPr algn="ctr">
               <a:lnSpc>
-                <a:spcPct val="135000"/>
-              </a:lnSpc>
-            </a:pPr>
-            <a:r>
-              <a:rPr sz="1500" b="0">
+                <a:spcPct val="146000"/>
+              </a:lnSpc>
+            </a:pPr>
+            <a:r>
+              <a:rPr sz="2100" b="0">
                 <a:solidFill>
                   <a:srgbClr val="3D3D3D"/>
                 </a:solidFill>
@@ -9701,81 +9766,17 @@
                 <a:ea typeface="Pretendard"/>
                 <a:cs typeface="Pretendard"/>
               </a:rPr>
-              <a:t>ORDER BY</a:t>
-            </a:r>
-          </a:p>
-        </p:txBody>
-      </p:sp>
-      <p:sp>
-        <p:nvSpPr>
-          <p:cNvPr id="25" name="TextBox 24"/>
-          <p:cNvSpPr txBox="1"/>
-          <p:nvPr/>
-        </p:nvSpPr>
-        <p:spPr>
-          <a:xfrm>
-            <a:off x="9772650" y="2857500"/>
-            <a:ext cx="7372350" cy="533400"/>
-          </a:xfrm>
-          <a:prstGeom prst="rect">
-            <a:avLst/>
-          </a:prstGeom>
-          <a:noFill/>
-        </p:spPr>
-        <p:txBody>
-          <a:bodyPr wrap="square" lIns="0" rIns="0" tIns="0" bIns="0" anchor="t">
-            <a:spAutoFit/>
-          </a:bodyPr>
-          <a:lstStyle/>
-          <a:p>
-            <a:pPr algn="l">
-              <a:lnSpc>
-                <a:spcPct val="110000"/>
-              </a:lnSpc>
-            </a:pPr>
-            <a:r>
-              <a:rPr sz="3150" b="1">
-                <a:solidFill>
-                  <a:srgbClr val="0D2B5E"/>
-                </a:solidFill>
-                <a:latin typeface="Pretendard"/>
-                <a:ea typeface="Pretendard"/>
-                <a:cs typeface="Pretendard"/>
-              </a:rPr>
-              <a:t>sales.explain()</a:t>
-            </a:r>
-          </a:p>
-        </p:txBody>
-      </p:sp>
-      <p:sp>
-        <p:nvSpPr>
-          <p:cNvPr id="26" name="TextBox 25"/>
-          <p:cNvSpPr txBox="1"/>
-          <p:nvPr/>
-        </p:nvSpPr>
-        <p:spPr>
-          <a:xfrm>
-            <a:off x="9772650" y="3467100"/>
-            <a:ext cx="7372350" cy="876300"/>
-          </a:xfrm>
-          <a:prstGeom prst="rect">
-            <a:avLst/>
-          </a:prstGeom>
-          <a:noFill/>
-        </p:spPr>
-        <p:txBody>
-          <a:bodyPr wrap="square" lIns="0" rIns="0" tIns="0" bIns="0" anchor="t">
-            <a:spAutoFit/>
-          </a:bodyPr>
-          <a:lstStyle/>
-          <a:p>
-            <a:pPr algn="l">
+              <a:t>임시 뷰는</a:t>
+            </a:r>
+          </a:p>
+          <a:p>
+            <a:pPr algn="ctr">
               <a:lnSpc>
                 <a:spcPct val="146000"/>
               </a:lnSpc>
             </a:pPr>
             <a:r>
-              <a:rPr sz="2250" b="0">
+              <a:rPr sz="2100" b="0">
                 <a:solidFill>
                   <a:srgbClr val="3D3D3D"/>
                 </a:solidFill>
@@ -9783,25 +9784,25 @@
                 <a:ea typeface="Pretendard"/>
                 <a:cs typeface="Pretendard"/>
               </a:rPr>
-              <a:t>컬럼 순서·별칭은 달라도 연산 종류·순서가 같으면 같은 계획</a:t>
-            </a:r>
-          </a:p>
-        </p:txBody>
-      </p:sp>
-      <p:sp>
-        <p:nvSpPr>
-          <p:cNvPr id="27" name="Rounded Rectangle 26"/>
-          <p:cNvSpPr/>
-          <p:nvPr/>
-        </p:nvSpPr>
-        <p:spPr>
-          <a:xfrm>
-            <a:off x="9772650" y="4610100"/>
-            <a:ext cx="7372350" cy="2857500"/>
+              <a:t>정상 등록됨</a:t>
+            </a:r>
+          </a:p>
+        </p:txBody>
+      </p:sp>
+      <p:sp>
+        <p:nvSpPr>
+          <p:cNvPr id="25" name="Rounded Rectangle 24"/>
+          <p:cNvSpPr/>
+          <p:nvPr/>
+        </p:nvSpPr>
+        <p:spPr>
+          <a:xfrm>
+            <a:off x="14249400" y="3924300"/>
+            <a:ext cx="2895600" cy="3143250"/>
           </a:xfrm>
           <a:prstGeom prst="roundRect">
             <a:avLst>
-              <a:gd name="adj" fmla="val 1666"/>
+              <a:gd name="adj" fmla="val 1644"/>
             </a:avLst>
           </a:prstGeom>
           <a:solidFill>
@@ -9824,14 +9825,14 @@
       </p:sp>
       <p:sp>
         <p:nvSpPr>
-          <p:cNvPr id="28" name="Rectangle 27"/>
-          <p:cNvSpPr/>
-          <p:nvPr/>
-        </p:nvSpPr>
-        <p:spPr>
-          <a:xfrm>
-            <a:off x="10020300" y="4838700"/>
-            <a:ext cx="2152015" cy="599122"/>
+          <p:cNvPr id="26" name="Rectangle 25"/>
+          <p:cNvSpPr/>
+          <p:nvPr/>
+        </p:nvSpPr>
+        <p:spPr>
+          <a:xfrm>
+            <a:off x="14249400" y="3924300"/>
+            <a:ext cx="2895600" cy="914400"/>
           </a:xfrm>
           <a:prstGeom prst="rect">
             <a:avLst/>
@@ -9854,22 +9855,22 @@
       </p:sp>
       <p:sp>
         <p:nvSpPr>
-          <p:cNvPr id="29" name="TextBox 28"/>
-          <p:cNvSpPr txBox="1"/>
-          <p:nvPr/>
-        </p:nvSpPr>
-        <p:spPr>
-          <a:xfrm>
-            <a:off x="10020300" y="4838700"/>
-            <a:ext cx="2152015" cy="599122"/>
-          </a:xfrm>
-          <a:prstGeom prst="rect">
-            <a:avLst/>
-          </a:prstGeom>
-          <a:noFill/>
-        </p:spPr>
-        <p:txBody>
-          <a:bodyPr wrap="square" lIns="0" rIns="0" tIns="0" bIns="0" anchor="ctr">
+          <p:cNvPr id="27" name="TextBox 26"/>
+          <p:cNvSpPr txBox="1"/>
+          <p:nvPr/>
+        </p:nvSpPr>
+        <p:spPr>
+          <a:xfrm>
+            <a:off x="14249400" y="4171950"/>
+            <a:ext cx="2895600" cy="419100"/>
+          </a:xfrm>
+          <a:prstGeom prst="rect">
+            <a:avLst/>
+          </a:prstGeom>
+          <a:noFill/>
+        </p:spPr>
+        <p:txBody>
+          <a:bodyPr wrap="square" lIns="0" rIns="0" tIns="0" bIns="0" anchor="t">
             <a:spAutoFit/>
           </a:bodyPr>
           <a:lstStyle/>
@@ -9880,7 +9881,7 @@
               </a:lnSpc>
             </a:pPr>
             <a:r>
-              <a:rPr sz="2025" b="1">
+              <a:rPr sz="2475" b="1">
                 <a:solidFill>
                   <a:srgbClr val="FFFFFF"/>
                 </a:solidFill>
@@ -9888,74 +9889,40 @@
                 <a:ea typeface="Pretendard"/>
                 <a:cs typeface="Pretendard"/>
               </a:rPr>
-              <a:t>Join</a:t>
-            </a:r>
-          </a:p>
-        </p:txBody>
-      </p:sp>
-      <p:sp>
-        <p:nvSpPr>
-          <p:cNvPr id="30" name="Rounded Rectangle 29"/>
-          <p:cNvSpPr/>
-          <p:nvPr/>
-        </p:nvSpPr>
-        <p:spPr>
-          <a:xfrm>
-            <a:off x="10020300" y="5583555"/>
-            <a:ext cx="2152015" cy="1214438"/>
-          </a:xfrm>
-          <a:prstGeom prst="roundRect">
-            <a:avLst>
-              <a:gd name="adj" fmla="val 3921"/>
-            </a:avLst>
-          </a:prstGeom>
-          <a:solidFill>
-            <a:srgbClr val="FAFBFD"/>
-          </a:solidFill>
-          <a:ln w="9525">
-            <a:solidFill>
-              <a:srgbClr val="DCE1E8"/>
-            </a:solidFill>
-          </a:ln>
-          <a:effectLst/>
-        </p:spPr>
-        <p:txBody>
-          <a:bodyPr rtlCol="0" anchor="ctr" wrap="square"/>
-          <a:lstStyle/>
-          <a:p>
-            <a:pPr algn="ctr"/>
-          </a:p>
-        </p:txBody>
-      </p:sp>
-      <p:sp>
-        <p:nvSpPr>
-          <p:cNvPr id="31" name="TextBox 30"/>
-          <p:cNvSpPr txBox="1"/>
-          <p:nvPr/>
-        </p:nvSpPr>
-        <p:spPr>
-          <a:xfrm>
-            <a:off x="10153650" y="5583555"/>
-            <a:ext cx="1885315" cy="1214438"/>
-          </a:xfrm>
-          <a:prstGeom prst="rect">
-            <a:avLst/>
-          </a:prstGeom>
-          <a:noFill/>
-        </p:spPr>
-        <p:txBody>
-          <a:bodyPr wrap="square" lIns="0" rIns="0" tIns="0" bIns="0" anchor="ctr">
+              <a:t>5. 처방</a:t>
+            </a:r>
+          </a:p>
+        </p:txBody>
+      </p:sp>
+      <p:sp>
+        <p:nvSpPr>
+          <p:cNvPr id="28" name="TextBox 27"/>
+          <p:cNvSpPr txBox="1"/>
+          <p:nvPr/>
+        </p:nvSpPr>
+        <p:spPr>
+          <a:xfrm>
+            <a:off x="14458950" y="5143500"/>
+            <a:ext cx="2476500" cy="1524000"/>
+          </a:xfrm>
+          <a:prstGeom prst="rect">
+            <a:avLst/>
+          </a:prstGeom>
+          <a:noFill/>
+        </p:spPr>
+        <p:txBody>
+          <a:bodyPr wrap="square" lIns="0" rIns="0" tIns="0" bIns="0" anchor="t">
             <a:spAutoFit/>
           </a:bodyPr>
           <a:lstStyle/>
           <a:p>
             <a:pPr algn="ctr">
               <a:lnSpc>
-                <a:spcPct val="135000"/>
-              </a:lnSpc>
-            </a:pPr>
-            <a:r>
-              <a:rPr sz="1500" b="0">
+                <a:spcPct val="146000"/>
+              </a:lnSpc>
+            </a:pPr>
+            <a:r>
+              <a:rPr sz="2100" b="0">
                 <a:solidFill>
                   <a:srgbClr val="3D3D3D"/>
                 </a:solidFill>
@@ -9963,27 +9930,45 @@
                 <a:ea typeface="Pretendard"/>
                 <a:cs typeface="Pretendard"/>
               </a:rPr>
-              <a:t>Broadcast</a:t>
-            </a:r>
-          </a:p>
-        </p:txBody>
-      </p:sp>
-      <p:sp>
-        <p:nvSpPr>
-          <p:cNvPr id="32" name="Right Arrow 31"/>
-          <p:cNvSpPr/>
-          <p:nvPr/>
-        </p:nvSpPr>
-        <p:spPr>
-          <a:xfrm>
-            <a:off x="12191365" y="5049202"/>
-            <a:ext cx="172402" cy="178118"/>
-          </a:xfrm>
-          <a:prstGeom prst="rightArrow">
-            <a:avLst/>
-          </a:prstGeom>
-          <a:solidFill>
-            <a:srgbClr val="1E5BC6"/>
+              <a:t>SHOW VIEWS</a:t>
+            </a:r>
+          </a:p>
+          <a:p>
+            <a:pPr algn="ctr">
+              <a:lnSpc>
+                <a:spcPct val="146000"/>
+              </a:lnSpc>
+            </a:pPr>
+            <a:r>
+              <a:rPr sz="2100" b="0">
+                <a:solidFill>
+                  <a:srgbClr val="3D3D3D"/>
+                </a:solidFill>
+                <a:latin typeface="Pretendard"/>
+                <a:ea typeface="Pretendard"/>
+                <a:cs typeface="Pretendard"/>
+              </a:rPr>
+              <a:t>IN default</a:t>
+            </a:r>
+          </a:p>
+        </p:txBody>
+      </p:sp>
+      <p:sp>
+        <p:nvSpPr>
+          <p:cNvPr id="29" name="Rectangle 28"/>
+          <p:cNvSpPr/>
+          <p:nvPr/>
+        </p:nvSpPr>
+        <p:spPr>
+          <a:xfrm>
+            <a:off x="1143000" y="8058150"/>
+            <a:ext cx="16002000" cy="9525"/>
+          </a:xfrm>
+          <a:prstGeom prst="rect">
+            <a:avLst/>
+          </a:prstGeom>
+          <a:solidFill>
+            <a:srgbClr val="DCE1E8"/>
           </a:solidFill>
           <a:ln>
             <a:noFill/>
@@ -10000,430 +9985,7 @@
       </p:sp>
       <p:sp>
         <p:nvSpPr>
-          <p:cNvPr id="33" name="Rectangle 32"/>
-          <p:cNvSpPr/>
-          <p:nvPr/>
-        </p:nvSpPr>
-        <p:spPr>
-          <a:xfrm>
-            <a:off x="12382818" y="4838700"/>
-            <a:ext cx="2152015" cy="599122"/>
-          </a:xfrm>
-          <a:prstGeom prst="rect">
-            <a:avLst/>
-          </a:prstGeom>
-          <a:solidFill>
-            <a:srgbClr val="1E5BC6"/>
-          </a:solidFill>
-          <a:ln>
-            <a:noFill/>
-          </a:ln>
-          <a:effectLst/>
-        </p:spPr>
-        <p:txBody>
-          <a:bodyPr rtlCol="0" anchor="ctr" wrap="square"/>
-          <a:lstStyle/>
-          <a:p>
-            <a:pPr algn="ctr"/>
-          </a:p>
-        </p:txBody>
-      </p:sp>
-      <p:sp>
-        <p:nvSpPr>
-          <p:cNvPr id="34" name="TextBox 33"/>
-          <p:cNvSpPr txBox="1"/>
-          <p:nvPr/>
-        </p:nvSpPr>
-        <p:spPr>
-          <a:xfrm>
-            <a:off x="12382818" y="4838700"/>
-            <a:ext cx="2152015" cy="599122"/>
-          </a:xfrm>
-          <a:prstGeom prst="rect">
-            <a:avLst/>
-          </a:prstGeom>
-          <a:noFill/>
-        </p:spPr>
-        <p:txBody>
-          <a:bodyPr wrap="square" lIns="0" rIns="0" tIns="0" bIns="0" anchor="ctr">
-            <a:spAutoFit/>
-          </a:bodyPr>
-          <a:lstStyle/>
-          <a:p>
-            <a:pPr algn="ctr">
-              <a:lnSpc>
-                <a:spcPct val="100000"/>
-              </a:lnSpc>
-            </a:pPr>
-            <a:r>
-              <a:rPr sz="2025" b="1">
-                <a:solidFill>
-                  <a:srgbClr val="FFFFFF"/>
-                </a:solidFill>
-                <a:latin typeface="Pretendard"/>
-                <a:ea typeface="Pretendard"/>
-                <a:cs typeface="Pretendard"/>
-              </a:rPr>
-              <a:t>HashAggregate</a:t>
-            </a:r>
-          </a:p>
-        </p:txBody>
-      </p:sp>
-      <p:sp>
-        <p:nvSpPr>
-          <p:cNvPr id="35" name="Rounded Rectangle 34"/>
-          <p:cNvSpPr/>
-          <p:nvPr/>
-        </p:nvSpPr>
-        <p:spPr>
-          <a:xfrm>
-            <a:off x="12382818" y="5583555"/>
-            <a:ext cx="2152015" cy="1214438"/>
-          </a:xfrm>
-          <a:prstGeom prst="roundRect">
-            <a:avLst>
-              <a:gd name="adj" fmla="val 3921"/>
-            </a:avLst>
-          </a:prstGeom>
-          <a:solidFill>
-            <a:srgbClr val="FAFBFD"/>
-          </a:solidFill>
-          <a:ln w="9525">
-            <a:solidFill>
-              <a:srgbClr val="DCE1E8"/>
-            </a:solidFill>
-          </a:ln>
-          <a:effectLst/>
-        </p:spPr>
-        <p:txBody>
-          <a:bodyPr rtlCol="0" anchor="ctr" wrap="square"/>
-          <a:lstStyle/>
-          <a:p>
-            <a:pPr algn="ctr"/>
-          </a:p>
-        </p:txBody>
-      </p:sp>
-      <p:sp>
-        <p:nvSpPr>
-          <p:cNvPr id="36" name="TextBox 35"/>
-          <p:cNvSpPr txBox="1"/>
-          <p:nvPr/>
-        </p:nvSpPr>
-        <p:spPr>
-          <a:xfrm>
-            <a:off x="12516168" y="5583555"/>
-            <a:ext cx="1885315" cy="1214438"/>
-          </a:xfrm>
-          <a:prstGeom prst="rect">
-            <a:avLst/>
-          </a:prstGeom>
-          <a:noFill/>
-        </p:spPr>
-        <p:txBody>
-          <a:bodyPr wrap="square" lIns="0" rIns="0" tIns="0" bIns="0" anchor="ctr">
-            <a:spAutoFit/>
-          </a:bodyPr>
-          <a:lstStyle/>
-          <a:p>
-            <a:pPr algn="ctr">
-              <a:lnSpc>
-                <a:spcPct val="135000"/>
-              </a:lnSpc>
-            </a:pPr>
-            <a:r>
-              <a:rPr sz="1500" b="0">
-                <a:solidFill>
-                  <a:srgbClr val="3D3D3D"/>
-                </a:solidFill>
-                <a:latin typeface="Pretendard"/>
-                <a:ea typeface="Pretendard"/>
-                <a:cs typeface="Pretendard"/>
-              </a:rPr>
-              <a:t>groupBy</a:t>
-            </a:r>
-          </a:p>
-        </p:txBody>
-      </p:sp>
-      <p:sp>
-        <p:nvSpPr>
-          <p:cNvPr id="37" name="Right Arrow 36"/>
-          <p:cNvSpPr/>
-          <p:nvPr/>
-        </p:nvSpPr>
-        <p:spPr>
-          <a:xfrm>
-            <a:off x="14553882" y="5049202"/>
-            <a:ext cx="172402" cy="178118"/>
-          </a:xfrm>
-          <a:prstGeom prst="rightArrow">
-            <a:avLst/>
-          </a:prstGeom>
-          <a:solidFill>
-            <a:srgbClr val="1E5BC6"/>
-          </a:solidFill>
-          <a:ln>
-            <a:noFill/>
-          </a:ln>
-          <a:effectLst/>
-        </p:spPr>
-        <p:txBody>
-          <a:bodyPr rtlCol="0" anchor="ctr" wrap="square"/>
-          <a:lstStyle/>
-          <a:p>
-            <a:pPr algn="ctr"/>
-          </a:p>
-        </p:txBody>
-      </p:sp>
-      <p:sp>
-        <p:nvSpPr>
-          <p:cNvPr id="38" name="Rectangle 37"/>
-          <p:cNvSpPr/>
-          <p:nvPr/>
-        </p:nvSpPr>
-        <p:spPr>
-          <a:xfrm>
-            <a:off x="14745335" y="4838700"/>
-            <a:ext cx="2152015" cy="599122"/>
-          </a:xfrm>
-          <a:prstGeom prst="rect">
-            <a:avLst/>
-          </a:prstGeom>
-          <a:solidFill>
-            <a:srgbClr val="0D2B5E"/>
-          </a:solidFill>
-          <a:ln>
-            <a:noFill/>
-          </a:ln>
-          <a:effectLst/>
-        </p:spPr>
-        <p:txBody>
-          <a:bodyPr rtlCol="0" anchor="ctr" wrap="square"/>
-          <a:lstStyle/>
-          <a:p>
-            <a:pPr algn="ctr"/>
-          </a:p>
-        </p:txBody>
-      </p:sp>
-      <p:sp>
-        <p:nvSpPr>
-          <p:cNvPr id="39" name="TextBox 38"/>
-          <p:cNvSpPr txBox="1"/>
-          <p:nvPr/>
-        </p:nvSpPr>
-        <p:spPr>
-          <a:xfrm>
-            <a:off x="14745335" y="4838700"/>
-            <a:ext cx="2152015" cy="599122"/>
-          </a:xfrm>
-          <a:prstGeom prst="rect">
-            <a:avLst/>
-          </a:prstGeom>
-          <a:noFill/>
-        </p:spPr>
-        <p:txBody>
-          <a:bodyPr wrap="square" lIns="0" rIns="0" tIns="0" bIns="0" anchor="ctr">
-            <a:spAutoFit/>
-          </a:bodyPr>
-          <a:lstStyle/>
-          <a:p>
-            <a:pPr algn="ctr">
-              <a:lnSpc>
-                <a:spcPct val="100000"/>
-              </a:lnSpc>
-            </a:pPr>
-            <a:r>
-              <a:rPr sz="2025" b="1">
-                <a:solidFill>
-                  <a:srgbClr val="FFFFFF"/>
-                </a:solidFill>
-                <a:latin typeface="Pretendard"/>
-                <a:ea typeface="Pretendard"/>
-                <a:cs typeface="Pretendard"/>
-              </a:rPr>
-              <a:t>Sort</a:t>
-            </a:r>
-          </a:p>
-        </p:txBody>
-      </p:sp>
-      <p:sp>
-        <p:nvSpPr>
-          <p:cNvPr id="40" name="Rounded Rectangle 39"/>
-          <p:cNvSpPr/>
-          <p:nvPr/>
-        </p:nvSpPr>
-        <p:spPr>
-          <a:xfrm>
-            <a:off x="14745335" y="5583555"/>
-            <a:ext cx="2152015" cy="1214438"/>
-          </a:xfrm>
-          <a:prstGeom prst="roundRect">
-            <a:avLst>
-              <a:gd name="adj" fmla="val 3921"/>
-            </a:avLst>
-          </a:prstGeom>
-          <a:solidFill>
-            <a:srgbClr val="FAFBFD"/>
-          </a:solidFill>
-          <a:ln w="9525">
-            <a:solidFill>
-              <a:srgbClr val="DCE1E8"/>
-            </a:solidFill>
-          </a:ln>
-          <a:effectLst/>
-        </p:spPr>
-        <p:txBody>
-          <a:bodyPr rtlCol="0" anchor="ctr" wrap="square"/>
-          <a:lstStyle/>
-          <a:p>
-            <a:pPr algn="ctr"/>
-          </a:p>
-        </p:txBody>
-      </p:sp>
-      <p:sp>
-        <p:nvSpPr>
-          <p:cNvPr id="41" name="TextBox 40"/>
-          <p:cNvSpPr txBox="1"/>
-          <p:nvPr/>
-        </p:nvSpPr>
-        <p:spPr>
-          <a:xfrm>
-            <a:off x="14878685" y="5583555"/>
-            <a:ext cx="1885315" cy="1214438"/>
-          </a:xfrm>
-          <a:prstGeom prst="rect">
-            <a:avLst/>
-          </a:prstGeom>
-          <a:noFill/>
-        </p:spPr>
-        <p:txBody>
-          <a:bodyPr wrap="square" lIns="0" rIns="0" tIns="0" bIns="0" anchor="ctr">
-            <a:spAutoFit/>
-          </a:bodyPr>
-          <a:lstStyle/>
-          <a:p>
-            <a:pPr algn="ctr">
-              <a:lnSpc>
-                <a:spcPct val="135000"/>
-              </a:lnSpc>
-            </a:pPr>
-            <a:r>
-              <a:rPr sz="1500" b="0">
-                <a:solidFill>
-                  <a:srgbClr val="3D3D3D"/>
-                </a:solidFill>
-                <a:latin typeface="Pretendard"/>
-                <a:ea typeface="Pretendard"/>
-                <a:cs typeface="Pretendard"/>
-              </a:rPr>
-              <a:t>orderBy</a:t>
-            </a:r>
-          </a:p>
-        </p:txBody>
-      </p:sp>
-      <p:sp>
-        <p:nvSpPr>
-          <p:cNvPr id="42" name="Oval 41"/>
-          <p:cNvSpPr/>
-          <p:nvPr/>
-        </p:nvSpPr>
-        <p:spPr>
-          <a:xfrm>
-            <a:off x="8686800" y="3771900"/>
-            <a:ext cx="914400" cy="914400"/>
-          </a:xfrm>
-          <a:prstGeom prst="ellipse">
-            <a:avLst/>
-          </a:prstGeom>
-          <a:solidFill>
-            <a:srgbClr val="0D2B5E"/>
-          </a:solidFill>
-          <a:ln>
-            <a:noFill/>
-          </a:ln>
-          <a:effectLst/>
-        </p:spPr>
-        <p:txBody>
-          <a:bodyPr rtlCol="0" anchor="ctr" wrap="square"/>
-          <a:lstStyle/>
-          <a:p>
-            <a:pPr algn="ctr"/>
-          </a:p>
-        </p:txBody>
-      </p:sp>
-      <p:sp>
-        <p:nvSpPr>
-          <p:cNvPr id="43" name="TextBox 42"/>
-          <p:cNvSpPr txBox="1"/>
-          <p:nvPr/>
-        </p:nvSpPr>
-        <p:spPr>
-          <a:xfrm>
-            <a:off x="8686800" y="4057650"/>
-            <a:ext cx="914400" cy="381000"/>
-          </a:xfrm>
-          <a:prstGeom prst="rect">
-            <a:avLst/>
-          </a:prstGeom>
-          <a:noFill/>
-        </p:spPr>
-        <p:txBody>
-          <a:bodyPr wrap="square" lIns="0" rIns="0" tIns="0" bIns="0" anchor="t">
-            <a:spAutoFit/>
-          </a:bodyPr>
-          <a:lstStyle/>
-          <a:p>
-            <a:pPr algn="ctr">
-              <a:lnSpc>
-                <a:spcPct val="100000"/>
-              </a:lnSpc>
-            </a:pPr>
-            <a:r>
-              <a:rPr sz="2250" b="1">
-                <a:solidFill>
-                  <a:srgbClr val="FFFFFF"/>
-                </a:solidFill>
-                <a:latin typeface="Pretendard"/>
-                <a:ea typeface="Pretendard"/>
-                <a:cs typeface="Pretendard"/>
-              </a:rPr>
-              <a:t>VS</a:t>
-            </a:r>
-          </a:p>
-        </p:txBody>
-      </p:sp>
-      <p:sp>
-        <p:nvSpPr>
-          <p:cNvPr id="44" name="Rectangle 43"/>
-          <p:cNvSpPr/>
-          <p:nvPr/>
-        </p:nvSpPr>
-        <p:spPr>
-          <a:xfrm>
-            <a:off x="1143000" y="8058150"/>
-            <a:ext cx="16002000" cy="9525"/>
-          </a:xfrm>
-          <a:prstGeom prst="rect">
-            <a:avLst/>
-          </a:prstGeom>
-          <a:solidFill>
-            <a:srgbClr val="DCE1E8"/>
-          </a:solidFill>
-          <a:ln>
-            <a:noFill/>
-          </a:ln>
-          <a:effectLst/>
-        </p:spPr>
-        <p:txBody>
-          <a:bodyPr rtlCol="0" anchor="ctr" wrap="square"/>
-          <a:lstStyle/>
-          <a:p>
-            <a:pPr algn="ctr"/>
-          </a:p>
-        </p:txBody>
-      </p:sp>
-      <p:sp>
-        <p:nvSpPr>
-          <p:cNvPr id="45" name="TextBox 44"/>
+          <p:cNvPr id="30" name="TextBox 29"/>
           <p:cNvSpPr txBox="1"/>
           <p:nvPr/>
         </p:nvSpPr>
@@ -10464,7 +10026,7 @@
       </p:sp>
       <p:sp>
         <p:nvSpPr>
-          <p:cNvPr id="46" name="TextBox 45"/>
+          <p:cNvPr id="31" name="TextBox 30"/>
           <p:cNvSpPr txBox="1"/>
           <p:nvPr/>
         </p:nvSpPr>
@@ -10523,7 +10085,7 @@
       <p:grpSpPr/>
       <p:sp>
         <p:nvSpPr>
-          <p:cNvPr id="2" name="Oval 1"/>
+          <p:cNvPr id="2" name="deckgen:decor"/>
           <p:cNvSpPr/>
           <p:nvPr/>
         </p:nvSpPr>
@@ -10553,7 +10115,7 @@
       </p:sp>
       <p:sp>
         <p:nvSpPr>
-          <p:cNvPr id="3" name="Oval 2"/>
+          <p:cNvPr id="3" name="deckgen:decor"/>
           <p:cNvSpPr/>
           <p:nvPr/>
         </p:nvSpPr>
@@ -10583,7 +10145,7 @@
       </p:sp>
       <p:sp>
         <p:nvSpPr>
-          <p:cNvPr id="4" name="Oval 3"/>
+          <p:cNvPr id="4" name="deckgen:decor"/>
           <p:cNvSpPr/>
           <p:nvPr/>
         </p:nvSpPr>
@@ -10647,7 +10209,7 @@
                 <a:ea typeface="Pretendard"/>
                 <a:cs typeface="Pretendard"/>
               </a:rPr>
-              <a:t>4단계</a:t>
+              <a:t>3단계</a:t>
             </a:r>
           </a:p>
         </p:txBody>
@@ -10688,7 +10250,7 @@
                 <a:ea typeface="Pretendard"/>
                 <a:cs typeface="Pretendard"/>
               </a:rPr>
-              <a:t>CTE 로 단계를 나눈다 — 2-2 문법 그대로</a:t>
+              <a:t>두 explain() 을 나란히 — 같은 모양</a:t>
             </a:r>
           </a:p>
         </p:txBody>
@@ -10725,31 +10287,42 @@
       </p:sp>
       <p:sp>
         <p:nvSpPr>
-          <p:cNvPr id="8" name="Rectangle 7"/>
-          <p:cNvSpPr/>
-          <p:nvPr/>
-        </p:nvSpPr>
-        <p:spPr>
-          <a:xfrm>
-            <a:off x="1143000" y="2781300"/>
-            <a:ext cx="3814762" cy="704850"/>
-          </a:xfrm>
-          <a:prstGeom prst="rect">
-            <a:avLst/>
-          </a:prstGeom>
-          <a:solidFill>
-            <a:srgbClr val="0D2B5E"/>
-          </a:solidFill>
-          <a:ln>
-            <a:noFill/>
-          </a:ln>
-          <a:effectLst/>
-        </p:spPr>
-        <p:txBody>
-          <a:bodyPr rtlCol="0" anchor="ctr" wrap="square"/>
-          <a:lstStyle/>
-          <a:p>
-            <a:pPr algn="ctr"/>
+          <p:cNvPr id="8" name="TextBox 7"/>
+          <p:cNvSpPr txBox="1"/>
+          <p:nvPr/>
+        </p:nvSpPr>
+        <p:spPr>
+          <a:xfrm>
+            <a:off x="1143000" y="2857500"/>
+            <a:ext cx="7372350" cy="533400"/>
+          </a:xfrm>
+          <a:prstGeom prst="rect">
+            <a:avLst/>
+          </a:prstGeom>
+          <a:noFill/>
+        </p:spPr>
+        <p:txBody>
+          <a:bodyPr wrap="square" lIns="0" rIns="0" tIns="0" bIns="0" anchor="t">
+            <a:spAutoFit/>
+          </a:bodyPr>
+          <a:lstStyle/>
+          <a:p>
+            <a:pPr algn="l">
+              <a:lnSpc>
+                <a:spcPct val="110000"/>
+              </a:lnSpc>
+            </a:pPr>
+            <a:r>
+              <a:rPr sz="3150" b="1">
+                <a:solidFill>
+                  <a:srgbClr val="0D2B5E"/>
+                </a:solidFill>
+                <a:latin typeface="Pretendard"/>
+                <a:ea typeface="Pretendard"/>
+                <a:cs typeface="Pretendard"/>
+              </a:rPr>
+              <a:t>sql_sales.explain()</a:t>
+            </a:r>
           </a:p>
         </p:txBody>
       </p:sp>
@@ -10761,35 +10334,35 @@
         </p:nvSpPr>
         <p:spPr>
           <a:xfrm>
-            <a:off x="1143000" y="2781300"/>
-            <a:ext cx="3814762" cy="704850"/>
-          </a:xfrm>
-          <a:prstGeom prst="rect">
-            <a:avLst/>
-          </a:prstGeom>
-          <a:noFill/>
-        </p:spPr>
-        <p:txBody>
-          <a:bodyPr wrap="square" lIns="0" rIns="0" tIns="0" bIns="0" anchor="ctr">
-            <a:spAutoFit/>
-          </a:bodyPr>
-          <a:lstStyle/>
-          <a:p>
-            <a:pPr algn="ctr">
-              <a:lnSpc>
-                <a:spcPct val="100000"/>
-              </a:lnSpc>
-            </a:pPr>
-            <a:r>
-              <a:rPr sz="2400" b="1">
-                <a:solidFill>
-                  <a:srgbClr val="FFFFFF"/>
-                </a:solidFill>
-                <a:latin typeface="Pretendard"/>
-                <a:ea typeface="Pretendard"/>
-                <a:cs typeface="Pretendard"/>
-              </a:rPr>
-              <a:t>enriched</a:t>
+            <a:off x="1143000" y="3467100"/>
+            <a:ext cx="7372350" cy="876300"/>
+          </a:xfrm>
+          <a:prstGeom prst="rect">
+            <a:avLst/>
+          </a:prstGeom>
+          <a:noFill/>
+        </p:spPr>
+        <p:txBody>
+          <a:bodyPr wrap="square" lIns="0" rIns="0" tIns="0" bIns="0" anchor="t">
+            <a:spAutoFit/>
+          </a:bodyPr>
+          <a:lstStyle/>
+          <a:p>
+            <a:pPr algn="l">
+              <a:lnSpc>
+                <a:spcPct val="146000"/>
+              </a:lnSpc>
+            </a:pPr>
+            <a:r>
+              <a:rPr sz="2250" b="0">
+                <a:solidFill>
+                  <a:srgbClr val="3D3D3D"/>
+                </a:solidFill>
+                <a:latin typeface="Pretendard"/>
+                <a:ea typeface="Pretendard"/>
+                <a:cs typeface="Pretendard"/>
+              </a:rPr>
+              <a:t>집계 표기 sum((qty * price))</a:t>
             </a:r>
           </a:p>
         </p:txBody>
@@ -10802,12 +10375,12 @@
         </p:nvSpPr>
         <p:spPr>
           <a:xfrm>
-            <a:off x="1143000" y="3657600"/>
-            <a:ext cx="3814762" cy="1428750"/>
+            <a:off x="1143000" y="4610100"/>
+            <a:ext cx="7372350" cy="2857500"/>
           </a:xfrm>
           <a:prstGeom prst="roundRect">
             <a:avLst>
-              <a:gd name="adj" fmla="val 3333"/>
+              <a:gd name="adj" fmla="val 1666"/>
             </a:avLst>
           </a:prstGeom>
           <a:solidFill>
@@ -10830,79 +10403,20 @@
       </p:sp>
       <p:sp>
         <p:nvSpPr>
-          <p:cNvPr id="11" name="TextBox 10"/>
-          <p:cNvSpPr txBox="1"/>
-          <p:nvPr/>
-        </p:nvSpPr>
-        <p:spPr>
-          <a:xfrm>
-            <a:off x="1276350" y="3657600"/>
-            <a:ext cx="3548062" cy="1428750"/>
-          </a:xfrm>
-          <a:prstGeom prst="rect">
-            <a:avLst/>
-          </a:prstGeom>
-          <a:noFill/>
-        </p:spPr>
-        <p:txBody>
-          <a:bodyPr wrap="square" lIns="0" rIns="0" tIns="0" bIns="0" anchor="ctr">
-            <a:spAutoFit/>
-          </a:bodyPr>
-          <a:lstStyle/>
-          <a:p>
-            <a:pPr algn="ctr">
-              <a:lnSpc>
-                <a:spcPct val="135000"/>
-              </a:lnSpc>
-            </a:pPr>
-            <a:r>
-              <a:rPr sz="1800" b="0">
-                <a:solidFill>
-                  <a:srgbClr val="3D3D3D"/>
-                </a:solidFill>
-                <a:latin typeface="Pretendard"/>
-                <a:ea typeface="Pretendard"/>
-                <a:cs typeface="Pretendard"/>
-              </a:rPr>
-              <a:t>조인 + amount</a:t>
-            </a:r>
-          </a:p>
-          <a:p>
-            <a:pPr algn="ctr">
-              <a:lnSpc>
-                <a:spcPct val="135000"/>
-              </a:lnSpc>
-            </a:pPr>
-            <a:r>
-              <a:rPr sz="1800" b="0">
-                <a:solidFill>
-                  <a:srgbClr val="3D3D3D"/>
-                </a:solidFill>
-                <a:latin typeface="Pretendard"/>
-                <a:ea typeface="Pretendard"/>
-                <a:cs typeface="Pretendard"/>
-              </a:rPr>
-              <a:t>= qty * price</a:t>
-            </a:r>
-          </a:p>
-        </p:txBody>
-      </p:sp>
-      <p:sp>
-        <p:nvSpPr>
-          <p:cNvPr id="12" name="Right Arrow 11"/>
-          <p:cNvSpPr/>
-          <p:nvPr/>
-        </p:nvSpPr>
-        <p:spPr>
-          <a:xfrm>
-            <a:off x="4976812" y="3028950"/>
-            <a:ext cx="209550" cy="209550"/>
-          </a:xfrm>
-          <a:prstGeom prst="rightArrow">
-            <a:avLst/>
-          </a:prstGeom>
-          <a:solidFill>
-            <a:srgbClr val="1E5BC6"/>
+          <p:cNvPr id="11" name="Rectangle 10"/>
+          <p:cNvSpPr/>
+          <p:nvPr/>
+        </p:nvSpPr>
+        <p:spPr>
+          <a:xfrm>
+            <a:off x="1390650" y="4838700"/>
+            <a:ext cx="2152015" cy="599122"/>
+          </a:xfrm>
+          <a:prstGeom prst="rect">
+            <a:avLst/>
+          </a:prstGeom>
+          <a:solidFill>
+            <a:srgbClr val="0D2B5E"/>
           </a:solidFill>
           <a:ln>
             <a:noFill/>
@@ -10919,44 +10433,14 @@
       </p:sp>
       <p:sp>
         <p:nvSpPr>
-          <p:cNvPr id="13" name="Rectangle 12"/>
-          <p:cNvSpPr/>
-          <p:nvPr/>
-        </p:nvSpPr>
-        <p:spPr>
-          <a:xfrm>
-            <a:off x="5205412" y="2781300"/>
-            <a:ext cx="3814762" cy="704850"/>
-          </a:xfrm>
-          <a:prstGeom prst="rect">
-            <a:avLst/>
-          </a:prstGeom>
-          <a:solidFill>
-            <a:srgbClr val="1E5BC6"/>
-          </a:solidFill>
-          <a:ln>
-            <a:noFill/>
-          </a:ln>
-          <a:effectLst/>
-        </p:spPr>
-        <p:txBody>
-          <a:bodyPr rtlCol="0" anchor="ctr" wrap="square"/>
-          <a:lstStyle/>
-          <a:p>
-            <a:pPr algn="ctr"/>
-          </a:p>
-        </p:txBody>
-      </p:sp>
-      <p:sp>
-        <p:nvSpPr>
-          <p:cNvPr id="14" name="TextBox 13"/>
-          <p:cNvSpPr txBox="1"/>
-          <p:nvPr/>
-        </p:nvSpPr>
-        <p:spPr>
-          <a:xfrm>
-            <a:off x="5205412" y="2781300"/>
-            <a:ext cx="3814762" cy="704850"/>
+          <p:cNvPr id="12" name="TextBox 11"/>
+          <p:cNvSpPr txBox="1"/>
+          <p:nvPr/>
+        </p:nvSpPr>
+        <p:spPr>
+          <a:xfrm>
+            <a:off x="1390650" y="4838700"/>
+            <a:ext cx="2152015" cy="599122"/>
           </a:xfrm>
           <a:prstGeom prst="rect">
             <a:avLst/>
@@ -10975,7 +10459,7 @@
               </a:lnSpc>
             </a:pPr>
             <a:r>
-              <a:rPr sz="2400" b="1">
+              <a:rPr sz="2025" b="1">
                 <a:solidFill>
                   <a:srgbClr val="FFFFFF"/>
                 </a:solidFill>
@@ -10983,25 +10467,25 @@
                 <a:ea typeface="Pretendard"/>
                 <a:cs typeface="Pretendard"/>
               </a:rPr>
-              <a:t>daily</a:t>
-            </a:r>
-          </a:p>
-        </p:txBody>
-      </p:sp>
-      <p:sp>
-        <p:nvSpPr>
-          <p:cNvPr id="15" name="Rounded Rectangle 14"/>
-          <p:cNvSpPr/>
-          <p:nvPr/>
-        </p:nvSpPr>
-        <p:spPr>
-          <a:xfrm>
-            <a:off x="5205412" y="3657600"/>
-            <a:ext cx="3814762" cy="1428750"/>
+              <a:t>Sort</a:t>
+            </a:r>
+          </a:p>
+        </p:txBody>
+      </p:sp>
+      <p:sp>
+        <p:nvSpPr>
+          <p:cNvPr id="13" name="Rounded Rectangle 12"/>
+          <p:cNvSpPr/>
+          <p:nvPr/>
+        </p:nvSpPr>
+        <p:spPr>
+          <a:xfrm>
+            <a:off x="1390650" y="5583555"/>
+            <a:ext cx="2152015" cy="1214438"/>
           </a:xfrm>
           <a:prstGeom prst="roundRect">
             <a:avLst>
-              <a:gd name="adj" fmla="val 3333"/>
+              <a:gd name="adj" fmla="val 3921"/>
             </a:avLst>
           </a:prstGeom>
           <a:solidFill>
@@ -11024,14 +10508,14 @@
       </p:sp>
       <p:sp>
         <p:nvSpPr>
-          <p:cNvPr id="16" name="TextBox 15"/>
-          <p:cNvSpPr txBox="1"/>
-          <p:nvPr/>
-        </p:nvSpPr>
-        <p:spPr>
-          <a:xfrm>
-            <a:off x="5338762" y="3657600"/>
-            <a:ext cx="3548062" cy="1428750"/>
+          <p:cNvPr id="14" name="TextBox 13"/>
+          <p:cNvSpPr txBox="1"/>
+          <p:nvPr/>
+        </p:nvSpPr>
+        <p:spPr>
+          <a:xfrm>
+            <a:off x="1524000" y="5583555"/>
+            <a:ext cx="1885315" cy="1214438"/>
           </a:xfrm>
           <a:prstGeom prst="rect">
             <a:avLst/>
@@ -11050,7 +10534,7 @@
               </a:lnSpc>
             </a:pPr>
             <a:r>
-              <a:rPr sz="1800" b="0">
+              <a:rPr sz="1350" b="0">
                 <a:solidFill>
                   <a:srgbClr val="3D3D3D"/>
                 </a:solidFill>
@@ -11058,39 +10542,21 @@
                 <a:ea typeface="Pretendard"/>
                 <a:cs typeface="Pretendard"/>
               </a:rPr>
-              <a:t>order_date 별</a:t>
-            </a:r>
-          </a:p>
-          <a:p>
-            <a:pPr algn="ctr">
-              <a:lnSpc>
-                <a:spcPct val="135000"/>
-              </a:lnSpc>
-            </a:pPr>
-            <a:r>
-              <a:rPr sz="1800" b="0">
-                <a:solidFill>
-                  <a:srgbClr val="3D3D3D"/>
-                </a:solidFill>
-                <a:latin typeface="Pretendard"/>
-                <a:ea typeface="Pretendard"/>
-                <a:cs typeface="Pretendard"/>
-              </a:rPr>
-              <a:t>SUM(amount)</a:t>
-            </a:r>
-          </a:p>
-        </p:txBody>
-      </p:sp>
-      <p:sp>
-        <p:nvSpPr>
-          <p:cNvPr id="17" name="Right Arrow 16"/>
-          <p:cNvSpPr/>
-          <p:nvPr/>
-        </p:nvSpPr>
-        <p:spPr>
-          <a:xfrm>
-            <a:off x="9039225" y="3028950"/>
-            <a:ext cx="209550" cy="209550"/>
+              <a:t>Exchange range</a:t>
+            </a:r>
+          </a:p>
+        </p:txBody>
+      </p:sp>
+      <p:sp>
+        <p:nvSpPr>
+          <p:cNvPr id="15" name="Right Arrow 14"/>
+          <p:cNvSpPr/>
+          <p:nvPr/>
+        </p:nvSpPr>
+        <p:spPr>
+          <a:xfrm>
+            <a:off x="3561715" y="5049202"/>
+            <a:ext cx="172402" cy="178118"/>
           </a:xfrm>
           <a:prstGeom prst="rightArrow">
             <a:avLst/>
@@ -11113,20 +10579,20 @@
       </p:sp>
       <p:sp>
         <p:nvSpPr>
-          <p:cNvPr id="18" name="Rectangle 17"/>
-          <p:cNvSpPr/>
-          <p:nvPr/>
-        </p:nvSpPr>
-        <p:spPr>
-          <a:xfrm>
-            <a:off x="9267825" y="2781300"/>
-            <a:ext cx="3814762" cy="704850"/>
-          </a:xfrm>
-          <a:prstGeom prst="rect">
-            <a:avLst/>
-          </a:prstGeom>
-          <a:solidFill>
-            <a:srgbClr val="0D2B5E"/>
+          <p:cNvPr id="16" name="Rectangle 15"/>
+          <p:cNvSpPr/>
+          <p:nvPr/>
+        </p:nvSpPr>
+        <p:spPr>
+          <a:xfrm>
+            <a:off x="3753167" y="4838700"/>
+            <a:ext cx="2152015" cy="599122"/>
+          </a:xfrm>
+          <a:prstGeom prst="rect">
+            <a:avLst/>
+          </a:prstGeom>
+          <a:solidFill>
+            <a:srgbClr val="1E5BC6"/>
           </a:solidFill>
           <a:ln>
             <a:noFill/>
@@ -11143,14 +10609,14 @@
       </p:sp>
       <p:sp>
         <p:nvSpPr>
-          <p:cNvPr id="19" name="TextBox 18"/>
-          <p:cNvSpPr txBox="1"/>
-          <p:nvPr/>
-        </p:nvSpPr>
-        <p:spPr>
-          <a:xfrm>
-            <a:off x="9267825" y="2781300"/>
-            <a:ext cx="3814762" cy="704850"/>
+          <p:cNvPr id="17" name="TextBox 16"/>
+          <p:cNvSpPr txBox="1"/>
+          <p:nvPr/>
+        </p:nvSpPr>
+        <p:spPr>
+          <a:xfrm>
+            <a:off x="3753167" y="4838700"/>
+            <a:ext cx="2152015" cy="599122"/>
           </a:xfrm>
           <a:prstGeom prst="rect">
             <a:avLst/>
@@ -11169,7 +10635,7 @@
               </a:lnSpc>
             </a:pPr>
             <a:r>
-              <a:rPr sz="2400" b="1">
+              <a:rPr sz="2025" b="1">
                 <a:solidFill>
                   <a:srgbClr val="FFFFFF"/>
                 </a:solidFill>
@@ -11177,25 +10643,25 @@
                 <a:ea typeface="Pretendard"/>
                 <a:cs typeface="Pretendard"/>
               </a:rPr>
-              <a:t>SELECT</a:t>
-            </a:r>
-          </a:p>
-        </p:txBody>
-      </p:sp>
-      <p:sp>
-        <p:nvSpPr>
-          <p:cNvPr id="20" name="Rounded Rectangle 19"/>
-          <p:cNvSpPr/>
-          <p:nvPr/>
-        </p:nvSpPr>
-        <p:spPr>
-          <a:xfrm>
-            <a:off x="9267825" y="3657600"/>
-            <a:ext cx="3814762" cy="1428750"/>
+              <a:t>HashAggregate</a:t>
+            </a:r>
+          </a:p>
+        </p:txBody>
+      </p:sp>
+      <p:sp>
+        <p:nvSpPr>
+          <p:cNvPr id="18" name="Rounded Rectangle 17"/>
+          <p:cNvSpPr/>
+          <p:nvPr/>
+        </p:nvSpPr>
+        <p:spPr>
+          <a:xfrm>
+            <a:off x="3753167" y="5583555"/>
+            <a:ext cx="2152015" cy="1214438"/>
           </a:xfrm>
           <a:prstGeom prst="roundRect">
             <a:avLst>
-              <a:gd name="adj" fmla="val 3333"/>
+              <a:gd name="adj" fmla="val 3921"/>
             </a:avLst>
           </a:prstGeom>
           <a:solidFill>
@@ -11218,14 +10684,14 @@
       </p:sp>
       <p:sp>
         <p:nvSpPr>
-          <p:cNvPr id="21" name="TextBox 20"/>
-          <p:cNvSpPr txBox="1"/>
-          <p:nvPr/>
-        </p:nvSpPr>
-        <p:spPr>
-          <a:xfrm>
-            <a:off x="9401175" y="3657600"/>
-            <a:ext cx="3548062" cy="1428750"/>
+          <p:cNvPr id="19" name="TextBox 18"/>
+          <p:cNvSpPr txBox="1"/>
+          <p:nvPr/>
+        </p:nvSpPr>
+        <p:spPr>
+          <a:xfrm>
+            <a:off x="3886517" y="5583555"/>
+            <a:ext cx="1885315" cy="1214438"/>
           </a:xfrm>
           <a:prstGeom prst="rect">
             <a:avLst/>
@@ -11244,7 +10710,7 @@
               </a:lnSpc>
             </a:pPr>
             <a:r>
-              <a:rPr sz="1800" b="0">
+              <a:rPr sz="1350" b="0">
                 <a:solidFill>
                   <a:srgbClr val="3D3D3D"/>
                 </a:solidFill>
@@ -11252,39 +10718,21 @@
                 <a:ea typeface="Pretendard"/>
                 <a:cs typeface="Pretendard"/>
               </a:rPr>
-              <a:t>SUM(revenue)</a:t>
-            </a:r>
-          </a:p>
-          <a:p>
-            <a:pPr algn="ctr">
-              <a:lnSpc>
-                <a:spcPct val="135000"/>
-              </a:lnSpc>
-            </a:pPr>
-            <a:r>
-              <a:rPr sz="1800" b="0">
-                <a:solidFill>
-                  <a:srgbClr val="3D3D3D"/>
-                </a:solidFill>
-                <a:latin typeface="Pretendard"/>
-                <a:ea typeface="Pretendard"/>
-                <a:cs typeface="Pretendard"/>
-              </a:rPr>
-              <a:t>OVER (ORDER BY)</a:t>
-            </a:r>
-          </a:p>
-        </p:txBody>
-      </p:sp>
-      <p:sp>
-        <p:nvSpPr>
-          <p:cNvPr id="22" name="Right Arrow 21"/>
-          <p:cNvSpPr/>
-          <p:nvPr/>
-        </p:nvSpPr>
-        <p:spPr>
-          <a:xfrm>
-            <a:off x="13101638" y="3028950"/>
-            <a:ext cx="209550" cy="209550"/>
+              <a:t>Exchange hash(name)</a:t>
+            </a:r>
+          </a:p>
+        </p:txBody>
+      </p:sp>
+      <p:sp>
+        <p:nvSpPr>
+          <p:cNvPr id="20" name="Right Arrow 19"/>
+          <p:cNvSpPr/>
+          <p:nvPr/>
+        </p:nvSpPr>
+        <p:spPr>
+          <a:xfrm>
+            <a:off x="5924232" y="5049202"/>
+            <a:ext cx="172402" cy="178118"/>
           </a:xfrm>
           <a:prstGeom prst="rightArrow">
             <a:avLst/>
@@ -11307,20 +10755,20 @@
       </p:sp>
       <p:sp>
         <p:nvSpPr>
-          <p:cNvPr id="23" name="Rectangle 22"/>
-          <p:cNvSpPr/>
-          <p:nvPr/>
-        </p:nvSpPr>
-        <p:spPr>
-          <a:xfrm>
-            <a:off x="13330238" y="2781300"/>
-            <a:ext cx="3814762" cy="704850"/>
-          </a:xfrm>
-          <a:prstGeom prst="rect">
-            <a:avLst/>
-          </a:prstGeom>
-          <a:solidFill>
-            <a:srgbClr val="1E5BC6"/>
+          <p:cNvPr id="21" name="Rectangle 20"/>
+          <p:cNvSpPr/>
+          <p:nvPr/>
+        </p:nvSpPr>
+        <p:spPr>
+          <a:xfrm>
+            <a:off x="6115685" y="4838700"/>
+            <a:ext cx="2152015" cy="599122"/>
+          </a:xfrm>
+          <a:prstGeom prst="rect">
+            <a:avLst/>
+          </a:prstGeom>
+          <a:solidFill>
+            <a:srgbClr val="0D2B5E"/>
           </a:solidFill>
           <a:ln>
             <a:noFill/>
@@ -11337,14 +10785,14 @@
       </p:sp>
       <p:sp>
         <p:nvSpPr>
-          <p:cNvPr id="24" name="TextBox 23"/>
-          <p:cNvSpPr txBox="1"/>
-          <p:nvPr/>
-        </p:nvSpPr>
-        <p:spPr>
-          <a:xfrm>
-            <a:off x="13330238" y="2781300"/>
-            <a:ext cx="3814762" cy="704850"/>
+          <p:cNvPr id="22" name="TextBox 21"/>
+          <p:cNvSpPr txBox="1"/>
+          <p:nvPr/>
+        </p:nvSpPr>
+        <p:spPr>
+          <a:xfrm>
+            <a:off x="6115685" y="4838700"/>
+            <a:ext cx="2152015" cy="599122"/>
           </a:xfrm>
           <a:prstGeom prst="rect">
             <a:avLst/>
@@ -11363,7 +10811,7 @@
               </a:lnSpc>
             </a:pPr>
             <a:r>
-              <a:rPr sz="2400" b="1">
+              <a:rPr sz="2025" b="1">
                 <a:solidFill>
                   <a:srgbClr val="FFFFFF"/>
                 </a:solidFill>
@@ -11371,25 +10819,25 @@
                 <a:ea typeface="Pretendard"/>
                 <a:cs typeface="Pretendard"/>
               </a:rPr>
-              <a:t>결과</a:t>
-            </a:r>
-          </a:p>
-        </p:txBody>
-      </p:sp>
-      <p:sp>
-        <p:nvSpPr>
-          <p:cNvPr id="25" name="Rounded Rectangle 24"/>
-          <p:cNvSpPr/>
-          <p:nvPr/>
-        </p:nvSpPr>
-        <p:spPr>
-          <a:xfrm>
-            <a:off x="13330238" y="3657600"/>
-            <a:ext cx="3814762" cy="1428750"/>
+              <a:t>SortMergeJoin</a:t>
+            </a:r>
+          </a:p>
+        </p:txBody>
+      </p:sp>
+      <p:sp>
+        <p:nvSpPr>
+          <p:cNvPr id="23" name="Rounded Rectangle 22"/>
+          <p:cNvSpPr/>
+          <p:nvPr/>
+        </p:nvSpPr>
+        <p:spPr>
+          <a:xfrm>
+            <a:off x="6115685" y="5583555"/>
+            <a:ext cx="2152015" cy="1214438"/>
           </a:xfrm>
           <a:prstGeom prst="roundRect">
             <a:avLst>
-              <a:gd name="adj" fmla="val 3333"/>
+              <a:gd name="adj" fmla="val 3921"/>
             </a:avLst>
           </a:prstGeom>
           <a:solidFill>
@@ -11412,33 +10860,115 @@
       </p:sp>
       <p:sp>
         <p:nvSpPr>
+          <p:cNvPr id="24" name="TextBox 23"/>
+          <p:cNvSpPr txBox="1"/>
+          <p:nvPr/>
+        </p:nvSpPr>
+        <p:spPr>
+          <a:xfrm>
+            <a:off x="6249035" y="5583555"/>
+            <a:ext cx="1885315" cy="1214438"/>
+          </a:xfrm>
+          <a:prstGeom prst="rect">
+            <a:avLst/>
+          </a:prstGeom>
+          <a:noFill/>
+        </p:spPr>
+        <p:txBody>
+          <a:bodyPr wrap="square" lIns="0" rIns="0" tIns="0" bIns="0" anchor="ctr">
+            <a:spAutoFit/>
+          </a:bodyPr>
+          <a:lstStyle/>
+          <a:p>
+            <a:pPr algn="ctr">
+              <a:lnSpc>
+                <a:spcPct val="135000"/>
+              </a:lnSpc>
+            </a:pPr>
+            <a:r>
+              <a:rPr sz="1350" b="0">
+                <a:solidFill>
+                  <a:srgbClr val="3D3D3D"/>
+                </a:solidFill>
+                <a:latin typeface="Pretendard"/>
+                <a:ea typeface="Pretendard"/>
+                <a:cs typeface="Pretendard"/>
+              </a:rPr>
+              <a:t>양쪽 Exchange</a:t>
+            </a:r>
+          </a:p>
+        </p:txBody>
+      </p:sp>
+      <p:sp>
+        <p:nvSpPr>
+          <p:cNvPr id="25" name="TextBox 24"/>
+          <p:cNvSpPr txBox="1"/>
+          <p:nvPr/>
+        </p:nvSpPr>
+        <p:spPr>
+          <a:xfrm>
+            <a:off x="9772650" y="2857500"/>
+            <a:ext cx="7372350" cy="533400"/>
+          </a:xfrm>
+          <a:prstGeom prst="rect">
+            <a:avLst/>
+          </a:prstGeom>
+          <a:noFill/>
+        </p:spPr>
+        <p:txBody>
+          <a:bodyPr wrap="square" lIns="0" rIns="0" tIns="0" bIns="0" anchor="t">
+            <a:spAutoFit/>
+          </a:bodyPr>
+          <a:lstStyle/>
+          <a:p>
+            <a:pPr algn="l">
+              <a:lnSpc>
+                <a:spcPct val="110000"/>
+              </a:lnSpc>
+            </a:pPr>
+            <a:r>
+              <a:rPr sz="3150" b="1">
+                <a:solidFill>
+                  <a:srgbClr val="0D2B5E"/>
+                </a:solidFill>
+                <a:latin typeface="Pretendard"/>
+                <a:ea typeface="Pretendard"/>
+                <a:cs typeface="Pretendard"/>
+              </a:rPr>
+              <a:t>sales.explain()</a:t>
+            </a:r>
+          </a:p>
+        </p:txBody>
+      </p:sp>
+      <p:sp>
+        <p:nvSpPr>
           <p:cNvPr id="26" name="TextBox 25"/>
           <p:cNvSpPr txBox="1"/>
           <p:nvPr/>
         </p:nvSpPr>
         <p:spPr>
           <a:xfrm>
-            <a:off x="13463588" y="3657600"/>
-            <a:ext cx="3548062" cy="1428750"/>
-          </a:xfrm>
-          <a:prstGeom prst="rect">
-            <a:avLst/>
-          </a:prstGeom>
-          <a:noFill/>
-        </p:spPr>
-        <p:txBody>
-          <a:bodyPr wrap="square" lIns="0" rIns="0" tIns="0" bIns="0" anchor="ctr">
-            <a:spAutoFit/>
-          </a:bodyPr>
-          <a:lstStyle/>
-          <a:p>
-            <a:pPr algn="ctr">
-              <a:lnSpc>
-                <a:spcPct val="135000"/>
-              </a:lnSpc>
-            </a:pPr>
-            <a:r>
-              <a:rPr sz="1800" b="0">
+            <a:off x="9772650" y="3467100"/>
+            <a:ext cx="7372350" cy="876300"/>
+          </a:xfrm>
+          <a:prstGeom prst="rect">
+            <a:avLst/>
+          </a:prstGeom>
+          <a:noFill/>
+        </p:spPr>
+        <p:txBody>
+          <a:bodyPr wrap="square" lIns="0" rIns="0" tIns="0" bIns="0" anchor="t">
+            <a:spAutoFit/>
+          </a:bodyPr>
+          <a:lstStyle/>
+          <a:p>
+            <a:pPr algn="l">
+              <a:lnSpc>
+                <a:spcPct val="146000"/>
+              </a:lnSpc>
+            </a:pPr>
+            <a:r>
+              <a:rPr sz="2250" b="0">
                 <a:solidFill>
                   <a:srgbClr val="3D3D3D"/>
                 </a:solidFill>
@@ -11446,25 +10976,7 @@
                 <a:ea typeface="Pretendard"/>
                 <a:cs typeface="Pretendard"/>
               </a:rPr>
-              <a:t>날짜별 매출과</a:t>
-            </a:r>
-          </a:p>
-          <a:p>
-            <a:pPr algn="ctr">
-              <a:lnSpc>
-                <a:spcPct val="135000"/>
-              </a:lnSpc>
-            </a:pPr>
-            <a:r>
-              <a:rPr sz="1800" b="0">
-                <a:solidFill>
-                  <a:srgbClr val="3D3D3D"/>
-                </a:solidFill>
-                <a:latin typeface="Pretendard"/>
-                <a:ea typeface="Pretendard"/>
-                <a:cs typeface="Pretendard"/>
-              </a:rPr>
-              <a:t>누적 매출</a:t>
+              <a:t>집계 표기 sum(amount) — 다른 곳은 이 정도</a:t>
             </a:r>
           </a:p>
         </p:txBody>
@@ -11477,20 +10989,20 @@
         </p:nvSpPr>
         <p:spPr>
           <a:xfrm>
-            <a:off x="1143000" y="5467350"/>
-            <a:ext cx="16002000" cy="742950"/>
+            <a:off x="9772650" y="4610100"/>
+            <a:ext cx="7372350" cy="2857500"/>
           </a:xfrm>
           <a:prstGeom prst="roundRect">
             <a:avLst>
-              <a:gd name="adj" fmla="val 6410"/>
+              <a:gd name="adj" fmla="val 1666"/>
             </a:avLst>
           </a:prstGeom>
           <a:solidFill>
-            <a:srgbClr val="EDF3FD"/>
+            <a:srgbClr val="FAFBFD"/>
           </a:solidFill>
           <a:ln w="9525">
             <a:solidFill>
-              <a:srgbClr val="BFD3F5"/>
+              <a:srgbClr val="DCE1E8"/>
             </a:solidFill>
           </a:ln>
           <a:effectLst/>
@@ -11505,14 +11017,44 @@
       </p:sp>
       <p:sp>
         <p:nvSpPr>
-          <p:cNvPr id="28" name="TextBox 27"/>
-          <p:cNvSpPr txBox="1"/>
-          <p:nvPr/>
-        </p:nvSpPr>
-        <p:spPr>
-          <a:xfrm>
-            <a:off x="1143000" y="5467350"/>
-            <a:ext cx="16002000" cy="742950"/>
+          <p:cNvPr id="28" name="Rectangle 27"/>
+          <p:cNvSpPr/>
+          <p:nvPr/>
+        </p:nvSpPr>
+        <p:spPr>
+          <a:xfrm>
+            <a:off x="10020300" y="4838700"/>
+            <a:ext cx="2152015" cy="599122"/>
+          </a:xfrm>
+          <a:prstGeom prst="rect">
+            <a:avLst/>
+          </a:prstGeom>
+          <a:solidFill>
+            <a:srgbClr val="0D2B5E"/>
+          </a:solidFill>
+          <a:ln>
+            <a:noFill/>
+          </a:ln>
+          <a:effectLst/>
+        </p:spPr>
+        <p:txBody>
+          <a:bodyPr rtlCol="0" anchor="ctr" wrap="square"/>
+          <a:lstStyle/>
+          <a:p>
+            <a:pPr algn="ctr"/>
+          </a:p>
+        </p:txBody>
+      </p:sp>
+      <p:sp>
+        <p:nvSpPr>
+          <p:cNvPr id="29" name="TextBox 28"/>
+          <p:cNvSpPr txBox="1"/>
+          <p:nvPr/>
+        </p:nvSpPr>
+        <p:spPr>
+          <a:xfrm>
+            <a:off x="10020300" y="4838700"/>
+            <a:ext cx="2152015" cy="599122"/>
           </a:xfrm>
           <a:prstGeom prst="rect">
             <a:avLst/>
@@ -11531,63 +11073,520 @@
               </a:lnSpc>
             </a:pPr>
             <a:r>
+              <a:rPr sz="2025" b="1">
+                <a:solidFill>
+                  <a:srgbClr val="FFFFFF"/>
+                </a:solidFill>
+                <a:latin typeface="Pretendard"/>
+                <a:ea typeface="Pretendard"/>
+                <a:cs typeface="Pretendard"/>
+              </a:rPr>
+              <a:t>Sort</a:t>
+            </a:r>
+          </a:p>
+        </p:txBody>
+      </p:sp>
+      <p:sp>
+        <p:nvSpPr>
+          <p:cNvPr id="30" name="Rounded Rectangle 29"/>
+          <p:cNvSpPr/>
+          <p:nvPr/>
+        </p:nvSpPr>
+        <p:spPr>
+          <a:xfrm>
+            <a:off x="10020300" y="5583555"/>
+            <a:ext cx="2152015" cy="1214438"/>
+          </a:xfrm>
+          <a:prstGeom prst="roundRect">
+            <a:avLst>
+              <a:gd name="adj" fmla="val 3921"/>
+            </a:avLst>
+          </a:prstGeom>
+          <a:solidFill>
+            <a:srgbClr val="FAFBFD"/>
+          </a:solidFill>
+          <a:ln w="9525">
+            <a:solidFill>
+              <a:srgbClr val="DCE1E8"/>
+            </a:solidFill>
+          </a:ln>
+          <a:effectLst/>
+        </p:spPr>
+        <p:txBody>
+          <a:bodyPr rtlCol="0" anchor="ctr" wrap="square"/>
+          <a:lstStyle/>
+          <a:p>
+            <a:pPr algn="ctr"/>
+          </a:p>
+        </p:txBody>
+      </p:sp>
+      <p:sp>
+        <p:nvSpPr>
+          <p:cNvPr id="31" name="TextBox 30"/>
+          <p:cNvSpPr txBox="1"/>
+          <p:nvPr/>
+        </p:nvSpPr>
+        <p:spPr>
+          <a:xfrm>
+            <a:off x="10153650" y="5583555"/>
+            <a:ext cx="1885315" cy="1214438"/>
+          </a:xfrm>
+          <a:prstGeom prst="rect">
+            <a:avLst/>
+          </a:prstGeom>
+          <a:noFill/>
+        </p:spPr>
+        <p:txBody>
+          <a:bodyPr wrap="square" lIns="0" rIns="0" tIns="0" bIns="0" anchor="ctr">
+            <a:spAutoFit/>
+          </a:bodyPr>
+          <a:lstStyle/>
+          <a:p>
+            <a:pPr algn="ctr">
+              <a:lnSpc>
+                <a:spcPct val="135000"/>
+              </a:lnSpc>
+            </a:pPr>
+            <a:r>
+              <a:rPr sz="1350" b="0">
+                <a:solidFill>
+                  <a:srgbClr val="3D3D3D"/>
+                </a:solidFill>
+                <a:latin typeface="Pretendard"/>
+                <a:ea typeface="Pretendard"/>
+                <a:cs typeface="Pretendard"/>
+              </a:rPr>
+              <a:t>Exchange range</a:t>
+            </a:r>
+          </a:p>
+        </p:txBody>
+      </p:sp>
+      <p:sp>
+        <p:nvSpPr>
+          <p:cNvPr id="32" name="Right Arrow 31"/>
+          <p:cNvSpPr/>
+          <p:nvPr/>
+        </p:nvSpPr>
+        <p:spPr>
+          <a:xfrm>
+            <a:off x="12191365" y="5049202"/>
+            <a:ext cx="172402" cy="178118"/>
+          </a:xfrm>
+          <a:prstGeom prst="rightArrow">
+            <a:avLst/>
+          </a:prstGeom>
+          <a:solidFill>
+            <a:srgbClr val="1E5BC6"/>
+          </a:solidFill>
+          <a:ln>
+            <a:noFill/>
+          </a:ln>
+          <a:effectLst/>
+        </p:spPr>
+        <p:txBody>
+          <a:bodyPr rtlCol="0" anchor="ctr" wrap="square"/>
+          <a:lstStyle/>
+          <a:p>
+            <a:pPr algn="ctr"/>
+          </a:p>
+        </p:txBody>
+      </p:sp>
+      <p:sp>
+        <p:nvSpPr>
+          <p:cNvPr id="33" name="Rectangle 32"/>
+          <p:cNvSpPr/>
+          <p:nvPr/>
+        </p:nvSpPr>
+        <p:spPr>
+          <a:xfrm>
+            <a:off x="12382818" y="4838700"/>
+            <a:ext cx="2152015" cy="599122"/>
+          </a:xfrm>
+          <a:prstGeom prst="rect">
+            <a:avLst/>
+          </a:prstGeom>
+          <a:solidFill>
+            <a:srgbClr val="1E5BC6"/>
+          </a:solidFill>
+          <a:ln>
+            <a:noFill/>
+          </a:ln>
+          <a:effectLst/>
+        </p:spPr>
+        <p:txBody>
+          <a:bodyPr rtlCol="0" anchor="ctr" wrap="square"/>
+          <a:lstStyle/>
+          <a:p>
+            <a:pPr algn="ctr"/>
+          </a:p>
+        </p:txBody>
+      </p:sp>
+      <p:sp>
+        <p:nvSpPr>
+          <p:cNvPr id="34" name="TextBox 33"/>
+          <p:cNvSpPr txBox="1"/>
+          <p:nvPr/>
+        </p:nvSpPr>
+        <p:spPr>
+          <a:xfrm>
+            <a:off x="12382818" y="4838700"/>
+            <a:ext cx="2152015" cy="599122"/>
+          </a:xfrm>
+          <a:prstGeom prst="rect">
+            <a:avLst/>
+          </a:prstGeom>
+          <a:noFill/>
+        </p:spPr>
+        <p:txBody>
+          <a:bodyPr wrap="square" lIns="0" rIns="0" tIns="0" bIns="0" anchor="ctr">
+            <a:spAutoFit/>
+          </a:bodyPr>
+          <a:lstStyle/>
+          <a:p>
+            <a:pPr algn="ctr">
+              <a:lnSpc>
+                <a:spcPct val="100000"/>
+              </a:lnSpc>
+            </a:pPr>
+            <a:r>
+              <a:rPr sz="2025" b="1">
+                <a:solidFill>
+                  <a:srgbClr val="FFFFFF"/>
+                </a:solidFill>
+                <a:latin typeface="Pretendard"/>
+                <a:ea typeface="Pretendard"/>
+                <a:cs typeface="Pretendard"/>
+              </a:rPr>
+              <a:t>HashAggregate</a:t>
+            </a:r>
+          </a:p>
+        </p:txBody>
+      </p:sp>
+      <p:sp>
+        <p:nvSpPr>
+          <p:cNvPr id="35" name="Rounded Rectangle 34"/>
+          <p:cNvSpPr/>
+          <p:nvPr/>
+        </p:nvSpPr>
+        <p:spPr>
+          <a:xfrm>
+            <a:off x="12382818" y="5583555"/>
+            <a:ext cx="2152015" cy="1214438"/>
+          </a:xfrm>
+          <a:prstGeom prst="roundRect">
+            <a:avLst>
+              <a:gd name="adj" fmla="val 3921"/>
+            </a:avLst>
+          </a:prstGeom>
+          <a:solidFill>
+            <a:srgbClr val="FAFBFD"/>
+          </a:solidFill>
+          <a:ln w="9525">
+            <a:solidFill>
+              <a:srgbClr val="DCE1E8"/>
+            </a:solidFill>
+          </a:ln>
+          <a:effectLst/>
+        </p:spPr>
+        <p:txBody>
+          <a:bodyPr rtlCol="0" anchor="ctr" wrap="square"/>
+          <a:lstStyle/>
+          <a:p>
+            <a:pPr algn="ctr"/>
+          </a:p>
+        </p:txBody>
+      </p:sp>
+      <p:sp>
+        <p:nvSpPr>
+          <p:cNvPr id="36" name="TextBox 35"/>
+          <p:cNvSpPr txBox="1"/>
+          <p:nvPr/>
+        </p:nvSpPr>
+        <p:spPr>
+          <a:xfrm>
+            <a:off x="12516168" y="5583555"/>
+            <a:ext cx="1885315" cy="1214438"/>
+          </a:xfrm>
+          <a:prstGeom prst="rect">
+            <a:avLst/>
+          </a:prstGeom>
+          <a:noFill/>
+        </p:spPr>
+        <p:txBody>
+          <a:bodyPr wrap="square" lIns="0" rIns="0" tIns="0" bIns="0" anchor="ctr">
+            <a:spAutoFit/>
+          </a:bodyPr>
+          <a:lstStyle/>
+          <a:p>
+            <a:pPr algn="ctr">
+              <a:lnSpc>
+                <a:spcPct val="135000"/>
+              </a:lnSpc>
+            </a:pPr>
+            <a:r>
+              <a:rPr sz="1350" b="0">
+                <a:solidFill>
+                  <a:srgbClr val="3D3D3D"/>
+                </a:solidFill>
+                <a:latin typeface="Pretendard"/>
+                <a:ea typeface="Pretendard"/>
+                <a:cs typeface="Pretendard"/>
+              </a:rPr>
+              <a:t>Exchange hash(name)</a:t>
+            </a:r>
+          </a:p>
+        </p:txBody>
+      </p:sp>
+      <p:sp>
+        <p:nvSpPr>
+          <p:cNvPr id="37" name="Right Arrow 36"/>
+          <p:cNvSpPr/>
+          <p:nvPr/>
+        </p:nvSpPr>
+        <p:spPr>
+          <a:xfrm>
+            <a:off x="14553882" y="5049202"/>
+            <a:ext cx="172402" cy="178118"/>
+          </a:xfrm>
+          <a:prstGeom prst="rightArrow">
+            <a:avLst/>
+          </a:prstGeom>
+          <a:solidFill>
+            <a:srgbClr val="1E5BC6"/>
+          </a:solidFill>
+          <a:ln>
+            <a:noFill/>
+          </a:ln>
+          <a:effectLst/>
+        </p:spPr>
+        <p:txBody>
+          <a:bodyPr rtlCol="0" anchor="ctr" wrap="square"/>
+          <a:lstStyle/>
+          <a:p>
+            <a:pPr algn="ctr"/>
+          </a:p>
+        </p:txBody>
+      </p:sp>
+      <p:sp>
+        <p:nvSpPr>
+          <p:cNvPr id="38" name="Rectangle 37"/>
+          <p:cNvSpPr/>
+          <p:nvPr/>
+        </p:nvSpPr>
+        <p:spPr>
+          <a:xfrm>
+            <a:off x="14745335" y="4838700"/>
+            <a:ext cx="2152015" cy="599122"/>
+          </a:xfrm>
+          <a:prstGeom prst="rect">
+            <a:avLst/>
+          </a:prstGeom>
+          <a:solidFill>
+            <a:srgbClr val="0D2B5E"/>
+          </a:solidFill>
+          <a:ln>
+            <a:noFill/>
+          </a:ln>
+          <a:effectLst/>
+        </p:spPr>
+        <p:txBody>
+          <a:bodyPr rtlCol="0" anchor="ctr" wrap="square"/>
+          <a:lstStyle/>
+          <a:p>
+            <a:pPr algn="ctr"/>
+          </a:p>
+        </p:txBody>
+      </p:sp>
+      <p:sp>
+        <p:nvSpPr>
+          <p:cNvPr id="39" name="TextBox 38"/>
+          <p:cNvSpPr txBox="1"/>
+          <p:nvPr/>
+        </p:nvSpPr>
+        <p:spPr>
+          <a:xfrm>
+            <a:off x="14745335" y="4838700"/>
+            <a:ext cx="2152015" cy="599122"/>
+          </a:xfrm>
+          <a:prstGeom prst="rect">
+            <a:avLst/>
+          </a:prstGeom>
+          <a:noFill/>
+        </p:spPr>
+        <p:txBody>
+          <a:bodyPr wrap="square" lIns="0" rIns="0" tIns="0" bIns="0" anchor="ctr">
+            <a:spAutoFit/>
+          </a:bodyPr>
+          <a:lstStyle/>
+          <a:p>
+            <a:pPr algn="ctr">
+              <a:lnSpc>
+                <a:spcPct val="100000"/>
+              </a:lnSpc>
+            </a:pPr>
+            <a:r>
+              <a:rPr sz="2025" b="1">
+                <a:solidFill>
+                  <a:srgbClr val="FFFFFF"/>
+                </a:solidFill>
+                <a:latin typeface="Pretendard"/>
+                <a:ea typeface="Pretendard"/>
+                <a:cs typeface="Pretendard"/>
+              </a:rPr>
+              <a:t>SortMergeJoin</a:t>
+            </a:r>
+          </a:p>
+        </p:txBody>
+      </p:sp>
+      <p:sp>
+        <p:nvSpPr>
+          <p:cNvPr id="40" name="Rounded Rectangle 39"/>
+          <p:cNvSpPr/>
+          <p:nvPr/>
+        </p:nvSpPr>
+        <p:spPr>
+          <a:xfrm>
+            <a:off x="14745335" y="5583555"/>
+            <a:ext cx="2152015" cy="1214438"/>
+          </a:xfrm>
+          <a:prstGeom prst="roundRect">
+            <a:avLst>
+              <a:gd name="adj" fmla="val 3921"/>
+            </a:avLst>
+          </a:prstGeom>
+          <a:solidFill>
+            <a:srgbClr val="FAFBFD"/>
+          </a:solidFill>
+          <a:ln w="9525">
+            <a:solidFill>
+              <a:srgbClr val="DCE1E8"/>
+            </a:solidFill>
+          </a:ln>
+          <a:effectLst/>
+        </p:spPr>
+        <p:txBody>
+          <a:bodyPr rtlCol="0" anchor="ctr" wrap="square"/>
+          <a:lstStyle/>
+          <a:p>
+            <a:pPr algn="ctr"/>
+          </a:p>
+        </p:txBody>
+      </p:sp>
+      <p:sp>
+        <p:nvSpPr>
+          <p:cNvPr id="41" name="TextBox 40"/>
+          <p:cNvSpPr txBox="1"/>
+          <p:nvPr/>
+        </p:nvSpPr>
+        <p:spPr>
+          <a:xfrm>
+            <a:off x="14878685" y="5583555"/>
+            <a:ext cx="1885315" cy="1214438"/>
+          </a:xfrm>
+          <a:prstGeom prst="rect">
+            <a:avLst/>
+          </a:prstGeom>
+          <a:noFill/>
+        </p:spPr>
+        <p:txBody>
+          <a:bodyPr wrap="square" lIns="0" rIns="0" tIns="0" bIns="0" anchor="ctr">
+            <a:spAutoFit/>
+          </a:bodyPr>
+          <a:lstStyle/>
+          <a:p>
+            <a:pPr algn="ctr">
+              <a:lnSpc>
+                <a:spcPct val="135000"/>
+              </a:lnSpc>
+            </a:pPr>
+            <a:r>
+              <a:rPr sz="1350" b="0">
+                <a:solidFill>
+                  <a:srgbClr val="3D3D3D"/>
+                </a:solidFill>
+                <a:latin typeface="Pretendard"/>
+                <a:ea typeface="Pretendard"/>
+                <a:cs typeface="Pretendard"/>
+              </a:rPr>
+              <a:t>양쪽 Exchange</a:t>
+            </a:r>
+          </a:p>
+        </p:txBody>
+      </p:sp>
+      <p:sp>
+        <p:nvSpPr>
+          <p:cNvPr id="42" name="Oval 41"/>
+          <p:cNvSpPr/>
+          <p:nvPr/>
+        </p:nvSpPr>
+        <p:spPr>
+          <a:xfrm>
+            <a:off x="8686800" y="3771900"/>
+            <a:ext cx="914400" cy="914400"/>
+          </a:xfrm>
+          <a:prstGeom prst="ellipse">
+            <a:avLst/>
+          </a:prstGeom>
+          <a:solidFill>
+            <a:srgbClr val="0D2B5E"/>
+          </a:solidFill>
+          <a:ln>
+            <a:noFill/>
+          </a:ln>
+          <a:effectLst/>
+        </p:spPr>
+        <p:txBody>
+          <a:bodyPr rtlCol="0" anchor="ctr" wrap="square"/>
+          <a:lstStyle/>
+          <a:p>
+            <a:pPr algn="ctr"/>
+          </a:p>
+        </p:txBody>
+      </p:sp>
+      <p:sp>
+        <p:nvSpPr>
+          <p:cNvPr id="43" name="TextBox 42"/>
+          <p:cNvSpPr txBox="1"/>
+          <p:nvPr/>
+        </p:nvSpPr>
+        <p:spPr>
+          <a:xfrm>
+            <a:off x="8686800" y="4057650"/>
+            <a:ext cx="914400" cy="381000"/>
+          </a:xfrm>
+          <a:prstGeom prst="rect">
+            <a:avLst/>
+          </a:prstGeom>
+          <a:noFill/>
+        </p:spPr>
+        <p:txBody>
+          <a:bodyPr wrap="square" lIns="0" rIns="0" tIns="0" bIns="0" anchor="t">
+            <a:spAutoFit/>
+          </a:bodyPr>
+          <a:lstStyle/>
+          <a:p>
+            <a:pPr algn="ctr">
+              <a:lnSpc>
+                <a:spcPct val="100000"/>
+              </a:lnSpc>
+            </a:pPr>
+            <a:r>
               <a:rPr sz="2250" b="1">
                 <a:solidFill>
-                  <a:srgbClr val="0D2B5E"/>
-                </a:solidFill>
-                <a:latin typeface="Pretendard"/>
-                <a:ea typeface="Pretendard"/>
-                <a:cs typeface="Pretendard"/>
-              </a:rPr>
-              <a:t>2-2 · 3-4 에서 쓴 것과 같은 문법 — 긴 쿼리를 읽기 좋게 나눈다</a:t>
-            </a:r>
-          </a:p>
-        </p:txBody>
-      </p:sp>
-      <p:sp>
-        <p:nvSpPr>
-          <p:cNvPr id="29" name="TextBox 28"/>
-          <p:cNvSpPr txBox="1"/>
-          <p:nvPr/>
-        </p:nvSpPr>
-        <p:spPr>
-          <a:xfrm>
-            <a:off x="1143000" y="7620000"/>
-            <a:ext cx="16002000" cy="342900"/>
-          </a:xfrm>
-          <a:prstGeom prst="rect">
-            <a:avLst/>
-          </a:prstGeom>
-          <a:noFill/>
-        </p:spPr>
-        <p:txBody>
-          <a:bodyPr wrap="square" lIns="0" rIns="0" tIns="0" bIns="0" anchor="t">
-            <a:spAutoFit/>
-          </a:bodyPr>
-          <a:lstStyle/>
-          <a:p>
-            <a:pPr algn="l">
-              <a:lnSpc>
-                <a:spcPct val="100000"/>
-              </a:lnSpc>
-            </a:pPr>
-            <a:r>
-              <a:rPr sz="1875" b="1">
-                <a:solidFill>
-                  <a:srgbClr val="7D7D7D"/>
-                </a:solidFill>
-                <a:latin typeface="Pretendard"/>
-                <a:ea typeface="Pretendard"/>
-                <a:cs typeface="Pretendard"/>
-              </a:rPr>
-              <a:t>WITH enriched AS (…), daily AS (…) SELECT … — SQL 을 익혀 두면 도구가 바뀌어도 그대로 쓰인다</a:t>
-            </a:r>
-          </a:p>
-        </p:txBody>
-      </p:sp>
-      <p:sp>
-        <p:nvSpPr>
-          <p:cNvPr id="30" name="Rectangle 29"/>
+                  <a:srgbClr val="FFFFFF"/>
+                </a:solidFill>
+                <a:latin typeface="Pretendard"/>
+                <a:ea typeface="Pretendard"/>
+                <a:cs typeface="Pretendard"/>
+              </a:rPr>
+              <a:t>VS</a:t>
+            </a:r>
+          </a:p>
+        </p:txBody>
+      </p:sp>
+      <p:sp>
+        <p:nvSpPr>
+          <p:cNvPr id="44" name="Rectangle 43"/>
           <p:cNvSpPr/>
           <p:nvPr/>
         </p:nvSpPr>
@@ -11617,7 +11616,7 @@
       </p:sp>
       <p:sp>
         <p:nvSpPr>
-          <p:cNvPr id="31" name="TextBox 30"/>
+          <p:cNvPr id="45" name="TextBox 44"/>
           <p:cNvSpPr txBox="1"/>
           <p:nvPr/>
         </p:nvSpPr>
@@ -11658,7 +11657,7 @@
       </p:sp>
       <p:sp>
         <p:nvSpPr>
-          <p:cNvPr id="32" name="TextBox 31"/>
+          <p:cNvPr id="46" name="TextBox 45"/>
           <p:cNvSpPr txBox="1"/>
           <p:nvPr/>
         </p:nvSpPr>
@@ -11717,7 +11716,7 @@
       <p:grpSpPr/>
       <p:sp>
         <p:nvSpPr>
-          <p:cNvPr id="2" name="Oval 1"/>
+          <p:cNvPr id="2" name="deckgen:decor"/>
           <p:cNvSpPr/>
           <p:nvPr/>
         </p:nvSpPr>
@@ -11747,7 +11746,7 @@
       </p:sp>
       <p:sp>
         <p:nvSpPr>
-          <p:cNvPr id="3" name="Oval 2"/>
+          <p:cNvPr id="3" name="deckgen:decor"/>
           <p:cNvSpPr/>
           <p:nvPr/>
         </p:nvSpPr>
@@ -11777,7 +11776,7 @@
       </p:sp>
       <p:sp>
         <p:nvSpPr>
-          <p:cNvPr id="4" name="Oval 3"/>
+          <p:cNvPr id="4" name="deckgen:decor"/>
           <p:cNvSpPr/>
           <p:nvPr/>
         </p:nvSpPr>
@@ -11841,7 +11840,7 @@
                 <a:ea typeface="Pretendard"/>
                 <a:cs typeface="Pretendard"/>
               </a:rPr>
-              <a:t>5단계</a:t>
+              <a:t>4단계</a:t>
             </a:r>
           </a:p>
         </p:txBody>
@@ -11882,7 +11881,7 @@
                 <a:ea typeface="Pretendard"/>
                 <a:cs typeface="Pretendard"/>
               </a:rPr>
-              <a:t>결과를 Iceberg 테이블로 저장 — 방법 넷</a:t>
+              <a:t>CTE 와 지연 평가 — q 와 q.show()</a:t>
             </a:r>
           </a:p>
         </p:txBody>
@@ -11919,306 +11918,18 @@
       </p:sp>
       <p:sp>
         <p:nvSpPr>
-          <p:cNvPr id="8" name="Rectangle 7"/>
-          <p:cNvSpPr/>
-          <p:nvPr/>
-        </p:nvSpPr>
-        <p:spPr>
-          <a:xfrm>
-            <a:off x="1143000" y="2781300"/>
-            <a:ext cx="3802380" cy="590550"/>
-          </a:xfrm>
-          <a:prstGeom prst="rect">
-            <a:avLst/>
-          </a:prstGeom>
-          <a:solidFill>
-            <a:srgbClr val="0D2B5E"/>
-          </a:solidFill>
-          <a:ln>
-            <a:noFill/>
-          </a:ln>
-          <a:effectLst/>
-        </p:spPr>
-        <p:txBody>
-          <a:bodyPr rtlCol="0" anchor="ctr" wrap="square"/>
-          <a:lstStyle/>
-          <a:p>
-            <a:pPr algn="ctr"/>
-          </a:p>
-        </p:txBody>
-      </p:sp>
-      <p:sp>
-        <p:nvSpPr>
-          <p:cNvPr id="9" name="TextBox 8"/>
-          <p:cNvSpPr txBox="1"/>
-          <p:nvPr/>
-        </p:nvSpPr>
-        <p:spPr>
-          <a:xfrm>
-            <a:off x="1143000" y="2781300"/>
-            <a:ext cx="3802380" cy="590550"/>
-          </a:xfrm>
-          <a:prstGeom prst="rect">
-            <a:avLst/>
-          </a:prstGeom>
-          <a:noFill/>
-        </p:spPr>
-        <p:txBody>
-          <a:bodyPr wrap="square" lIns="0" rIns="0" tIns="0" bIns="0" anchor="ctr">
-            <a:spAutoFit/>
-          </a:bodyPr>
-          <a:lstStyle/>
-          <a:p>
-            <a:pPr algn="ctr">
-              <a:lnSpc>
-                <a:spcPct val="100000"/>
-              </a:lnSpc>
-            </a:pPr>
-            <a:r>
-              <a:rPr sz="2025" b="1">
-                <a:solidFill>
-                  <a:srgbClr val="FFFFFF"/>
-                </a:solidFill>
-                <a:latin typeface="Pretendard"/>
-                <a:ea typeface="Pretendard"/>
-                <a:cs typeface="Pretendard"/>
-              </a:rPr>
-              <a:t>방법</a:t>
-            </a:r>
-          </a:p>
-        </p:txBody>
-      </p:sp>
-      <p:sp>
-        <p:nvSpPr>
-          <p:cNvPr id="10" name="Rectangle 9"/>
-          <p:cNvSpPr/>
-          <p:nvPr/>
-        </p:nvSpPr>
-        <p:spPr>
-          <a:xfrm>
-            <a:off x="4983480" y="2781300"/>
-            <a:ext cx="7322820" cy="590550"/>
-          </a:xfrm>
-          <a:prstGeom prst="rect">
-            <a:avLst/>
-          </a:prstGeom>
-          <a:solidFill>
-            <a:srgbClr val="1E5BC6"/>
-          </a:solidFill>
-          <a:ln>
-            <a:noFill/>
-          </a:ln>
-          <a:effectLst/>
-        </p:spPr>
-        <p:txBody>
-          <a:bodyPr rtlCol="0" anchor="ctr" wrap="square"/>
-          <a:lstStyle/>
-          <a:p>
-            <a:pPr algn="ctr"/>
-          </a:p>
-        </p:txBody>
-      </p:sp>
-      <p:sp>
-        <p:nvSpPr>
-          <p:cNvPr id="11" name="TextBox 10"/>
-          <p:cNvSpPr txBox="1"/>
-          <p:nvPr/>
-        </p:nvSpPr>
-        <p:spPr>
-          <a:xfrm>
-            <a:off x="4983480" y="2781300"/>
-            <a:ext cx="7322820" cy="590550"/>
-          </a:xfrm>
-          <a:prstGeom prst="rect">
-            <a:avLst/>
-          </a:prstGeom>
-          <a:noFill/>
-        </p:spPr>
-        <p:txBody>
-          <a:bodyPr wrap="square" lIns="0" rIns="0" tIns="0" bIns="0" anchor="ctr">
-            <a:spAutoFit/>
-          </a:bodyPr>
-          <a:lstStyle/>
-          <a:p>
-            <a:pPr algn="ctr">
-              <a:lnSpc>
-                <a:spcPct val="100000"/>
-              </a:lnSpc>
-            </a:pPr>
-            <a:r>
-              <a:rPr sz="2025" b="1">
-                <a:solidFill>
-                  <a:srgbClr val="FFFFFF"/>
-                </a:solidFill>
-                <a:latin typeface="Pretendard"/>
-                <a:ea typeface="Pretendard"/>
-                <a:cs typeface="Pretendard"/>
-              </a:rPr>
-              <a:t>한 줄</a:t>
-            </a:r>
-          </a:p>
-        </p:txBody>
-      </p:sp>
-      <p:sp>
-        <p:nvSpPr>
-          <p:cNvPr id="12" name="Rectangle 11"/>
-          <p:cNvSpPr/>
-          <p:nvPr/>
-        </p:nvSpPr>
-        <p:spPr>
-          <a:xfrm>
-            <a:off x="12344400" y="2781300"/>
-            <a:ext cx="4800600" cy="590550"/>
-          </a:xfrm>
-          <a:prstGeom prst="rect">
-            <a:avLst/>
-          </a:prstGeom>
-          <a:solidFill>
-            <a:srgbClr val="1E5BC6"/>
-          </a:solidFill>
-          <a:ln>
-            <a:noFill/>
-          </a:ln>
-          <a:effectLst/>
-        </p:spPr>
-        <p:txBody>
-          <a:bodyPr rtlCol="0" anchor="ctr" wrap="square"/>
-          <a:lstStyle/>
-          <a:p>
-            <a:pPr algn="ctr"/>
-          </a:p>
-        </p:txBody>
-      </p:sp>
-      <p:sp>
-        <p:nvSpPr>
-          <p:cNvPr id="13" name="TextBox 12"/>
-          <p:cNvSpPr txBox="1"/>
-          <p:nvPr/>
-        </p:nvSpPr>
-        <p:spPr>
-          <a:xfrm>
-            <a:off x="12344400" y="2781300"/>
-            <a:ext cx="4800600" cy="590550"/>
-          </a:xfrm>
-          <a:prstGeom prst="rect">
-            <a:avLst/>
-          </a:prstGeom>
-          <a:noFill/>
-        </p:spPr>
-        <p:txBody>
-          <a:bodyPr wrap="square" lIns="0" rIns="0" tIns="0" bIns="0" anchor="ctr">
-            <a:spAutoFit/>
-          </a:bodyPr>
-          <a:lstStyle/>
-          <a:p>
-            <a:pPr algn="ctr">
-              <a:lnSpc>
-                <a:spcPct val="100000"/>
-              </a:lnSpc>
-            </a:pPr>
-            <a:r>
-              <a:rPr sz="2025" b="1">
-                <a:solidFill>
-                  <a:srgbClr val="FFFFFF"/>
-                </a:solidFill>
-                <a:latin typeface="Pretendard"/>
-                <a:ea typeface="Pretendard"/>
-                <a:cs typeface="Pretendard"/>
-              </a:rPr>
-              <a:t>동작</a:t>
-            </a:r>
-          </a:p>
-        </p:txBody>
-      </p:sp>
-      <p:sp>
-        <p:nvSpPr>
-          <p:cNvPr id="14" name="Rounded Rectangle 13"/>
-          <p:cNvSpPr/>
-          <p:nvPr/>
-        </p:nvSpPr>
-        <p:spPr>
-          <a:xfrm>
-            <a:off x="1143000" y="3448050"/>
-            <a:ext cx="3802380" cy="647700"/>
+          <p:cNvPr id="8" name="Rounded Rectangle 7"/>
+          <p:cNvSpPr/>
+          <p:nvPr/>
+        </p:nvSpPr>
+        <p:spPr>
+          <a:xfrm>
+            <a:off x="1143000" y="2933700"/>
+            <a:ext cx="16002000" cy="1095375"/>
           </a:xfrm>
           <a:prstGeom prst="roundRect">
             <a:avLst>
-              <a:gd name="adj" fmla="val 5882"/>
-            </a:avLst>
-          </a:prstGeom>
-          <a:solidFill>
-            <a:srgbClr val="EDF3FD"/>
-          </a:solidFill>
-          <a:ln w="9525">
-            <a:solidFill>
-              <a:srgbClr val="BFD3F5"/>
-            </a:solidFill>
-          </a:ln>
-          <a:effectLst/>
-        </p:spPr>
-        <p:txBody>
-          <a:bodyPr rtlCol="0" anchor="ctr" wrap="square"/>
-          <a:lstStyle/>
-          <a:p>
-            <a:pPr algn="ctr"/>
-          </a:p>
-        </p:txBody>
-      </p:sp>
-      <p:sp>
-        <p:nvSpPr>
-          <p:cNvPr id="15" name="TextBox 14"/>
-          <p:cNvSpPr txBox="1"/>
-          <p:nvPr/>
-        </p:nvSpPr>
-        <p:spPr>
-          <a:xfrm>
-            <a:off x="1238250" y="3448050"/>
-            <a:ext cx="3611880" cy="647700"/>
-          </a:xfrm>
-          <a:prstGeom prst="rect">
-            <a:avLst/>
-          </a:prstGeom>
-          <a:noFill/>
-        </p:spPr>
-        <p:txBody>
-          <a:bodyPr wrap="square" lIns="0" rIns="0" tIns="0" bIns="0" anchor="ctr">
-            <a:spAutoFit/>
-          </a:bodyPr>
-          <a:lstStyle/>
-          <a:p>
-            <a:pPr algn="l">
-              <a:lnSpc>
-                <a:spcPct val="115000"/>
-              </a:lnSpc>
-            </a:pPr>
-            <a:r>
-              <a:rPr sz="1875" b="1">
-                <a:solidFill>
-                  <a:srgbClr val="0D2B5E"/>
-                </a:solidFill>
-                <a:latin typeface="Pretendard"/>
-                <a:ea typeface="Pretendard"/>
-                <a:cs typeface="Pretendard"/>
-              </a:rPr>
-              <a:t>createOrReplace()</a:t>
-            </a:r>
-          </a:p>
-        </p:txBody>
-      </p:sp>
-      <p:sp>
-        <p:nvSpPr>
-          <p:cNvPr id="16" name="Rounded Rectangle 15"/>
-          <p:cNvSpPr/>
-          <p:nvPr/>
-        </p:nvSpPr>
-        <p:spPr>
-          <a:xfrm>
-            <a:off x="4983480" y="3448050"/>
-            <a:ext cx="7322820" cy="647700"/>
-          </a:xfrm>
-          <a:prstGeom prst="roundRect">
-            <a:avLst>
-              <a:gd name="adj" fmla="val 5882"/>
+              <a:gd name="adj" fmla="val 4347"/>
             </a:avLst>
           </a:prstGeom>
           <a:solidFill>
@@ -12241,33 +11952,145 @@
       </p:sp>
       <p:sp>
         <p:nvSpPr>
-          <p:cNvPr id="17" name="TextBox 16"/>
-          <p:cNvSpPr txBox="1"/>
-          <p:nvPr/>
-        </p:nvSpPr>
-        <p:spPr>
-          <a:xfrm>
-            <a:off x="5078730" y="3448050"/>
-            <a:ext cx="7132320" cy="647700"/>
-          </a:xfrm>
-          <a:prstGeom prst="rect">
-            <a:avLst/>
-          </a:prstGeom>
-          <a:noFill/>
-        </p:spPr>
-        <p:txBody>
-          <a:bodyPr wrap="square" lIns="0" rIns="0" tIns="0" bIns="0" anchor="ctr">
+          <p:cNvPr id="9" name="Oval 8"/>
+          <p:cNvSpPr/>
+          <p:nvPr/>
+        </p:nvSpPr>
+        <p:spPr>
+          <a:xfrm>
+            <a:off x="1447800" y="3181350"/>
+            <a:ext cx="590550" cy="590550"/>
+          </a:xfrm>
+          <a:prstGeom prst="ellipse">
+            <a:avLst/>
+          </a:prstGeom>
+          <a:solidFill>
+            <a:srgbClr val="0D2B5E"/>
+          </a:solidFill>
+          <a:ln>
+            <a:noFill/>
+          </a:ln>
+          <a:effectLst/>
+        </p:spPr>
+        <p:txBody>
+          <a:bodyPr rtlCol="0" anchor="ctr" wrap="square"/>
+          <a:lstStyle/>
+          <a:p>
+            <a:pPr algn="ctr"/>
+          </a:p>
+        </p:txBody>
+      </p:sp>
+      <p:sp>
+        <p:nvSpPr>
+          <p:cNvPr id="10" name="TextBox 9"/>
+          <p:cNvSpPr txBox="1"/>
+          <p:nvPr/>
+        </p:nvSpPr>
+        <p:spPr>
+          <a:xfrm>
+            <a:off x="1447800" y="3333750"/>
+            <a:ext cx="590550" cy="323850"/>
+          </a:xfrm>
+          <a:prstGeom prst="rect">
+            <a:avLst/>
+          </a:prstGeom>
+          <a:noFill/>
+        </p:spPr>
+        <p:txBody>
+          <a:bodyPr wrap="square" lIns="0" rIns="0" tIns="0" bIns="0" anchor="t">
             <a:spAutoFit/>
           </a:bodyPr>
           <a:lstStyle/>
           <a:p>
             <a:pPr algn="ctr">
               <a:lnSpc>
-                <a:spcPct val="115000"/>
-              </a:lnSpc>
-            </a:pPr>
-            <a:r>
-              <a:rPr sz="1875" b="0">
+                <a:spcPct val="100000"/>
+              </a:lnSpc>
+            </a:pPr>
+            <a:r>
+              <a:rPr sz="2250" b="1">
+                <a:solidFill>
+                  <a:srgbClr val="FFFFFF"/>
+                </a:solidFill>
+                <a:latin typeface="Pretendard"/>
+                <a:ea typeface="Pretendard"/>
+                <a:cs typeface="Pretendard"/>
+              </a:rPr>
+              <a:t>1</a:t>
+            </a:r>
+          </a:p>
+        </p:txBody>
+      </p:sp>
+      <p:sp>
+        <p:nvSpPr>
+          <p:cNvPr id="11" name="TextBox 10"/>
+          <p:cNvSpPr txBox="1"/>
+          <p:nvPr/>
+        </p:nvSpPr>
+        <p:spPr>
+          <a:xfrm>
+            <a:off x="2324100" y="3143250"/>
+            <a:ext cx="14478000" cy="400050"/>
+          </a:xfrm>
+          <a:prstGeom prst="rect">
+            <a:avLst/>
+          </a:prstGeom>
+          <a:noFill/>
+        </p:spPr>
+        <p:txBody>
+          <a:bodyPr wrap="square" lIns="0" rIns="0" tIns="0" bIns="0" anchor="t">
+            <a:spAutoFit/>
+          </a:bodyPr>
+          <a:lstStyle/>
+          <a:p>
+            <a:pPr algn="l">
+              <a:lnSpc>
+                <a:spcPct val="110000"/>
+              </a:lnSpc>
+            </a:pPr>
+            <a:r>
+              <a:rPr sz="2475" b="1">
+                <a:solidFill>
+                  <a:srgbClr val="0D2B5E"/>
+                </a:solidFill>
+                <a:latin typeface="Pretendard"/>
+                <a:ea typeface="Pretendard"/>
+                <a:cs typeface="Pretendard"/>
+              </a:rPr>
+              <a:t>q = spark.sql("""WITH enriched AS (…), daily AS (…) SELECT …""")</a:t>
+            </a:r>
+          </a:p>
+        </p:txBody>
+      </p:sp>
+      <p:sp>
+        <p:nvSpPr>
+          <p:cNvPr id="12" name="TextBox 11"/>
+          <p:cNvSpPr txBox="1"/>
+          <p:nvPr/>
+        </p:nvSpPr>
+        <p:spPr>
+          <a:xfrm>
+            <a:off x="2324100" y="3543300"/>
+            <a:ext cx="14478000" cy="361950"/>
+          </a:xfrm>
+          <a:prstGeom prst="rect">
+            <a:avLst/>
+          </a:prstGeom>
+          <a:noFill/>
+        </p:spPr>
+        <p:txBody>
+          <a:bodyPr wrap="square" lIns="0" rIns="0" tIns="0" bIns="0" anchor="t">
+            <a:spAutoFit/>
+          </a:bodyPr>
+          <a:lstStyle/>
+          <a:p>
+            <a:pPr algn="l">
+              <a:lnSpc>
+                <a:spcPct val="120000"/>
+              </a:lnSpc>
+            </a:pPr>
+            <a:r>
+              <a:rPr sz="2025" b="0">
                 <a:solidFill>
                   <a:srgbClr val="3D3D3D"/>
                 </a:solidFill>
@@ -12275,43 +12098,25 @@
                 <a:ea typeface="Pretendard"/>
                 <a:cs typeface="Pretendard"/>
               </a:rPr>
-              <a:t>sales.writeTo("lake.db.product_sales")</a:t>
-            </a:r>
-          </a:p>
-          <a:p>
-            <a:pPr algn="ctr">
-              <a:lnSpc>
-                <a:spcPct val="115000"/>
-              </a:lnSpc>
-            </a:pPr>
-            <a:r>
-              <a:rPr sz="1875" b="0">
-                <a:solidFill>
-                  <a:srgbClr val="3D3D3D"/>
-                </a:solidFill>
-                <a:latin typeface="Pretendard"/>
-                <a:ea typeface="Pretendard"/>
-                <a:cs typeface="Pretendard"/>
-              </a:rPr>
-              <a:t>.createOrReplace()</a:t>
-            </a:r>
-          </a:p>
-        </p:txBody>
-      </p:sp>
-      <p:sp>
-        <p:nvSpPr>
-          <p:cNvPr id="18" name="Rounded Rectangle 17"/>
-          <p:cNvSpPr/>
-          <p:nvPr/>
-        </p:nvSpPr>
-        <p:spPr>
-          <a:xfrm>
-            <a:off x="12344400" y="3448050"/>
-            <a:ext cx="4800600" cy="647700"/>
+              <a:t>아무 출력 없이 &gt;&gt;&gt; — 계획만 세웠고 실행은 아직(지연 평가)</a:t>
+            </a:r>
+          </a:p>
+        </p:txBody>
+      </p:sp>
+      <p:sp>
+        <p:nvSpPr>
+          <p:cNvPr id="13" name="Rounded Rectangle 12"/>
+          <p:cNvSpPr/>
+          <p:nvPr/>
+        </p:nvSpPr>
+        <p:spPr>
+          <a:xfrm>
+            <a:off x="1143000" y="4200525"/>
+            <a:ext cx="16002000" cy="1095375"/>
           </a:xfrm>
           <a:prstGeom prst="roundRect">
             <a:avLst>
-              <a:gd name="adj" fmla="val 5882"/>
+              <a:gd name="adj" fmla="val 4347"/>
             </a:avLst>
           </a:prstGeom>
           <a:solidFill>
@@ -12334,33 +12139,145 @@
       </p:sp>
       <p:sp>
         <p:nvSpPr>
-          <p:cNvPr id="19" name="TextBox 18"/>
-          <p:cNvSpPr txBox="1"/>
-          <p:nvPr/>
-        </p:nvSpPr>
-        <p:spPr>
-          <a:xfrm>
-            <a:off x="12439650" y="3448050"/>
-            <a:ext cx="4610100" cy="647700"/>
-          </a:xfrm>
-          <a:prstGeom prst="rect">
-            <a:avLst/>
-          </a:prstGeom>
-          <a:noFill/>
-        </p:spPr>
-        <p:txBody>
-          <a:bodyPr wrap="square" lIns="0" rIns="0" tIns="0" bIns="0" anchor="ctr">
+          <p:cNvPr id="14" name="Oval 13"/>
+          <p:cNvSpPr/>
+          <p:nvPr/>
+        </p:nvSpPr>
+        <p:spPr>
+          <a:xfrm>
+            <a:off x="1447800" y="4448175"/>
+            <a:ext cx="590550" cy="590550"/>
+          </a:xfrm>
+          <a:prstGeom prst="ellipse">
+            <a:avLst/>
+          </a:prstGeom>
+          <a:solidFill>
+            <a:srgbClr val="0D2B5E"/>
+          </a:solidFill>
+          <a:ln>
+            <a:noFill/>
+          </a:ln>
+          <a:effectLst/>
+        </p:spPr>
+        <p:txBody>
+          <a:bodyPr rtlCol="0" anchor="ctr" wrap="square"/>
+          <a:lstStyle/>
+          <a:p>
+            <a:pPr algn="ctr"/>
+          </a:p>
+        </p:txBody>
+      </p:sp>
+      <p:sp>
+        <p:nvSpPr>
+          <p:cNvPr id="15" name="TextBox 14"/>
+          <p:cNvSpPr txBox="1"/>
+          <p:nvPr/>
+        </p:nvSpPr>
+        <p:spPr>
+          <a:xfrm>
+            <a:off x="1447800" y="4600575"/>
+            <a:ext cx="590550" cy="323850"/>
+          </a:xfrm>
+          <a:prstGeom prst="rect">
+            <a:avLst/>
+          </a:prstGeom>
+          <a:noFill/>
+        </p:spPr>
+        <p:txBody>
+          <a:bodyPr wrap="square" lIns="0" rIns="0" tIns="0" bIns="0" anchor="t">
             <a:spAutoFit/>
           </a:bodyPr>
           <a:lstStyle/>
           <a:p>
             <a:pPr algn="ctr">
               <a:lnSpc>
-                <a:spcPct val="115000"/>
-              </a:lnSpc>
-            </a:pPr>
-            <a:r>
-              <a:rPr sz="1875" b="0">
+                <a:spcPct val="100000"/>
+              </a:lnSpc>
+            </a:pPr>
+            <a:r>
+              <a:rPr sz="2250" b="1">
+                <a:solidFill>
+                  <a:srgbClr val="FFFFFF"/>
+                </a:solidFill>
+                <a:latin typeface="Pretendard"/>
+                <a:ea typeface="Pretendard"/>
+                <a:cs typeface="Pretendard"/>
+              </a:rPr>
+              <a:t>2</a:t>
+            </a:r>
+          </a:p>
+        </p:txBody>
+      </p:sp>
+      <p:sp>
+        <p:nvSpPr>
+          <p:cNvPr id="16" name="TextBox 15"/>
+          <p:cNvSpPr txBox="1"/>
+          <p:nvPr/>
+        </p:nvSpPr>
+        <p:spPr>
+          <a:xfrm>
+            <a:off x="2324100" y="4410075"/>
+            <a:ext cx="14478000" cy="400050"/>
+          </a:xfrm>
+          <a:prstGeom prst="rect">
+            <a:avLst/>
+          </a:prstGeom>
+          <a:noFill/>
+        </p:spPr>
+        <p:txBody>
+          <a:bodyPr wrap="square" lIns="0" rIns="0" tIns="0" bIns="0" anchor="t">
+            <a:spAutoFit/>
+          </a:bodyPr>
+          <a:lstStyle/>
+          <a:p>
+            <a:pPr algn="l">
+              <a:lnSpc>
+                <a:spcPct val="110000"/>
+              </a:lnSpc>
+            </a:pPr>
+            <a:r>
+              <a:rPr sz="2475" b="1">
+                <a:solidFill>
+                  <a:srgbClr val="0D2B5E"/>
+                </a:solidFill>
+                <a:latin typeface="Pretendard"/>
+                <a:ea typeface="Pretendard"/>
+                <a:cs typeface="Pretendard"/>
+              </a:rPr>
+              <a:t>q</a:t>
+            </a:r>
+          </a:p>
+        </p:txBody>
+      </p:sp>
+      <p:sp>
+        <p:nvSpPr>
+          <p:cNvPr id="17" name="TextBox 16"/>
+          <p:cNvSpPr txBox="1"/>
+          <p:nvPr/>
+        </p:nvSpPr>
+        <p:spPr>
+          <a:xfrm>
+            <a:off x="2324100" y="4810125"/>
+            <a:ext cx="14478000" cy="361950"/>
+          </a:xfrm>
+          <a:prstGeom prst="rect">
+            <a:avLst/>
+          </a:prstGeom>
+          <a:noFill/>
+        </p:spPr>
+        <p:txBody>
+          <a:bodyPr wrap="square" lIns="0" rIns="0" tIns="0" bIns="0" anchor="t">
+            <a:spAutoFit/>
+          </a:bodyPr>
+          <a:lstStyle/>
+          <a:p>
+            <a:pPr algn="l">
+              <a:lnSpc>
+                <a:spcPct val="120000"/>
+              </a:lnSpc>
+            </a:pPr>
+            <a:r>
+              <a:rPr sz="2025" b="0">
                 <a:solidFill>
                   <a:srgbClr val="3D3D3D"/>
                 </a:solidFill>
@@ -12368,118 +12285,25 @@
                 <a:ea typeface="Pretendard"/>
                 <a:cs typeface="Pretendard"/>
               </a:rPr>
-              <a:t>없으면 만들고</a:t>
-            </a:r>
-          </a:p>
-          <a:p>
-            <a:pPr algn="ctr">
-              <a:lnSpc>
-                <a:spcPct val="115000"/>
-              </a:lnSpc>
-            </a:pPr>
-            <a:r>
-              <a:rPr sz="1875" b="0">
-                <a:solidFill>
-                  <a:srgbClr val="3D3D3D"/>
-                </a:solidFill>
-                <a:latin typeface="Pretendard"/>
-                <a:ea typeface="Pretendard"/>
-                <a:cs typeface="Pretendard"/>
-              </a:rPr>
-              <a:t>있으면 통째로 교체</a:t>
-            </a:r>
-          </a:p>
-        </p:txBody>
-      </p:sp>
-      <p:sp>
-        <p:nvSpPr>
-          <p:cNvPr id="20" name="Rounded Rectangle 19"/>
-          <p:cNvSpPr/>
-          <p:nvPr/>
-        </p:nvSpPr>
-        <p:spPr>
-          <a:xfrm>
-            <a:off x="1143000" y="4171950"/>
-            <a:ext cx="3802380" cy="647700"/>
+              <a:t>DataFrame[order_date: date, revenue: bigint, cum_revenue: bigint] 한 줄</a:t>
+            </a:r>
+          </a:p>
+        </p:txBody>
+      </p:sp>
+      <p:sp>
+        <p:nvSpPr>
+          <p:cNvPr id="18" name="Rounded Rectangle 17"/>
+          <p:cNvSpPr/>
+          <p:nvPr/>
+        </p:nvSpPr>
+        <p:spPr>
+          <a:xfrm>
+            <a:off x="1143000" y="5467350"/>
+            <a:ext cx="16002000" cy="1095375"/>
           </a:xfrm>
           <a:prstGeom prst="roundRect">
             <a:avLst>
-              <a:gd name="adj" fmla="val 5882"/>
-            </a:avLst>
-          </a:prstGeom>
-          <a:solidFill>
-            <a:srgbClr val="EDF3FD"/>
-          </a:solidFill>
-          <a:ln w="9525">
-            <a:solidFill>
-              <a:srgbClr val="BFD3F5"/>
-            </a:solidFill>
-          </a:ln>
-          <a:effectLst/>
-        </p:spPr>
-        <p:txBody>
-          <a:bodyPr rtlCol="0" anchor="ctr" wrap="square"/>
-          <a:lstStyle/>
-          <a:p>
-            <a:pPr algn="ctr"/>
-          </a:p>
-        </p:txBody>
-      </p:sp>
-      <p:sp>
-        <p:nvSpPr>
-          <p:cNvPr id="21" name="TextBox 20"/>
-          <p:cNvSpPr txBox="1"/>
-          <p:nvPr/>
-        </p:nvSpPr>
-        <p:spPr>
-          <a:xfrm>
-            <a:off x="1238250" y="4171950"/>
-            <a:ext cx="3611880" cy="647700"/>
-          </a:xfrm>
-          <a:prstGeom prst="rect">
-            <a:avLst/>
-          </a:prstGeom>
-          <a:noFill/>
-        </p:spPr>
-        <p:txBody>
-          <a:bodyPr wrap="square" lIns="0" rIns="0" tIns="0" bIns="0" anchor="ctr">
-            <a:spAutoFit/>
-          </a:bodyPr>
-          <a:lstStyle/>
-          <a:p>
-            <a:pPr algn="l">
-              <a:lnSpc>
-                <a:spcPct val="115000"/>
-              </a:lnSpc>
-            </a:pPr>
-            <a:r>
-              <a:rPr sz="1875" b="1">
-                <a:solidFill>
-                  <a:srgbClr val="0D2B5E"/>
-                </a:solidFill>
-                <a:latin typeface="Pretendard"/>
-                <a:ea typeface="Pretendard"/>
-                <a:cs typeface="Pretendard"/>
-              </a:rPr>
-              <a:t>append()</a:t>
-            </a:r>
-          </a:p>
-        </p:txBody>
-      </p:sp>
-      <p:sp>
-        <p:nvSpPr>
-          <p:cNvPr id="22" name="Rounded Rectangle 21"/>
-          <p:cNvSpPr/>
-          <p:nvPr/>
-        </p:nvSpPr>
-        <p:spPr>
-          <a:xfrm>
-            <a:off x="4983480" y="4171950"/>
-            <a:ext cx="7322820" cy="647700"/>
-          </a:xfrm>
-          <a:prstGeom prst="roundRect">
-            <a:avLst>
-              <a:gd name="adj" fmla="val 5882"/>
+              <a:gd name="adj" fmla="val 4347"/>
             </a:avLst>
           </a:prstGeom>
           <a:solidFill>
@@ -12502,33 +12326,145 @@
       </p:sp>
       <p:sp>
         <p:nvSpPr>
-          <p:cNvPr id="23" name="TextBox 22"/>
-          <p:cNvSpPr txBox="1"/>
-          <p:nvPr/>
-        </p:nvSpPr>
-        <p:spPr>
-          <a:xfrm>
-            <a:off x="5078730" y="4171950"/>
-            <a:ext cx="7132320" cy="647700"/>
-          </a:xfrm>
-          <a:prstGeom prst="rect">
-            <a:avLst/>
-          </a:prstGeom>
-          <a:noFill/>
-        </p:spPr>
-        <p:txBody>
-          <a:bodyPr wrap="square" lIns="0" rIns="0" tIns="0" bIns="0" anchor="ctr">
+          <p:cNvPr id="19" name="Oval 18"/>
+          <p:cNvSpPr/>
+          <p:nvPr/>
+        </p:nvSpPr>
+        <p:spPr>
+          <a:xfrm>
+            <a:off x="1447800" y="5715000"/>
+            <a:ext cx="590550" cy="590550"/>
+          </a:xfrm>
+          <a:prstGeom prst="ellipse">
+            <a:avLst/>
+          </a:prstGeom>
+          <a:solidFill>
+            <a:srgbClr val="0D2B5E"/>
+          </a:solidFill>
+          <a:ln>
+            <a:noFill/>
+          </a:ln>
+          <a:effectLst/>
+        </p:spPr>
+        <p:txBody>
+          <a:bodyPr rtlCol="0" anchor="ctr" wrap="square"/>
+          <a:lstStyle/>
+          <a:p>
+            <a:pPr algn="ctr"/>
+          </a:p>
+        </p:txBody>
+      </p:sp>
+      <p:sp>
+        <p:nvSpPr>
+          <p:cNvPr id="20" name="TextBox 19"/>
+          <p:cNvSpPr txBox="1"/>
+          <p:nvPr/>
+        </p:nvSpPr>
+        <p:spPr>
+          <a:xfrm>
+            <a:off x="1447800" y="5867400"/>
+            <a:ext cx="590550" cy="323850"/>
+          </a:xfrm>
+          <a:prstGeom prst="rect">
+            <a:avLst/>
+          </a:prstGeom>
+          <a:noFill/>
+        </p:spPr>
+        <p:txBody>
+          <a:bodyPr wrap="square" lIns="0" rIns="0" tIns="0" bIns="0" anchor="t">
             <a:spAutoFit/>
           </a:bodyPr>
           <a:lstStyle/>
           <a:p>
             <a:pPr algn="ctr">
               <a:lnSpc>
-                <a:spcPct val="115000"/>
-              </a:lnSpc>
-            </a:pPr>
-            <a:r>
-              <a:rPr sz="1875" b="0">
+                <a:spcPct val="100000"/>
+              </a:lnSpc>
+            </a:pPr>
+            <a:r>
+              <a:rPr sz="2250" b="1">
+                <a:solidFill>
+                  <a:srgbClr val="FFFFFF"/>
+                </a:solidFill>
+                <a:latin typeface="Pretendard"/>
+                <a:ea typeface="Pretendard"/>
+                <a:cs typeface="Pretendard"/>
+              </a:rPr>
+              <a:t>3</a:t>
+            </a:r>
+          </a:p>
+        </p:txBody>
+      </p:sp>
+      <p:sp>
+        <p:nvSpPr>
+          <p:cNvPr id="21" name="TextBox 20"/>
+          <p:cNvSpPr txBox="1"/>
+          <p:nvPr/>
+        </p:nvSpPr>
+        <p:spPr>
+          <a:xfrm>
+            <a:off x="2324100" y="5676900"/>
+            <a:ext cx="14478000" cy="400050"/>
+          </a:xfrm>
+          <a:prstGeom prst="rect">
+            <a:avLst/>
+          </a:prstGeom>
+          <a:noFill/>
+        </p:spPr>
+        <p:txBody>
+          <a:bodyPr wrap="square" lIns="0" rIns="0" tIns="0" bIns="0" anchor="t">
+            <a:spAutoFit/>
+          </a:bodyPr>
+          <a:lstStyle/>
+          <a:p>
+            <a:pPr algn="l">
+              <a:lnSpc>
+                <a:spcPct val="110000"/>
+              </a:lnSpc>
+            </a:pPr>
+            <a:r>
+              <a:rPr sz="2475" b="1">
+                <a:solidFill>
+                  <a:srgbClr val="0D2B5E"/>
+                </a:solidFill>
+                <a:latin typeface="Pretendard"/>
+                <a:ea typeface="Pretendard"/>
+                <a:cs typeface="Pretendard"/>
+              </a:rPr>
+              <a:t>q.show()</a:t>
+            </a:r>
+          </a:p>
+        </p:txBody>
+      </p:sp>
+      <p:sp>
+        <p:nvSpPr>
+          <p:cNvPr id="22" name="TextBox 21"/>
+          <p:cNvSpPr txBox="1"/>
+          <p:nvPr/>
+        </p:nvSpPr>
+        <p:spPr>
+          <a:xfrm>
+            <a:off x="2324100" y="6076950"/>
+            <a:ext cx="14478000" cy="361950"/>
+          </a:xfrm>
+          <a:prstGeom prst="rect">
+            <a:avLst/>
+          </a:prstGeom>
+          <a:noFill/>
+        </p:spPr>
+        <p:txBody>
+          <a:bodyPr wrap="square" lIns="0" rIns="0" tIns="0" bIns="0" anchor="t">
+            <a:spAutoFit/>
+          </a:bodyPr>
+          <a:lstStyle/>
+          <a:p>
+            <a:pPr algn="l">
+              <a:lnSpc>
+                <a:spcPct val="120000"/>
+              </a:lnSpc>
+            </a:pPr>
+            <a:r>
+              <a:rPr sz="2025" b="0">
                 <a:solidFill>
                   <a:srgbClr val="3D3D3D"/>
                 </a:solidFill>
@@ -12536,25 +12472,25 @@
                 <a:ea typeface="Pretendard"/>
                 <a:cs typeface="Pretendard"/>
               </a:rPr>
-              <a:t>.writeTo(…).append()</a:t>
-            </a:r>
-          </a:p>
-        </p:txBody>
-      </p:sp>
-      <p:sp>
-        <p:nvSpPr>
-          <p:cNvPr id="24" name="Rounded Rectangle 23"/>
-          <p:cNvSpPr/>
-          <p:nvPr/>
-        </p:nvSpPr>
-        <p:spPr>
-          <a:xfrm>
-            <a:off x="12344400" y="4171950"/>
-            <a:ext cx="4800600" cy="647700"/>
+              <a:t>08-24 113000·113000 / 08-25 1155000·1268000 / 08-26 46000·1314000</a:t>
+            </a:r>
+          </a:p>
+        </p:txBody>
+      </p:sp>
+      <p:sp>
+        <p:nvSpPr>
+          <p:cNvPr id="23" name="Rounded Rectangle 22"/>
+          <p:cNvSpPr/>
+          <p:nvPr/>
+        </p:nvSpPr>
+        <p:spPr>
+          <a:xfrm>
+            <a:off x="1143000" y="6734175"/>
+            <a:ext cx="16002000" cy="1095375"/>
           </a:xfrm>
           <a:prstGeom prst="roundRect">
             <a:avLst>
-              <a:gd name="adj" fmla="val 5882"/>
+              <a:gd name="adj" fmla="val 4347"/>
             </a:avLst>
           </a:prstGeom>
           <a:solidFill>
@@ -12577,33 +12513,145 @@
       </p:sp>
       <p:sp>
         <p:nvSpPr>
+          <p:cNvPr id="24" name="Oval 23"/>
+          <p:cNvSpPr/>
+          <p:nvPr/>
+        </p:nvSpPr>
+        <p:spPr>
+          <a:xfrm>
+            <a:off x="1447800" y="6981825"/>
+            <a:ext cx="590550" cy="590550"/>
+          </a:xfrm>
+          <a:prstGeom prst="ellipse">
+            <a:avLst/>
+          </a:prstGeom>
+          <a:solidFill>
+            <a:srgbClr val="0D2B5E"/>
+          </a:solidFill>
+          <a:ln>
+            <a:noFill/>
+          </a:ln>
+          <a:effectLst/>
+        </p:spPr>
+        <p:txBody>
+          <a:bodyPr rtlCol="0" anchor="ctr" wrap="square"/>
+          <a:lstStyle/>
+          <a:p>
+            <a:pPr algn="ctr"/>
+          </a:p>
+        </p:txBody>
+      </p:sp>
+      <p:sp>
+        <p:nvSpPr>
           <p:cNvPr id="25" name="TextBox 24"/>
           <p:cNvSpPr txBox="1"/>
           <p:nvPr/>
         </p:nvSpPr>
         <p:spPr>
           <a:xfrm>
-            <a:off x="12439650" y="4171950"/>
-            <a:ext cx="4610100" cy="647700"/>
-          </a:xfrm>
-          <a:prstGeom prst="rect">
-            <a:avLst/>
-          </a:prstGeom>
-          <a:noFill/>
-        </p:spPr>
-        <p:txBody>
-          <a:bodyPr wrap="square" lIns="0" rIns="0" tIns="0" bIns="0" anchor="ctr">
+            <a:off x="1447800" y="7134225"/>
+            <a:ext cx="590550" cy="323850"/>
+          </a:xfrm>
+          <a:prstGeom prst="rect">
+            <a:avLst/>
+          </a:prstGeom>
+          <a:noFill/>
+        </p:spPr>
+        <p:txBody>
+          <a:bodyPr wrap="square" lIns="0" rIns="0" tIns="0" bIns="0" anchor="t">
             <a:spAutoFit/>
           </a:bodyPr>
           <a:lstStyle/>
           <a:p>
             <a:pPr algn="ctr">
               <a:lnSpc>
-                <a:spcPct val="115000"/>
-              </a:lnSpc>
-            </a:pPr>
-            <a:r>
-              <a:rPr sz="1875" b="0">
+                <a:spcPct val="100000"/>
+              </a:lnSpc>
+            </a:pPr>
+            <a:r>
+              <a:rPr sz="2250" b="1">
+                <a:solidFill>
+                  <a:srgbClr val="FFFFFF"/>
+                </a:solidFill>
+                <a:latin typeface="Pretendard"/>
+                <a:ea typeface="Pretendard"/>
+                <a:cs typeface="Pretendard"/>
+              </a:rPr>
+              <a:t>4</a:t>
+            </a:r>
+          </a:p>
+        </p:txBody>
+      </p:sp>
+      <p:sp>
+        <p:nvSpPr>
+          <p:cNvPr id="26" name="TextBox 25"/>
+          <p:cNvSpPr txBox="1"/>
+          <p:nvPr/>
+        </p:nvSpPr>
+        <p:spPr>
+          <a:xfrm>
+            <a:off x="2324100" y="6943725"/>
+            <a:ext cx="14478000" cy="400050"/>
+          </a:xfrm>
+          <a:prstGeom prst="rect">
+            <a:avLst/>
+          </a:prstGeom>
+          <a:noFill/>
+        </p:spPr>
+        <p:txBody>
+          <a:bodyPr wrap="square" lIns="0" rIns="0" tIns="0" bIns="0" anchor="t">
+            <a:spAutoFit/>
+          </a:bodyPr>
+          <a:lstStyle/>
+          <a:p>
+            <a:pPr algn="l">
+              <a:lnSpc>
+                <a:spcPct val="110000"/>
+              </a:lnSpc>
+            </a:pPr>
+            <a:r>
+              <a:rPr sz="2475" b="1">
+                <a:solidFill>
+                  <a:srgbClr val="0D2B5E"/>
+                </a:solidFill>
+                <a:latin typeface="Pretendard"/>
+                <a:ea typeface="Pretendard"/>
+                <a:cs typeface="Pretendard"/>
+              </a:rPr>
+              <a:t>WARN WindowExec: No Partition Defined …</a:t>
+            </a:r>
+          </a:p>
+        </p:txBody>
+      </p:sp>
+      <p:sp>
+        <p:nvSpPr>
+          <p:cNvPr id="27" name="TextBox 26"/>
+          <p:cNvSpPr txBox="1"/>
+          <p:nvPr/>
+        </p:nvSpPr>
+        <p:spPr>
+          <a:xfrm>
+            <a:off x="2324100" y="7343775"/>
+            <a:ext cx="14478000" cy="361950"/>
+          </a:xfrm>
+          <a:prstGeom prst="rect">
+            <a:avLst/>
+          </a:prstGeom>
+          <a:noFill/>
+        </p:spPr>
+        <p:txBody>
+          <a:bodyPr wrap="square" lIns="0" rIns="0" tIns="0" bIns="0" anchor="t">
+            <a:spAutoFit/>
+          </a:bodyPr>
+          <a:lstStyle/>
+          <a:p>
+            <a:pPr algn="l">
+              <a:lnSpc>
+                <a:spcPct val="120000"/>
+              </a:lnSpc>
+            </a:pPr>
+            <a:r>
+              <a:rPr sz="2025" b="0">
                 <a:solidFill>
                   <a:srgbClr val="3D3D3D"/>
                 </a:solidFill>
@@ -12611,541 +12659,14 @@
                 <a:ea typeface="Pretendard"/>
                 <a:cs typeface="Pretendard"/>
               </a:rPr>
-              <a:t>뒤에 붙임</a:t>
-            </a:r>
-          </a:p>
-        </p:txBody>
-      </p:sp>
-      <p:sp>
-        <p:nvSpPr>
-          <p:cNvPr id="26" name="Rounded Rectangle 25"/>
-          <p:cNvSpPr/>
-          <p:nvPr/>
-        </p:nvSpPr>
-        <p:spPr>
-          <a:xfrm>
-            <a:off x="1143000" y="4895850"/>
-            <a:ext cx="3802380" cy="647700"/>
-          </a:xfrm>
-          <a:prstGeom prst="roundRect">
-            <a:avLst>
-              <a:gd name="adj" fmla="val 5882"/>
-            </a:avLst>
-          </a:prstGeom>
-          <a:solidFill>
-            <a:srgbClr val="EDF3FD"/>
-          </a:solidFill>
-          <a:ln w="9525">
-            <a:solidFill>
-              <a:srgbClr val="BFD3F5"/>
-            </a:solidFill>
-          </a:ln>
-          <a:effectLst/>
-        </p:spPr>
-        <p:txBody>
-          <a:bodyPr rtlCol="0" anchor="ctr" wrap="square"/>
-          <a:lstStyle/>
-          <a:p>
-            <a:pPr algn="ctr"/>
-          </a:p>
-        </p:txBody>
-      </p:sp>
-      <p:sp>
-        <p:nvSpPr>
-          <p:cNvPr id="27" name="TextBox 26"/>
-          <p:cNvSpPr txBox="1"/>
-          <p:nvPr/>
-        </p:nvSpPr>
-        <p:spPr>
-          <a:xfrm>
-            <a:off x="1238250" y="4895850"/>
-            <a:ext cx="3611880" cy="647700"/>
-          </a:xfrm>
-          <a:prstGeom prst="rect">
-            <a:avLst/>
-          </a:prstGeom>
-          <a:noFill/>
-        </p:spPr>
-        <p:txBody>
-          <a:bodyPr wrap="square" lIns="0" rIns="0" tIns="0" bIns="0" anchor="ctr">
-            <a:spAutoFit/>
-          </a:bodyPr>
-          <a:lstStyle/>
-          <a:p>
-            <a:pPr algn="l">
-              <a:lnSpc>
-                <a:spcPct val="115000"/>
-              </a:lnSpc>
-            </a:pPr>
-            <a:r>
-              <a:rPr sz="1875" b="1">
-                <a:solidFill>
-                  <a:srgbClr val="0D2B5E"/>
-                </a:solidFill>
-                <a:latin typeface="Pretendard"/>
-                <a:ea typeface="Pretendard"/>
-                <a:cs typeface="Pretendard"/>
-              </a:rPr>
-              <a:t>overwritePartitions()</a:t>
-            </a:r>
-          </a:p>
-        </p:txBody>
-      </p:sp>
-      <p:sp>
-        <p:nvSpPr>
-          <p:cNvPr id="28" name="Rounded Rectangle 27"/>
-          <p:cNvSpPr/>
-          <p:nvPr/>
-        </p:nvSpPr>
-        <p:spPr>
-          <a:xfrm>
-            <a:off x="4983480" y="4895850"/>
-            <a:ext cx="7322820" cy="647700"/>
-          </a:xfrm>
-          <a:prstGeom prst="roundRect">
-            <a:avLst>
-              <a:gd name="adj" fmla="val 5882"/>
-            </a:avLst>
-          </a:prstGeom>
-          <a:solidFill>
-            <a:srgbClr val="FAFBFD"/>
-          </a:solidFill>
-          <a:ln w="9525">
-            <a:solidFill>
-              <a:srgbClr val="DCE1E8"/>
-            </a:solidFill>
-          </a:ln>
-          <a:effectLst/>
-        </p:spPr>
-        <p:txBody>
-          <a:bodyPr rtlCol="0" anchor="ctr" wrap="square"/>
-          <a:lstStyle/>
-          <a:p>
-            <a:pPr algn="ctr"/>
-          </a:p>
-        </p:txBody>
-      </p:sp>
-      <p:sp>
-        <p:nvSpPr>
-          <p:cNvPr id="29" name="TextBox 28"/>
-          <p:cNvSpPr txBox="1"/>
-          <p:nvPr/>
-        </p:nvSpPr>
-        <p:spPr>
-          <a:xfrm>
-            <a:off x="5078730" y="4895850"/>
-            <a:ext cx="7132320" cy="647700"/>
-          </a:xfrm>
-          <a:prstGeom prst="rect">
-            <a:avLst/>
-          </a:prstGeom>
-          <a:noFill/>
-        </p:spPr>
-        <p:txBody>
-          <a:bodyPr wrap="square" lIns="0" rIns="0" tIns="0" bIns="0" anchor="ctr">
-            <a:spAutoFit/>
-          </a:bodyPr>
-          <a:lstStyle/>
-          <a:p>
-            <a:pPr algn="ctr">
-              <a:lnSpc>
-                <a:spcPct val="115000"/>
-              </a:lnSpc>
-            </a:pPr>
-            <a:r>
-              <a:rPr sz="1875" b="0">
-                <a:solidFill>
-                  <a:srgbClr val="3D3D3D"/>
-                </a:solidFill>
-                <a:latin typeface="Pretendard"/>
-                <a:ea typeface="Pretendard"/>
-                <a:cs typeface="Pretendard"/>
-              </a:rPr>
-              <a:t>.writeTo(…).overwritePartitions()</a:t>
-            </a:r>
-          </a:p>
-        </p:txBody>
-      </p:sp>
-      <p:sp>
-        <p:nvSpPr>
-          <p:cNvPr id="30" name="Rounded Rectangle 29"/>
-          <p:cNvSpPr/>
-          <p:nvPr/>
-        </p:nvSpPr>
-        <p:spPr>
-          <a:xfrm>
-            <a:off x="12344400" y="4895850"/>
-            <a:ext cx="4800600" cy="647700"/>
-          </a:xfrm>
-          <a:prstGeom prst="roundRect">
-            <a:avLst>
-              <a:gd name="adj" fmla="val 5882"/>
-            </a:avLst>
-          </a:prstGeom>
-          <a:solidFill>
-            <a:srgbClr val="FAFBFD"/>
-          </a:solidFill>
-          <a:ln w="9525">
-            <a:solidFill>
-              <a:srgbClr val="DCE1E8"/>
-            </a:solidFill>
-          </a:ln>
-          <a:effectLst/>
-        </p:spPr>
-        <p:txBody>
-          <a:bodyPr rtlCol="0" anchor="ctr" wrap="square"/>
-          <a:lstStyle/>
-          <a:p>
-            <a:pPr algn="ctr"/>
-          </a:p>
-        </p:txBody>
-      </p:sp>
-      <p:sp>
-        <p:nvSpPr>
-          <p:cNvPr id="31" name="TextBox 30"/>
-          <p:cNvSpPr txBox="1"/>
-          <p:nvPr/>
-        </p:nvSpPr>
-        <p:spPr>
-          <a:xfrm>
-            <a:off x="12439650" y="4895850"/>
-            <a:ext cx="4610100" cy="647700"/>
-          </a:xfrm>
-          <a:prstGeom prst="rect">
-            <a:avLst/>
-          </a:prstGeom>
-          <a:noFill/>
-        </p:spPr>
-        <p:txBody>
-          <a:bodyPr wrap="square" lIns="0" rIns="0" tIns="0" bIns="0" anchor="ctr">
-            <a:spAutoFit/>
-          </a:bodyPr>
-          <a:lstStyle/>
-          <a:p>
-            <a:pPr algn="ctr">
-              <a:lnSpc>
-                <a:spcPct val="115000"/>
-              </a:lnSpc>
-            </a:pPr>
-            <a:r>
-              <a:rPr sz="1875" b="0">
-                <a:solidFill>
-                  <a:srgbClr val="3D3D3D"/>
-                </a:solidFill>
-                <a:latin typeface="Pretendard"/>
-                <a:ea typeface="Pretendard"/>
-                <a:cs typeface="Pretendard"/>
-              </a:rPr>
-              <a:t>해당 파티션만 교체</a:t>
-            </a:r>
-          </a:p>
-        </p:txBody>
-      </p:sp>
-      <p:sp>
-        <p:nvSpPr>
-          <p:cNvPr id="32" name="Rounded Rectangle 31"/>
-          <p:cNvSpPr/>
-          <p:nvPr/>
-        </p:nvSpPr>
-        <p:spPr>
-          <a:xfrm>
-            <a:off x="1143000" y="5619750"/>
-            <a:ext cx="3802380" cy="647700"/>
-          </a:xfrm>
-          <a:prstGeom prst="roundRect">
-            <a:avLst>
-              <a:gd name="adj" fmla="val 5882"/>
-            </a:avLst>
-          </a:prstGeom>
-          <a:solidFill>
-            <a:srgbClr val="EDF3FD"/>
-          </a:solidFill>
-          <a:ln w="9525">
-            <a:solidFill>
-              <a:srgbClr val="BFD3F5"/>
-            </a:solidFill>
-          </a:ln>
-          <a:effectLst/>
-        </p:spPr>
-        <p:txBody>
-          <a:bodyPr rtlCol="0" anchor="ctr" wrap="square"/>
-          <a:lstStyle/>
-          <a:p>
-            <a:pPr algn="ctr"/>
-          </a:p>
-        </p:txBody>
-      </p:sp>
-      <p:sp>
-        <p:nvSpPr>
-          <p:cNvPr id="33" name="TextBox 32"/>
-          <p:cNvSpPr txBox="1"/>
-          <p:nvPr/>
-        </p:nvSpPr>
-        <p:spPr>
-          <a:xfrm>
-            <a:off x="1238250" y="5619750"/>
-            <a:ext cx="3611880" cy="647700"/>
-          </a:xfrm>
-          <a:prstGeom prst="rect">
-            <a:avLst/>
-          </a:prstGeom>
-          <a:noFill/>
-        </p:spPr>
-        <p:txBody>
-          <a:bodyPr wrap="square" lIns="0" rIns="0" tIns="0" bIns="0" anchor="ctr">
-            <a:spAutoFit/>
-          </a:bodyPr>
-          <a:lstStyle/>
-          <a:p>
-            <a:pPr algn="l">
-              <a:lnSpc>
-                <a:spcPct val="115000"/>
-              </a:lnSpc>
-            </a:pPr>
-            <a:r>
-              <a:rPr sz="1875" b="1">
-                <a:solidFill>
-                  <a:srgbClr val="0D2B5E"/>
-                </a:solidFill>
-                <a:latin typeface="Pretendard"/>
-                <a:ea typeface="Pretendard"/>
-                <a:cs typeface="Pretendard"/>
-              </a:rPr>
-              <a:t>SQL CTAS</a:t>
-            </a:r>
-          </a:p>
-        </p:txBody>
-      </p:sp>
-      <p:sp>
-        <p:nvSpPr>
-          <p:cNvPr id="34" name="Rounded Rectangle 33"/>
-          <p:cNvSpPr/>
-          <p:nvPr/>
-        </p:nvSpPr>
-        <p:spPr>
-          <a:xfrm>
-            <a:off x="4983480" y="5619750"/>
-            <a:ext cx="7322820" cy="647700"/>
-          </a:xfrm>
-          <a:prstGeom prst="roundRect">
-            <a:avLst>
-              <a:gd name="adj" fmla="val 5882"/>
-            </a:avLst>
-          </a:prstGeom>
-          <a:solidFill>
-            <a:srgbClr val="FAFBFD"/>
-          </a:solidFill>
-          <a:ln w="9525">
-            <a:solidFill>
-              <a:srgbClr val="DCE1E8"/>
-            </a:solidFill>
-          </a:ln>
-          <a:effectLst/>
-        </p:spPr>
-        <p:txBody>
-          <a:bodyPr rtlCol="0" anchor="ctr" wrap="square"/>
-          <a:lstStyle/>
-          <a:p>
-            <a:pPr algn="ctr"/>
-          </a:p>
-        </p:txBody>
-      </p:sp>
-      <p:sp>
-        <p:nvSpPr>
-          <p:cNvPr id="35" name="TextBox 34"/>
-          <p:cNvSpPr txBox="1"/>
-          <p:nvPr/>
-        </p:nvSpPr>
-        <p:spPr>
-          <a:xfrm>
-            <a:off x="5078730" y="5619750"/>
-            <a:ext cx="7132320" cy="647700"/>
-          </a:xfrm>
-          <a:prstGeom prst="rect">
-            <a:avLst/>
-          </a:prstGeom>
-          <a:noFill/>
-        </p:spPr>
-        <p:txBody>
-          <a:bodyPr wrap="square" lIns="0" rIns="0" tIns="0" bIns="0" anchor="ctr">
-            <a:spAutoFit/>
-          </a:bodyPr>
-          <a:lstStyle/>
-          <a:p>
-            <a:pPr algn="ctr">
-              <a:lnSpc>
-                <a:spcPct val="115000"/>
-              </a:lnSpc>
-            </a:pPr>
-            <a:r>
-              <a:rPr sz="1875" b="0">
-                <a:solidFill>
-                  <a:srgbClr val="3D3D3D"/>
-                </a:solidFill>
-                <a:latin typeface="Pretendard"/>
-                <a:ea typeface="Pretendard"/>
-                <a:cs typeface="Pretendard"/>
-              </a:rPr>
-              <a:t>CREATE OR REPLACE TABLE lake.db.daily_revenue</a:t>
-            </a:r>
-          </a:p>
-          <a:p>
-            <a:pPr algn="ctr">
-              <a:lnSpc>
-                <a:spcPct val="115000"/>
-              </a:lnSpc>
-            </a:pPr>
-            <a:r>
-              <a:rPr sz="1875" b="0">
-                <a:solidFill>
-                  <a:srgbClr val="3D3D3D"/>
-                </a:solidFill>
-                <a:latin typeface="Pretendard"/>
-                <a:ea typeface="Pretendard"/>
-                <a:cs typeface="Pretendard"/>
-              </a:rPr>
-              <a:t>USING iceberg AS SELECT …</a:t>
-            </a:r>
-          </a:p>
-        </p:txBody>
-      </p:sp>
-      <p:sp>
-        <p:nvSpPr>
-          <p:cNvPr id="36" name="Rounded Rectangle 35"/>
-          <p:cNvSpPr/>
-          <p:nvPr/>
-        </p:nvSpPr>
-        <p:spPr>
-          <a:xfrm>
-            <a:off x="12344400" y="5619750"/>
-            <a:ext cx="4800600" cy="647700"/>
-          </a:xfrm>
-          <a:prstGeom prst="roundRect">
-            <a:avLst>
-              <a:gd name="adj" fmla="val 5882"/>
-            </a:avLst>
-          </a:prstGeom>
-          <a:solidFill>
-            <a:srgbClr val="FAFBFD"/>
-          </a:solidFill>
-          <a:ln w="9525">
-            <a:solidFill>
-              <a:srgbClr val="DCE1E8"/>
-            </a:solidFill>
-          </a:ln>
-          <a:effectLst/>
-        </p:spPr>
-        <p:txBody>
-          <a:bodyPr rtlCol="0" anchor="ctr" wrap="square"/>
-          <a:lstStyle/>
-          <a:p>
-            <a:pPr algn="ctr"/>
-          </a:p>
-        </p:txBody>
-      </p:sp>
-      <p:sp>
-        <p:nvSpPr>
-          <p:cNvPr id="37" name="TextBox 36"/>
-          <p:cNvSpPr txBox="1"/>
-          <p:nvPr/>
-        </p:nvSpPr>
-        <p:spPr>
-          <a:xfrm>
-            <a:off x="12439650" y="5619750"/>
-            <a:ext cx="4610100" cy="647700"/>
-          </a:xfrm>
-          <a:prstGeom prst="rect">
-            <a:avLst/>
-          </a:prstGeom>
-          <a:noFill/>
-        </p:spPr>
-        <p:txBody>
-          <a:bodyPr wrap="square" lIns="0" rIns="0" tIns="0" bIns="0" anchor="ctr">
-            <a:spAutoFit/>
-          </a:bodyPr>
-          <a:lstStyle/>
-          <a:p>
-            <a:pPr algn="ctr">
-              <a:lnSpc>
-                <a:spcPct val="115000"/>
-              </a:lnSpc>
-            </a:pPr>
-            <a:r>
-              <a:rPr sz="1875" b="0">
-                <a:solidFill>
-                  <a:srgbClr val="3D3D3D"/>
-                </a:solidFill>
-                <a:latin typeface="Pretendard"/>
-                <a:ea typeface="Pretendard"/>
-                <a:cs typeface="Pretendard"/>
-              </a:rPr>
-              <a:t>4-4 의 Trino CTAS 와</a:t>
-            </a:r>
-          </a:p>
-          <a:p>
-            <a:pPr algn="ctr">
-              <a:lnSpc>
-                <a:spcPct val="115000"/>
-              </a:lnSpc>
-            </a:pPr>
-            <a:r>
-              <a:rPr sz="1875" b="0">
-                <a:solidFill>
-                  <a:srgbClr val="3D3D3D"/>
-                </a:solidFill>
-                <a:latin typeface="Pretendard"/>
-                <a:ea typeface="Pretendard"/>
-                <a:cs typeface="Pretendard"/>
-              </a:rPr>
-              <a:t>같은 형태</a:t>
-            </a:r>
-          </a:p>
-        </p:txBody>
-      </p:sp>
-      <p:sp>
-        <p:nvSpPr>
-          <p:cNvPr id="38" name="TextBox 37"/>
-          <p:cNvSpPr txBox="1"/>
-          <p:nvPr/>
-        </p:nvSpPr>
-        <p:spPr>
-          <a:xfrm>
-            <a:off x="1143000" y="7620000"/>
-            <a:ext cx="16002000" cy="342900"/>
-          </a:xfrm>
-          <a:prstGeom prst="rect">
-            <a:avLst/>
-          </a:prstGeom>
-          <a:noFill/>
-        </p:spPr>
-        <p:txBody>
-          <a:bodyPr wrap="square" lIns="0" rIns="0" tIns="0" bIns="0" anchor="t">
-            <a:spAutoFit/>
-          </a:bodyPr>
-          <a:lstStyle/>
-          <a:p>
-            <a:pPr algn="l">
-              <a:lnSpc>
-                <a:spcPct val="100000"/>
-              </a:lnSpc>
-            </a:pPr>
-            <a:r>
-              <a:rPr sz="1875" b="1">
-                <a:solidFill>
-                  <a:srgbClr val="7D7D7D"/>
-                </a:solidFill>
-                <a:latin typeface="Pretendard"/>
-                <a:ea typeface="Pretendard"/>
-                <a:cs typeface="Pretendard"/>
-              </a:rPr>
-              <a:t>저장 뒤 SELECT * FROM lake.db.product_sales 가 sales 와 같고, MinIO 의 warehouse/db/product_sales/ 아래 파일이 생긴다</a:t>
-            </a:r>
-          </a:p>
-        </p:txBody>
-      </p:sp>
-      <p:sp>
-        <p:nvSpPr>
-          <p:cNvPr id="39" name="Rectangle 38"/>
+              <a:t>OVER 에 PARTITION BY 가 없다는 경고 — 누적 합계라 맞는 동작</a:t>
+            </a:r>
+          </a:p>
+        </p:txBody>
+      </p:sp>
+      <p:sp>
+        <p:nvSpPr>
+          <p:cNvPr id="28" name="Rectangle 27"/>
           <p:cNvSpPr/>
           <p:nvPr/>
         </p:nvSpPr>
@@ -13175,7 +12696,7 @@
       </p:sp>
       <p:sp>
         <p:nvSpPr>
-          <p:cNvPr id="40" name="TextBox 39"/>
+          <p:cNvPr id="29" name="TextBox 28"/>
           <p:cNvSpPr txBox="1"/>
           <p:nvPr/>
         </p:nvSpPr>
@@ -13216,7 +12737,7 @@
       </p:sp>
       <p:sp>
         <p:nvSpPr>
-          <p:cNvPr id="41" name="TextBox 40"/>
+          <p:cNvPr id="30" name="TextBox 29"/>
           <p:cNvSpPr txBox="1"/>
           <p:nvPr/>
         </p:nvSpPr>
@@ -13275,7 +12796,7 @@
       <p:grpSpPr/>
       <p:sp>
         <p:nvSpPr>
-          <p:cNvPr id="2" name="Oval 1"/>
+          <p:cNvPr id="2" name="deckgen:decor"/>
           <p:cNvSpPr/>
           <p:nvPr/>
         </p:nvSpPr>
@@ -13305,7 +12826,7 @@
       </p:sp>
       <p:sp>
         <p:nvSpPr>
-          <p:cNvPr id="3" name="Oval 2"/>
+          <p:cNvPr id="3" name="deckgen:decor"/>
           <p:cNvSpPr/>
           <p:nvPr/>
         </p:nvSpPr>
@@ -13335,7 +12856,7 @@
       </p:sp>
       <p:sp>
         <p:nvSpPr>
-          <p:cNvPr id="4" name="Oval 3"/>
+          <p:cNvPr id="4" name="deckgen:decor"/>
           <p:cNvSpPr/>
           <p:nvPr/>
         </p:nvSpPr>
@@ -13399,7 +12920,7 @@
                 <a:ea typeface="Pretendard"/>
                 <a:cs typeface="Pretendard"/>
               </a:rPr>
-              <a:t>일부러 실패시키기</a:t>
+              <a:t>5단계</a:t>
             </a:r>
           </a:p>
         </p:txBody>
@@ -13440,7 +12961,7 @@
                 <a:ea typeface="Pretendard"/>
                 <a:cs typeface="Pretendard"/>
               </a:rPr>
-              <a:t>show() 를 빼고 실행하면 — 아무것도 없다</a:t>
+              <a:t>Iceberg 로 저장 — 세 가지 + SQL CTAS</a:t>
             </a:r>
           </a:p>
         </p:txBody>
@@ -13477,59 +12998,306 @@
       </p:sp>
       <p:sp>
         <p:nvSpPr>
-          <p:cNvPr id="8" name="TextBox 7"/>
-          <p:cNvSpPr txBox="1"/>
-          <p:nvPr/>
-        </p:nvSpPr>
-        <p:spPr>
-          <a:xfrm>
-            <a:off x="1143000" y="3067050"/>
-            <a:ext cx="16002000" cy="438150"/>
-          </a:xfrm>
-          <a:prstGeom prst="rect">
-            <a:avLst/>
-          </a:prstGeom>
-          <a:noFill/>
-        </p:spPr>
-        <p:txBody>
-          <a:bodyPr wrap="square" lIns="0" rIns="0" tIns="0" bIns="0" anchor="t">
-            <a:spAutoFit/>
-          </a:bodyPr>
-          <a:lstStyle/>
-          <a:p>
-            <a:pPr algn="l">
-              <a:lnSpc>
-                <a:spcPct val="130000"/>
-              </a:lnSpc>
-            </a:pPr>
-            <a:r>
-              <a:rPr sz="2550" b="1">
-                <a:solidFill>
-                  <a:srgbClr val="3D3D3D"/>
-                </a:solidFill>
-                <a:latin typeface="Pretendard"/>
-                <a:ea typeface="Pretendard"/>
-                <a:cs typeface="Pretendard"/>
-              </a:rPr>
-              <a:t>이론의 「지연 평가(action 을 불러야 실행)」를 직접 겪어 봅니다</a:t>
-            </a:r>
-          </a:p>
-        </p:txBody>
-      </p:sp>
-      <p:sp>
-        <p:nvSpPr>
-          <p:cNvPr id="9" name="Rounded Rectangle 8"/>
-          <p:cNvSpPr/>
-          <p:nvPr/>
-        </p:nvSpPr>
-        <p:spPr>
-          <a:xfrm>
-            <a:off x="1143000" y="3924300"/>
-            <a:ext cx="2895600" cy="3143250"/>
+          <p:cNvPr id="8" name="Rectangle 7"/>
+          <p:cNvSpPr/>
+          <p:nvPr/>
+        </p:nvSpPr>
+        <p:spPr>
+          <a:xfrm>
+            <a:off x="1143000" y="2781300"/>
+            <a:ext cx="3802380" cy="590550"/>
+          </a:xfrm>
+          <a:prstGeom prst="rect">
+            <a:avLst/>
+          </a:prstGeom>
+          <a:solidFill>
+            <a:srgbClr val="0D2B5E"/>
+          </a:solidFill>
+          <a:ln>
+            <a:noFill/>
+          </a:ln>
+          <a:effectLst/>
+        </p:spPr>
+        <p:txBody>
+          <a:bodyPr rtlCol="0" anchor="ctr" wrap="square"/>
+          <a:lstStyle/>
+          <a:p>
+            <a:pPr algn="ctr"/>
+          </a:p>
+        </p:txBody>
+      </p:sp>
+      <p:sp>
+        <p:nvSpPr>
+          <p:cNvPr id="9" name="TextBox 8"/>
+          <p:cNvSpPr txBox="1"/>
+          <p:nvPr/>
+        </p:nvSpPr>
+        <p:spPr>
+          <a:xfrm>
+            <a:off x="1143000" y="2781300"/>
+            <a:ext cx="3802380" cy="590550"/>
+          </a:xfrm>
+          <a:prstGeom prst="rect">
+            <a:avLst/>
+          </a:prstGeom>
+          <a:noFill/>
+        </p:spPr>
+        <p:txBody>
+          <a:bodyPr wrap="square" lIns="0" rIns="0" tIns="0" bIns="0" anchor="ctr">
+            <a:spAutoFit/>
+          </a:bodyPr>
+          <a:lstStyle/>
+          <a:p>
+            <a:pPr algn="ctr">
+              <a:lnSpc>
+                <a:spcPct val="100000"/>
+              </a:lnSpc>
+            </a:pPr>
+            <a:r>
+              <a:rPr sz="2025" b="1">
+                <a:solidFill>
+                  <a:srgbClr val="FFFFFF"/>
+                </a:solidFill>
+                <a:latin typeface="Pretendard"/>
+                <a:ea typeface="Pretendard"/>
+                <a:cs typeface="Pretendard"/>
+              </a:rPr>
+              <a:t>방식</a:t>
+            </a:r>
+          </a:p>
+        </p:txBody>
+      </p:sp>
+      <p:sp>
+        <p:nvSpPr>
+          <p:cNvPr id="10" name="Rectangle 9"/>
+          <p:cNvSpPr/>
+          <p:nvPr/>
+        </p:nvSpPr>
+        <p:spPr>
+          <a:xfrm>
+            <a:off x="4983480" y="2781300"/>
+            <a:ext cx="7322820" cy="590550"/>
+          </a:xfrm>
+          <a:prstGeom prst="rect">
+            <a:avLst/>
+          </a:prstGeom>
+          <a:solidFill>
+            <a:srgbClr val="1E5BC6"/>
+          </a:solidFill>
+          <a:ln>
+            <a:noFill/>
+          </a:ln>
+          <a:effectLst/>
+        </p:spPr>
+        <p:txBody>
+          <a:bodyPr rtlCol="0" anchor="ctr" wrap="square"/>
+          <a:lstStyle/>
+          <a:p>
+            <a:pPr algn="ctr"/>
+          </a:p>
+        </p:txBody>
+      </p:sp>
+      <p:sp>
+        <p:nvSpPr>
+          <p:cNvPr id="11" name="TextBox 10"/>
+          <p:cNvSpPr txBox="1"/>
+          <p:nvPr/>
+        </p:nvSpPr>
+        <p:spPr>
+          <a:xfrm>
+            <a:off x="4983480" y="2781300"/>
+            <a:ext cx="7322820" cy="590550"/>
+          </a:xfrm>
+          <a:prstGeom prst="rect">
+            <a:avLst/>
+          </a:prstGeom>
+          <a:noFill/>
+        </p:spPr>
+        <p:txBody>
+          <a:bodyPr wrap="square" lIns="0" rIns="0" tIns="0" bIns="0" anchor="ctr">
+            <a:spAutoFit/>
+          </a:bodyPr>
+          <a:lstStyle/>
+          <a:p>
+            <a:pPr algn="ctr">
+              <a:lnSpc>
+                <a:spcPct val="100000"/>
+              </a:lnSpc>
+            </a:pPr>
+            <a:r>
+              <a:rPr sz="2025" b="1">
+                <a:solidFill>
+                  <a:srgbClr val="FFFFFF"/>
+                </a:solidFill>
+                <a:latin typeface="Pretendard"/>
+                <a:ea typeface="Pretendard"/>
+                <a:cs typeface="Pretendard"/>
+              </a:rPr>
+              <a:t>한 줄</a:t>
+            </a:r>
+          </a:p>
+        </p:txBody>
+      </p:sp>
+      <p:sp>
+        <p:nvSpPr>
+          <p:cNvPr id="12" name="Rectangle 11"/>
+          <p:cNvSpPr/>
+          <p:nvPr/>
+        </p:nvSpPr>
+        <p:spPr>
+          <a:xfrm>
+            <a:off x="12344400" y="2781300"/>
+            <a:ext cx="4800600" cy="590550"/>
+          </a:xfrm>
+          <a:prstGeom prst="rect">
+            <a:avLst/>
+          </a:prstGeom>
+          <a:solidFill>
+            <a:srgbClr val="1E5BC6"/>
+          </a:solidFill>
+          <a:ln>
+            <a:noFill/>
+          </a:ln>
+          <a:effectLst/>
+        </p:spPr>
+        <p:txBody>
+          <a:bodyPr rtlCol="0" anchor="ctr" wrap="square"/>
+          <a:lstStyle/>
+          <a:p>
+            <a:pPr algn="ctr"/>
+          </a:p>
+        </p:txBody>
+      </p:sp>
+      <p:sp>
+        <p:nvSpPr>
+          <p:cNvPr id="13" name="TextBox 12"/>
+          <p:cNvSpPr txBox="1"/>
+          <p:nvPr/>
+        </p:nvSpPr>
+        <p:spPr>
+          <a:xfrm>
+            <a:off x="12344400" y="2781300"/>
+            <a:ext cx="4800600" cy="590550"/>
+          </a:xfrm>
+          <a:prstGeom prst="rect">
+            <a:avLst/>
+          </a:prstGeom>
+          <a:noFill/>
+        </p:spPr>
+        <p:txBody>
+          <a:bodyPr wrap="square" lIns="0" rIns="0" tIns="0" bIns="0" anchor="ctr">
+            <a:spAutoFit/>
+          </a:bodyPr>
+          <a:lstStyle/>
+          <a:p>
+            <a:pPr algn="ctr">
+              <a:lnSpc>
+                <a:spcPct val="100000"/>
+              </a:lnSpc>
+            </a:pPr>
+            <a:r>
+              <a:rPr sz="2025" b="1">
+                <a:solidFill>
+                  <a:srgbClr val="FFFFFF"/>
+                </a:solidFill>
+                <a:latin typeface="Pretendard"/>
+                <a:ea typeface="Pretendard"/>
+                <a:cs typeface="Pretendard"/>
+              </a:rPr>
+              <a:t>동작</a:t>
+            </a:r>
+          </a:p>
+        </p:txBody>
+      </p:sp>
+      <p:sp>
+        <p:nvSpPr>
+          <p:cNvPr id="14" name="Rounded Rectangle 13"/>
+          <p:cNvSpPr/>
+          <p:nvPr/>
+        </p:nvSpPr>
+        <p:spPr>
+          <a:xfrm>
+            <a:off x="1143000" y="3448050"/>
+            <a:ext cx="3802380" cy="647700"/>
           </a:xfrm>
           <a:prstGeom prst="roundRect">
             <a:avLst>
-              <a:gd name="adj" fmla="val 1644"/>
+              <a:gd name="adj" fmla="val 5882"/>
+            </a:avLst>
+          </a:prstGeom>
+          <a:solidFill>
+            <a:srgbClr val="EDF3FD"/>
+          </a:solidFill>
+          <a:ln w="9525">
+            <a:solidFill>
+              <a:srgbClr val="BFD3F5"/>
+            </a:solidFill>
+          </a:ln>
+          <a:effectLst/>
+        </p:spPr>
+        <p:txBody>
+          <a:bodyPr rtlCol="0" anchor="ctr" wrap="square"/>
+          <a:lstStyle/>
+          <a:p>
+            <a:pPr algn="ctr"/>
+          </a:p>
+        </p:txBody>
+      </p:sp>
+      <p:sp>
+        <p:nvSpPr>
+          <p:cNvPr id="15" name="TextBox 14"/>
+          <p:cNvSpPr txBox="1"/>
+          <p:nvPr/>
+        </p:nvSpPr>
+        <p:spPr>
+          <a:xfrm>
+            <a:off x="1238250" y="3448050"/>
+            <a:ext cx="3611880" cy="647700"/>
+          </a:xfrm>
+          <a:prstGeom prst="rect">
+            <a:avLst/>
+          </a:prstGeom>
+          <a:noFill/>
+        </p:spPr>
+        <p:txBody>
+          <a:bodyPr wrap="square" lIns="0" rIns="0" tIns="0" bIns="0" anchor="ctr">
+            <a:spAutoFit/>
+          </a:bodyPr>
+          <a:lstStyle/>
+          <a:p>
+            <a:pPr algn="l">
+              <a:lnSpc>
+                <a:spcPct val="115000"/>
+              </a:lnSpc>
+            </a:pPr>
+            <a:r>
+              <a:rPr sz="1875" b="1">
+                <a:solidFill>
+                  <a:srgbClr val="0D2B5E"/>
+                </a:solidFill>
+                <a:latin typeface="Pretendard"/>
+                <a:ea typeface="Pretendard"/>
+                <a:cs typeface="Pretendard"/>
+              </a:rPr>
+              <a:t>createOrReplace()</a:t>
+            </a:r>
+          </a:p>
+        </p:txBody>
+      </p:sp>
+      <p:sp>
+        <p:nvSpPr>
+          <p:cNvPr id="16" name="Rounded Rectangle 15"/>
+          <p:cNvSpPr/>
+          <p:nvPr/>
+        </p:nvSpPr>
+        <p:spPr>
+          <a:xfrm>
+            <a:off x="4983480" y="3448050"/>
+            <a:ext cx="7322820" cy="647700"/>
+          </a:xfrm>
+          <a:prstGeom prst="roundRect">
+            <a:avLst>
+              <a:gd name="adj" fmla="val 5882"/>
             </a:avLst>
           </a:prstGeom>
           <a:solidFill>
@@ -13552,104 +13320,51 @@
       </p:sp>
       <p:sp>
         <p:nvSpPr>
-          <p:cNvPr id="10" name="Rectangle 9"/>
-          <p:cNvSpPr/>
-          <p:nvPr/>
-        </p:nvSpPr>
-        <p:spPr>
-          <a:xfrm>
-            <a:off x="1143000" y="3924300"/>
-            <a:ext cx="2895600" cy="914400"/>
-          </a:xfrm>
-          <a:prstGeom prst="rect">
-            <a:avLst/>
-          </a:prstGeom>
-          <a:solidFill>
-            <a:srgbClr val="0D2B5E"/>
-          </a:solidFill>
-          <a:ln>
-            <a:noFill/>
-          </a:ln>
-          <a:effectLst/>
-        </p:spPr>
-        <p:txBody>
-          <a:bodyPr rtlCol="0" anchor="ctr" wrap="square"/>
-          <a:lstStyle/>
-          <a:p>
-            <a:pPr algn="ctr"/>
-          </a:p>
-        </p:txBody>
-      </p:sp>
-      <p:sp>
-        <p:nvSpPr>
-          <p:cNvPr id="11" name="TextBox 10"/>
-          <p:cNvSpPr txBox="1"/>
-          <p:nvPr/>
-        </p:nvSpPr>
-        <p:spPr>
-          <a:xfrm>
-            <a:off x="1143000" y="4171950"/>
-            <a:ext cx="2895600" cy="419100"/>
-          </a:xfrm>
-          <a:prstGeom prst="rect">
-            <a:avLst/>
-          </a:prstGeom>
-          <a:noFill/>
-        </p:spPr>
-        <p:txBody>
-          <a:bodyPr wrap="square" lIns="0" rIns="0" tIns="0" bIns="0" anchor="t">
+          <p:cNvPr id="17" name="TextBox 16"/>
+          <p:cNvSpPr txBox="1"/>
+          <p:nvPr/>
+        </p:nvSpPr>
+        <p:spPr>
+          <a:xfrm>
+            <a:off x="5078730" y="3448050"/>
+            <a:ext cx="7132320" cy="647700"/>
+          </a:xfrm>
+          <a:prstGeom prst="rect">
+            <a:avLst/>
+          </a:prstGeom>
+          <a:noFill/>
+        </p:spPr>
+        <p:txBody>
+          <a:bodyPr wrap="square" lIns="0" rIns="0" tIns="0" bIns="0" anchor="ctr">
             <a:spAutoFit/>
           </a:bodyPr>
           <a:lstStyle/>
           <a:p>
             <a:pPr algn="ctr">
               <a:lnSpc>
-                <a:spcPct val="100000"/>
-              </a:lnSpc>
-            </a:pPr>
-            <a:r>
-              <a:rPr sz="2475" b="1">
-                <a:solidFill>
-                  <a:srgbClr val="FFFFFF"/>
-                </a:solidFill>
-                <a:latin typeface="Pretendard"/>
-                <a:ea typeface="Pretendard"/>
-                <a:cs typeface="Pretendard"/>
-              </a:rPr>
-              <a:t>1. show() 없이</a:t>
-            </a:r>
-          </a:p>
-        </p:txBody>
-      </p:sp>
-      <p:sp>
-        <p:nvSpPr>
-          <p:cNvPr id="12" name="TextBox 11"/>
-          <p:cNvSpPr txBox="1"/>
-          <p:nvPr/>
-        </p:nvSpPr>
-        <p:spPr>
-          <a:xfrm>
-            <a:off x="1352550" y="5143500"/>
-            <a:ext cx="2476500" cy="1524000"/>
-          </a:xfrm>
-          <a:prstGeom prst="rect">
-            <a:avLst/>
-          </a:prstGeom>
-          <a:noFill/>
-        </p:spPr>
-        <p:txBody>
-          <a:bodyPr wrap="square" lIns="0" rIns="0" tIns="0" bIns="0" anchor="t">
-            <a:spAutoFit/>
-          </a:bodyPr>
-          <a:lstStyle/>
+                <a:spcPct val="115000"/>
+              </a:lnSpc>
+            </a:pPr>
+            <a:r>
+              <a:rPr sz="1875" b="0">
+                <a:solidFill>
+                  <a:srgbClr val="3D3D3D"/>
+                </a:solidFill>
+                <a:latin typeface="Pretendard"/>
+                <a:ea typeface="Pretendard"/>
+                <a:cs typeface="Pretendard"/>
+              </a:rPr>
+              <a:t>sales.writeTo("lake.db.product_sales")</a:t>
+            </a:r>
+          </a:p>
           <a:p>
             <a:pPr algn="ctr">
               <a:lnSpc>
-                <a:spcPct val="146000"/>
-              </a:lnSpc>
-            </a:pPr>
-            <a:r>
-              <a:rPr sz="2100" b="0">
+                <a:spcPct val="115000"/>
+              </a:lnSpc>
+            </a:pPr>
+            <a:r>
+              <a:rPr sz="1875" b="0">
                 <a:solidFill>
                   <a:srgbClr val="3D3D3D"/>
                 </a:solidFill>
@@ -13657,43 +13372,25 @@
                 <a:ea typeface="Pretendard"/>
                 <a:cs typeface="Pretendard"/>
               </a:rPr>
-              <a:t>q = spark.sql(…)</a:t>
-            </a:r>
-          </a:p>
-          <a:p>
-            <a:pPr algn="ctr">
-              <a:lnSpc>
-                <a:spcPct val="146000"/>
-              </a:lnSpc>
-            </a:pPr>
-            <a:r>
-              <a:rPr sz="2100" b="0">
-                <a:solidFill>
-                  <a:srgbClr val="3D3D3D"/>
-                </a:solidFill>
-                <a:latin typeface="Pretendard"/>
-                <a:ea typeface="Pretendard"/>
-                <a:cs typeface="Pretendard"/>
-              </a:rPr>
-              <a:t>만 실행</a:t>
-            </a:r>
-          </a:p>
-        </p:txBody>
-      </p:sp>
-      <p:sp>
-        <p:nvSpPr>
-          <p:cNvPr id="13" name="Rounded Rectangle 12"/>
-          <p:cNvSpPr/>
-          <p:nvPr/>
-        </p:nvSpPr>
-        <p:spPr>
-          <a:xfrm>
-            <a:off x="4419600" y="3924300"/>
-            <a:ext cx="2895600" cy="3143250"/>
+              <a:t>.createOrReplace()</a:t>
+            </a:r>
+          </a:p>
+        </p:txBody>
+      </p:sp>
+      <p:sp>
+        <p:nvSpPr>
+          <p:cNvPr id="18" name="Rounded Rectangle 17"/>
+          <p:cNvSpPr/>
+          <p:nvPr/>
+        </p:nvSpPr>
+        <p:spPr>
+          <a:xfrm>
+            <a:off x="12344400" y="3448050"/>
+            <a:ext cx="4800600" cy="647700"/>
           </a:xfrm>
           <a:prstGeom prst="roundRect">
             <a:avLst>
-              <a:gd name="adj" fmla="val 1644"/>
+              <a:gd name="adj" fmla="val 5882"/>
             </a:avLst>
           </a:prstGeom>
           <a:solidFill>
@@ -13716,104 +13413,51 @@
       </p:sp>
       <p:sp>
         <p:nvSpPr>
-          <p:cNvPr id="14" name="Rectangle 13"/>
-          <p:cNvSpPr/>
-          <p:nvPr/>
-        </p:nvSpPr>
-        <p:spPr>
-          <a:xfrm>
-            <a:off x="4419600" y="3924300"/>
-            <a:ext cx="2895600" cy="914400"/>
-          </a:xfrm>
-          <a:prstGeom prst="rect">
-            <a:avLst/>
-          </a:prstGeom>
-          <a:solidFill>
-            <a:srgbClr val="1E5BC6"/>
-          </a:solidFill>
-          <a:ln>
-            <a:noFill/>
-          </a:ln>
-          <a:effectLst/>
-        </p:spPr>
-        <p:txBody>
-          <a:bodyPr rtlCol="0" anchor="ctr" wrap="square"/>
-          <a:lstStyle/>
-          <a:p>
-            <a:pPr algn="ctr"/>
-          </a:p>
-        </p:txBody>
-      </p:sp>
-      <p:sp>
-        <p:nvSpPr>
-          <p:cNvPr id="15" name="TextBox 14"/>
-          <p:cNvSpPr txBox="1"/>
-          <p:nvPr/>
-        </p:nvSpPr>
-        <p:spPr>
-          <a:xfrm>
-            <a:off x="4419600" y="4171950"/>
-            <a:ext cx="2895600" cy="419100"/>
-          </a:xfrm>
-          <a:prstGeom prst="rect">
-            <a:avLst/>
-          </a:prstGeom>
-          <a:noFill/>
-        </p:spPr>
-        <p:txBody>
-          <a:bodyPr wrap="square" lIns="0" rIns="0" tIns="0" bIns="0" anchor="t">
+          <p:cNvPr id="19" name="TextBox 18"/>
+          <p:cNvSpPr txBox="1"/>
+          <p:nvPr/>
+        </p:nvSpPr>
+        <p:spPr>
+          <a:xfrm>
+            <a:off x="12439650" y="3448050"/>
+            <a:ext cx="4610100" cy="647700"/>
+          </a:xfrm>
+          <a:prstGeom prst="rect">
+            <a:avLst/>
+          </a:prstGeom>
+          <a:noFill/>
+        </p:spPr>
+        <p:txBody>
+          <a:bodyPr wrap="square" lIns="0" rIns="0" tIns="0" bIns="0" anchor="ctr">
             <a:spAutoFit/>
           </a:bodyPr>
           <a:lstStyle/>
           <a:p>
             <a:pPr algn="ctr">
               <a:lnSpc>
-                <a:spcPct val="100000"/>
-              </a:lnSpc>
-            </a:pPr>
-            <a:r>
-              <a:rPr sz="2475" b="1">
-                <a:solidFill>
-                  <a:srgbClr val="FFFFFF"/>
-                </a:solidFill>
-                <a:latin typeface="Pretendard"/>
-                <a:ea typeface="Pretendard"/>
-                <a:cs typeface="Pretendard"/>
-              </a:rPr>
-              <a:t>2. 아무것도 없다</a:t>
-            </a:r>
-          </a:p>
-        </p:txBody>
-      </p:sp>
-      <p:sp>
-        <p:nvSpPr>
-          <p:cNvPr id="16" name="TextBox 15"/>
-          <p:cNvSpPr txBox="1"/>
-          <p:nvPr/>
-        </p:nvSpPr>
-        <p:spPr>
-          <a:xfrm>
-            <a:off x="4629150" y="5143500"/>
-            <a:ext cx="2476500" cy="1524000"/>
-          </a:xfrm>
-          <a:prstGeom prst="rect">
-            <a:avLst/>
-          </a:prstGeom>
-          <a:noFill/>
-        </p:spPr>
-        <p:txBody>
-          <a:bodyPr wrap="square" lIns="0" rIns="0" tIns="0" bIns="0" anchor="t">
-            <a:spAutoFit/>
-          </a:bodyPr>
-          <a:lstStyle/>
+                <a:spcPct val="115000"/>
+              </a:lnSpc>
+            </a:pPr>
+            <a:r>
+              <a:rPr sz="1875" b="0">
+                <a:solidFill>
+                  <a:srgbClr val="3D3D3D"/>
+                </a:solidFill>
+                <a:latin typeface="Pretendard"/>
+                <a:ea typeface="Pretendard"/>
+                <a:cs typeface="Pretendard"/>
+              </a:rPr>
+              <a:t>없으면 만들고</a:t>
+            </a:r>
+          </a:p>
           <a:p>
             <a:pPr algn="ctr">
               <a:lnSpc>
-                <a:spcPct val="146000"/>
-              </a:lnSpc>
-            </a:pPr>
-            <a:r>
-              <a:rPr sz="2100" b="0">
+                <a:spcPct val="115000"/>
+              </a:lnSpc>
+            </a:pPr>
+            <a:r>
+              <a:rPr sz="1875" b="0">
                 <a:solidFill>
                   <a:srgbClr val="3D3D3D"/>
                 </a:solidFill>
@@ -13821,43 +13465,100 @@
                 <a:ea typeface="Pretendard"/>
                 <a:cs typeface="Pretendard"/>
               </a:rPr>
-              <a:t>transformation</a:t>
-            </a:r>
-          </a:p>
-          <a:p>
-            <a:pPr algn="ctr">
-              <a:lnSpc>
-                <a:spcPct val="146000"/>
-              </a:lnSpc>
-            </a:pPr>
-            <a:r>
-              <a:rPr sz="2100" b="0">
-                <a:solidFill>
-                  <a:srgbClr val="3D3D3D"/>
-                </a:solidFill>
-                <a:latin typeface="Pretendard"/>
-                <a:ea typeface="Pretendard"/>
-                <a:cs typeface="Pretendard"/>
-              </a:rPr>
-              <a:t>뿐 — 지연 평가</a:t>
-            </a:r>
-          </a:p>
-        </p:txBody>
-      </p:sp>
-      <p:sp>
-        <p:nvSpPr>
-          <p:cNvPr id="17" name="Rounded Rectangle 16"/>
-          <p:cNvSpPr/>
-          <p:nvPr/>
-        </p:nvSpPr>
-        <p:spPr>
-          <a:xfrm>
-            <a:off x="7696200" y="3924300"/>
-            <a:ext cx="2895600" cy="3143250"/>
+              <a:t>있으면 통째로 교체</a:t>
+            </a:r>
+          </a:p>
+        </p:txBody>
+      </p:sp>
+      <p:sp>
+        <p:nvSpPr>
+          <p:cNvPr id="20" name="Rounded Rectangle 19"/>
+          <p:cNvSpPr/>
+          <p:nvPr/>
+        </p:nvSpPr>
+        <p:spPr>
+          <a:xfrm>
+            <a:off x="1143000" y="4171950"/>
+            <a:ext cx="3802380" cy="647700"/>
           </a:xfrm>
           <a:prstGeom prst="roundRect">
             <a:avLst>
-              <a:gd name="adj" fmla="val 1644"/>
+              <a:gd name="adj" fmla="val 5882"/>
+            </a:avLst>
+          </a:prstGeom>
+          <a:solidFill>
+            <a:srgbClr val="EDF3FD"/>
+          </a:solidFill>
+          <a:ln w="9525">
+            <a:solidFill>
+              <a:srgbClr val="BFD3F5"/>
+            </a:solidFill>
+          </a:ln>
+          <a:effectLst/>
+        </p:spPr>
+        <p:txBody>
+          <a:bodyPr rtlCol="0" anchor="ctr" wrap="square"/>
+          <a:lstStyle/>
+          <a:p>
+            <a:pPr algn="ctr"/>
+          </a:p>
+        </p:txBody>
+      </p:sp>
+      <p:sp>
+        <p:nvSpPr>
+          <p:cNvPr id="21" name="TextBox 20"/>
+          <p:cNvSpPr txBox="1"/>
+          <p:nvPr/>
+        </p:nvSpPr>
+        <p:spPr>
+          <a:xfrm>
+            <a:off x="1238250" y="4171950"/>
+            <a:ext cx="3611880" cy="647700"/>
+          </a:xfrm>
+          <a:prstGeom prst="rect">
+            <a:avLst/>
+          </a:prstGeom>
+          <a:noFill/>
+        </p:spPr>
+        <p:txBody>
+          <a:bodyPr wrap="square" lIns="0" rIns="0" tIns="0" bIns="0" anchor="ctr">
+            <a:spAutoFit/>
+          </a:bodyPr>
+          <a:lstStyle/>
+          <a:p>
+            <a:pPr algn="l">
+              <a:lnSpc>
+                <a:spcPct val="115000"/>
+              </a:lnSpc>
+            </a:pPr>
+            <a:r>
+              <a:rPr sz="1875" b="1">
+                <a:solidFill>
+                  <a:srgbClr val="0D2B5E"/>
+                </a:solidFill>
+                <a:latin typeface="Pretendard"/>
+                <a:ea typeface="Pretendard"/>
+                <a:cs typeface="Pretendard"/>
+              </a:rPr>
+              <a:t>append()</a:t>
+            </a:r>
+          </a:p>
+        </p:txBody>
+      </p:sp>
+      <p:sp>
+        <p:nvSpPr>
+          <p:cNvPr id="22" name="Rounded Rectangle 21"/>
+          <p:cNvSpPr/>
+          <p:nvPr/>
+        </p:nvSpPr>
+        <p:spPr>
+          <a:xfrm>
+            <a:off x="4983480" y="4171950"/>
+            <a:ext cx="7322820" cy="647700"/>
+          </a:xfrm>
+          <a:prstGeom prst="roundRect">
+            <a:avLst>
+              <a:gd name="adj" fmla="val 5882"/>
             </a:avLst>
           </a:prstGeom>
           <a:solidFill>
@@ -13880,104 +13581,33 @@
       </p:sp>
       <p:sp>
         <p:nvSpPr>
-          <p:cNvPr id="18" name="Rectangle 17"/>
-          <p:cNvSpPr/>
-          <p:nvPr/>
-        </p:nvSpPr>
-        <p:spPr>
-          <a:xfrm>
-            <a:off x="7696200" y="3924300"/>
-            <a:ext cx="2895600" cy="914400"/>
-          </a:xfrm>
-          <a:prstGeom prst="rect">
-            <a:avLst/>
-          </a:prstGeom>
-          <a:solidFill>
-            <a:srgbClr val="0D2B5E"/>
-          </a:solidFill>
-          <a:ln>
-            <a:noFill/>
-          </a:ln>
-          <a:effectLst/>
-        </p:spPr>
-        <p:txBody>
-          <a:bodyPr rtlCol="0" anchor="ctr" wrap="square"/>
-          <a:lstStyle/>
-          <a:p>
-            <a:pPr algn="ctr"/>
-          </a:p>
-        </p:txBody>
-      </p:sp>
-      <p:sp>
-        <p:nvSpPr>
-          <p:cNvPr id="19" name="TextBox 18"/>
-          <p:cNvSpPr txBox="1"/>
-          <p:nvPr/>
-        </p:nvSpPr>
-        <p:spPr>
-          <a:xfrm>
-            <a:off x="7696200" y="4171950"/>
-            <a:ext cx="2895600" cy="419100"/>
-          </a:xfrm>
-          <a:prstGeom prst="rect">
-            <a:avLst/>
-          </a:prstGeom>
-          <a:noFill/>
-        </p:spPr>
-        <p:txBody>
-          <a:bodyPr wrap="square" lIns="0" rIns="0" tIns="0" bIns="0" anchor="t">
+          <p:cNvPr id="23" name="TextBox 22"/>
+          <p:cNvSpPr txBox="1"/>
+          <p:nvPr/>
+        </p:nvSpPr>
+        <p:spPr>
+          <a:xfrm>
+            <a:off x="5078730" y="4171950"/>
+            <a:ext cx="7132320" cy="647700"/>
+          </a:xfrm>
+          <a:prstGeom prst="rect">
+            <a:avLst/>
+          </a:prstGeom>
+          <a:noFill/>
+        </p:spPr>
+        <p:txBody>
+          <a:bodyPr wrap="square" lIns="0" rIns="0" tIns="0" bIns="0" anchor="ctr">
             <a:spAutoFit/>
           </a:bodyPr>
           <a:lstStyle/>
           <a:p>
             <a:pPr algn="ctr">
               <a:lnSpc>
-                <a:spcPct val="100000"/>
-              </a:lnSpc>
-            </a:pPr>
-            <a:r>
-              <a:rPr sz="2475" b="1">
-                <a:solidFill>
-                  <a:srgbClr val="FFFFFF"/>
-                </a:solidFill>
-                <a:latin typeface="Pretendard"/>
-                <a:ea typeface="Pretendard"/>
-                <a:cs typeface="Pretendard"/>
-              </a:rPr>
-              <a:t>3. q.show()</a:t>
-            </a:r>
-          </a:p>
-        </p:txBody>
-      </p:sp>
-      <p:sp>
-        <p:nvSpPr>
-          <p:cNvPr id="20" name="TextBox 19"/>
-          <p:cNvSpPr txBox="1"/>
-          <p:nvPr/>
-        </p:nvSpPr>
-        <p:spPr>
-          <a:xfrm>
-            <a:off x="7905750" y="5143500"/>
-            <a:ext cx="2476500" cy="1524000"/>
-          </a:xfrm>
-          <a:prstGeom prst="rect">
-            <a:avLst/>
-          </a:prstGeom>
-          <a:noFill/>
-        </p:spPr>
-        <p:txBody>
-          <a:bodyPr wrap="square" lIns="0" rIns="0" tIns="0" bIns="0" anchor="t">
-            <a:spAutoFit/>
-          </a:bodyPr>
-          <a:lstStyle/>
-          <a:p>
-            <a:pPr algn="ctr">
-              <a:lnSpc>
-                <a:spcPct val="146000"/>
-              </a:lnSpc>
-            </a:pPr>
-            <a:r>
-              <a:rPr sz="2100" b="0">
+                <a:spcPct val="115000"/>
+              </a:lnSpc>
+            </a:pPr>
+            <a:r>
+              <a:rPr sz="1875" b="0">
                 <a:solidFill>
                   <a:srgbClr val="3D3D3D"/>
                 </a:solidFill>
@@ -13985,43 +13615,25 @@
                 <a:ea typeface="Pretendard"/>
                 <a:cs typeface="Pretendard"/>
               </a:rPr>
-              <a:t>action 을</a:t>
-            </a:r>
-          </a:p>
-          <a:p>
-            <a:pPr algn="ctr">
-              <a:lnSpc>
-                <a:spcPct val="146000"/>
-              </a:lnSpc>
-            </a:pPr>
-            <a:r>
-              <a:rPr sz="2100" b="0">
-                <a:solidFill>
-                  <a:srgbClr val="3D3D3D"/>
-                </a:solidFill>
-                <a:latin typeface="Pretendard"/>
-                <a:ea typeface="Pretendard"/>
-                <a:cs typeface="Pretendard"/>
-              </a:rPr>
-              <a:t>불러야 실행</a:t>
-            </a:r>
-          </a:p>
-        </p:txBody>
-      </p:sp>
-      <p:sp>
-        <p:nvSpPr>
-          <p:cNvPr id="21" name="Rounded Rectangle 20"/>
-          <p:cNvSpPr/>
-          <p:nvPr/>
-        </p:nvSpPr>
-        <p:spPr>
-          <a:xfrm>
-            <a:off x="10972800" y="3924300"/>
-            <a:ext cx="2895600" cy="3143250"/>
+              <a:t>.writeTo(…).append()</a:t>
+            </a:r>
+          </a:p>
+        </p:txBody>
+      </p:sp>
+      <p:sp>
+        <p:nvSpPr>
+          <p:cNvPr id="24" name="Rounded Rectangle 23"/>
+          <p:cNvSpPr/>
+          <p:nvPr/>
+        </p:nvSpPr>
+        <p:spPr>
+          <a:xfrm>
+            <a:off x="12344400" y="4171950"/>
+            <a:ext cx="4800600" cy="647700"/>
           </a:xfrm>
           <a:prstGeom prst="roundRect">
             <a:avLst>
-              <a:gd name="adj" fmla="val 1644"/>
+              <a:gd name="adj" fmla="val 5882"/>
             </a:avLst>
           </a:prstGeom>
           <a:solidFill>
@@ -14044,104 +13656,33 @@
       </p:sp>
       <p:sp>
         <p:nvSpPr>
-          <p:cNvPr id="22" name="Rectangle 21"/>
-          <p:cNvSpPr/>
-          <p:nvPr/>
-        </p:nvSpPr>
-        <p:spPr>
-          <a:xfrm>
-            <a:off x="10972800" y="3924300"/>
-            <a:ext cx="2895600" cy="914400"/>
-          </a:xfrm>
-          <a:prstGeom prst="rect">
-            <a:avLst/>
-          </a:prstGeom>
-          <a:solidFill>
-            <a:srgbClr val="1E5BC6"/>
-          </a:solidFill>
-          <a:ln>
-            <a:noFill/>
-          </a:ln>
-          <a:effectLst/>
-        </p:spPr>
-        <p:txBody>
-          <a:bodyPr rtlCol="0" anchor="ctr" wrap="square"/>
-          <a:lstStyle/>
-          <a:p>
-            <a:pPr algn="ctr"/>
-          </a:p>
-        </p:txBody>
-      </p:sp>
-      <p:sp>
-        <p:nvSpPr>
-          <p:cNvPr id="23" name="TextBox 22"/>
-          <p:cNvSpPr txBox="1"/>
-          <p:nvPr/>
-        </p:nvSpPr>
-        <p:spPr>
-          <a:xfrm>
-            <a:off x="10972800" y="4171950"/>
-            <a:ext cx="2895600" cy="419100"/>
-          </a:xfrm>
-          <a:prstGeom prst="rect">
-            <a:avLst/>
-          </a:prstGeom>
-          <a:noFill/>
-        </p:spPr>
-        <p:txBody>
-          <a:bodyPr wrap="square" lIns="0" rIns="0" tIns="0" bIns="0" anchor="t">
+          <p:cNvPr id="25" name="TextBox 24"/>
+          <p:cNvSpPr txBox="1"/>
+          <p:nvPr/>
+        </p:nvSpPr>
+        <p:spPr>
+          <a:xfrm>
+            <a:off x="12439650" y="4171950"/>
+            <a:ext cx="4610100" cy="647700"/>
+          </a:xfrm>
+          <a:prstGeom prst="rect">
+            <a:avLst/>
+          </a:prstGeom>
+          <a:noFill/>
+        </p:spPr>
+        <p:txBody>
+          <a:bodyPr wrap="square" lIns="0" rIns="0" tIns="0" bIns="0" anchor="ctr">
             <a:spAutoFit/>
           </a:bodyPr>
           <a:lstStyle/>
           <a:p>
             <a:pPr algn="ctr">
               <a:lnSpc>
-                <a:spcPct val="100000"/>
-              </a:lnSpc>
-            </a:pPr>
-            <a:r>
-              <a:rPr sz="2475" b="1">
-                <a:solidFill>
-                  <a:srgbClr val="FFFFFF"/>
-                </a:solidFill>
-                <a:latin typeface="Pretendard"/>
-                <a:ea typeface="Pretendard"/>
-                <a:cs typeface="Pretendard"/>
-              </a:rPr>
-              <a:t>4. … 으로 잘림</a:t>
-            </a:r>
-          </a:p>
-        </p:txBody>
-      </p:sp>
-      <p:sp>
-        <p:nvSpPr>
-          <p:cNvPr id="24" name="TextBox 23"/>
-          <p:cNvSpPr txBox="1"/>
-          <p:nvPr/>
-        </p:nvSpPr>
-        <p:spPr>
-          <a:xfrm>
-            <a:off x="11182350" y="5143500"/>
-            <a:ext cx="2476500" cy="1524000"/>
-          </a:xfrm>
-          <a:prstGeom prst="rect">
-            <a:avLst/>
-          </a:prstGeom>
-          <a:noFill/>
-        </p:spPr>
-        <p:txBody>
-          <a:bodyPr wrap="square" lIns="0" rIns="0" tIns="0" bIns="0" anchor="t">
-            <a:spAutoFit/>
-          </a:bodyPr>
-          <a:lstStyle/>
-          <a:p>
-            <a:pPr algn="ctr">
-              <a:lnSpc>
-                <a:spcPct val="146000"/>
-              </a:lnSpc>
-            </a:pPr>
-            <a:r>
-              <a:rPr sz="2100" b="0">
+                <a:spcPct val="115000"/>
+              </a:lnSpc>
+            </a:pPr>
+            <a:r>
+              <a:rPr sz="1875" b="0">
                 <a:solidFill>
                   <a:srgbClr val="3D3D3D"/>
                 </a:solidFill>
@@ -14149,43 +13690,100 @@
                 <a:ea typeface="Pretendard"/>
                 <a:cs typeface="Pretendard"/>
               </a:rPr>
-              <a:t>기본 20행</a:t>
-            </a:r>
-          </a:p>
-          <a:p>
-            <a:pPr algn="ctr">
-              <a:lnSpc>
-                <a:spcPct val="146000"/>
-              </a:lnSpc>
-            </a:pPr>
-            <a:r>
-              <a:rPr sz="2100" b="0">
-                <a:solidFill>
-                  <a:srgbClr val="3D3D3D"/>
-                </a:solidFill>
-                <a:latin typeface="Pretendard"/>
-                <a:ea typeface="Pretendard"/>
-                <a:cs typeface="Pretendard"/>
-              </a:rPr>
-              <a:t>truncate=True</a:t>
-            </a:r>
-          </a:p>
-        </p:txBody>
-      </p:sp>
-      <p:sp>
-        <p:nvSpPr>
-          <p:cNvPr id="25" name="Rounded Rectangle 24"/>
-          <p:cNvSpPr/>
-          <p:nvPr/>
-        </p:nvSpPr>
-        <p:spPr>
-          <a:xfrm>
-            <a:off x="14249400" y="3924300"/>
-            <a:ext cx="2895600" cy="3143250"/>
+              <a:t>뒤에 붙임</a:t>
+            </a:r>
+          </a:p>
+        </p:txBody>
+      </p:sp>
+      <p:sp>
+        <p:nvSpPr>
+          <p:cNvPr id="26" name="Rounded Rectangle 25"/>
+          <p:cNvSpPr/>
+          <p:nvPr/>
+        </p:nvSpPr>
+        <p:spPr>
+          <a:xfrm>
+            <a:off x="1143000" y="4895850"/>
+            <a:ext cx="3802380" cy="647700"/>
           </a:xfrm>
           <a:prstGeom prst="roundRect">
             <a:avLst>
-              <a:gd name="adj" fmla="val 1644"/>
+              <a:gd name="adj" fmla="val 5882"/>
+            </a:avLst>
+          </a:prstGeom>
+          <a:solidFill>
+            <a:srgbClr val="EDF3FD"/>
+          </a:solidFill>
+          <a:ln w="9525">
+            <a:solidFill>
+              <a:srgbClr val="BFD3F5"/>
+            </a:solidFill>
+          </a:ln>
+          <a:effectLst/>
+        </p:spPr>
+        <p:txBody>
+          <a:bodyPr rtlCol="0" anchor="ctr" wrap="square"/>
+          <a:lstStyle/>
+          <a:p>
+            <a:pPr algn="ctr"/>
+          </a:p>
+        </p:txBody>
+      </p:sp>
+      <p:sp>
+        <p:nvSpPr>
+          <p:cNvPr id="27" name="TextBox 26"/>
+          <p:cNvSpPr txBox="1"/>
+          <p:nvPr/>
+        </p:nvSpPr>
+        <p:spPr>
+          <a:xfrm>
+            <a:off x="1238250" y="4895850"/>
+            <a:ext cx="3611880" cy="647700"/>
+          </a:xfrm>
+          <a:prstGeom prst="rect">
+            <a:avLst/>
+          </a:prstGeom>
+          <a:noFill/>
+        </p:spPr>
+        <p:txBody>
+          <a:bodyPr wrap="square" lIns="0" rIns="0" tIns="0" bIns="0" anchor="ctr">
+            <a:spAutoFit/>
+          </a:bodyPr>
+          <a:lstStyle/>
+          <a:p>
+            <a:pPr algn="l">
+              <a:lnSpc>
+                <a:spcPct val="115000"/>
+              </a:lnSpc>
+            </a:pPr>
+            <a:r>
+              <a:rPr sz="1875" b="1">
+                <a:solidFill>
+                  <a:srgbClr val="0D2B5E"/>
+                </a:solidFill>
+                <a:latin typeface="Pretendard"/>
+                <a:ea typeface="Pretendard"/>
+                <a:cs typeface="Pretendard"/>
+              </a:rPr>
+              <a:t>overwritePartitions()</a:t>
+            </a:r>
+          </a:p>
+        </p:txBody>
+      </p:sp>
+      <p:sp>
+        <p:nvSpPr>
+          <p:cNvPr id="28" name="Rounded Rectangle 27"/>
+          <p:cNvSpPr/>
+          <p:nvPr/>
+        </p:nvSpPr>
+        <p:spPr>
+          <a:xfrm>
+            <a:off x="4983480" y="4895850"/>
+            <a:ext cx="7322820" cy="647700"/>
+          </a:xfrm>
+          <a:prstGeom prst="roundRect">
+            <a:avLst>
+              <a:gd name="adj" fmla="val 5882"/>
             </a:avLst>
           </a:prstGeom>
           <a:solidFill>
@@ -14208,20 +13806,438 @@
       </p:sp>
       <p:sp>
         <p:nvSpPr>
-          <p:cNvPr id="26" name="Rectangle 25"/>
-          <p:cNvSpPr/>
-          <p:nvPr/>
-        </p:nvSpPr>
-        <p:spPr>
-          <a:xfrm>
-            <a:off x="14249400" y="3924300"/>
-            <a:ext cx="2895600" cy="914400"/>
-          </a:xfrm>
-          <a:prstGeom prst="rect">
-            <a:avLst/>
-          </a:prstGeom>
-          <a:solidFill>
-            <a:srgbClr val="0D2B5E"/>
+          <p:cNvPr id="29" name="TextBox 28"/>
+          <p:cNvSpPr txBox="1"/>
+          <p:nvPr/>
+        </p:nvSpPr>
+        <p:spPr>
+          <a:xfrm>
+            <a:off x="5078730" y="4895850"/>
+            <a:ext cx="7132320" cy="647700"/>
+          </a:xfrm>
+          <a:prstGeom prst="rect">
+            <a:avLst/>
+          </a:prstGeom>
+          <a:noFill/>
+        </p:spPr>
+        <p:txBody>
+          <a:bodyPr wrap="square" lIns="0" rIns="0" tIns="0" bIns="0" anchor="ctr">
+            <a:spAutoFit/>
+          </a:bodyPr>
+          <a:lstStyle/>
+          <a:p>
+            <a:pPr algn="ctr">
+              <a:lnSpc>
+                <a:spcPct val="115000"/>
+              </a:lnSpc>
+            </a:pPr>
+            <a:r>
+              <a:rPr sz="1875" b="0">
+                <a:solidFill>
+                  <a:srgbClr val="3D3D3D"/>
+                </a:solidFill>
+                <a:latin typeface="Pretendard"/>
+                <a:ea typeface="Pretendard"/>
+                <a:cs typeface="Pretendard"/>
+              </a:rPr>
+              <a:t>.writeTo(…).overwritePartitions()</a:t>
+            </a:r>
+          </a:p>
+        </p:txBody>
+      </p:sp>
+      <p:sp>
+        <p:nvSpPr>
+          <p:cNvPr id="30" name="Rounded Rectangle 29"/>
+          <p:cNvSpPr/>
+          <p:nvPr/>
+        </p:nvSpPr>
+        <p:spPr>
+          <a:xfrm>
+            <a:off x="12344400" y="4895850"/>
+            <a:ext cx="4800600" cy="647700"/>
+          </a:xfrm>
+          <a:prstGeom prst="roundRect">
+            <a:avLst>
+              <a:gd name="adj" fmla="val 5882"/>
+            </a:avLst>
+          </a:prstGeom>
+          <a:solidFill>
+            <a:srgbClr val="FAFBFD"/>
+          </a:solidFill>
+          <a:ln w="9525">
+            <a:solidFill>
+              <a:srgbClr val="DCE1E8"/>
+            </a:solidFill>
+          </a:ln>
+          <a:effectLst/>
+        </p:spPr>
+        <p:txBody>
+          <a:bodyPr rtlCol="0" anchor="ctr" wrap="square"/>
+          <a:lstStyle/>
+          <a:p>
+            <a:pPr algn="ctr"/>
+          </a:p>
+        </p:txBody>
+      </p:sp>
+      <p:sp>
+        <p:nvSpPr>
+          <p:cNvPr id="31" name="TextBox 30"/>
+          <p:cNvSpPr txBox="1"/>
+          <p:nvPr/>
+        </p:nvSpPr>
+        <p:spPr>
+          <a:xfrm>
+            <a:off x="12439650" y="4895850"/>
+            <a:ext cx="4610100" cy="647700"/>
+          </a:xfrm>
+          <a:prstGeom prst="rect">
+            <a:avLst/>
+          </a:prstGeom>
+          <a:noFill/>
+        </p:spPr>
+        <p:txBody>
+          <a:bodyPr wrap="square" lIns="0" rIns="0" tIns="0" bIns="0" anchor="ctr">
+            <a:spAutoFit/>
+          </a:bodyPr>
+          <a:lstStyle/>
+          <a:p>
+            <a:pPr algn="ctr">
+              <a:lnSpc>
+                <a:spcPct val="115000"/>
+              </a:lnSpc>
+            </a:pPr>
+            <a:r>
+              <a:rPr sz="1875" b="0">
+                <a:solidFill>
+                  <a:srgbClr val="3D3D3D"/>
+                </a:solidFill>
+                <a:latin typeface="Pretendard"/>
+                <a:ea typeface="Pretendard"/>
+                <a:cs typeface="Pretendard"/>
+              </a:rPr>
+              <a:t>해당 파티션만 교체</a:t>
+            </a:r>
+          </a:p>
+        </p:txBody>
+      </p:sp>
+      <p:sp>
+        <p:nvSpPr>
+          <p:cNvPr id="32" name="Rounded Rectangle 31"/>
+          <p:cNvSpPr/>
+          <p:nvPr/>
+        </p:nvSpPr>
+        <p:spPr>
+          <a:xfrm>
+            <a:off x="1143000" y="5619750"/>
+            <a:ext cx="3802380" cy="647700"/>
+          </a:xfrm>
+          <a:prstGeom prst="roundRect">
+            <a:avLst>
+              <a:gd name="adj" fmla="val 5882"/>
+            </a:avLst>
+          </a:prstGeom>
+          <a:solidFill>
+            <a:srgbClr val="EDF3FD"/>
+          </a:solidFill>
+          <a:ln w="9525">
+            <a:solidFill>
+              <a:srgbClr val="BFD3F5"/>
+            </a:solidFill>
+          </a:ln>
+          <a:effectLst/>
+        </p:spPr>
+        <p:txBody>
+          <a:bodyPr rtlCol="0" anchor="ctr" wrap="square"/>
+          <a:lstStyle/>
+          <a:p>
+            <a:pPr algn="ctr"/>
+          </a:p>
+        </p:txBody>
+      </p:sp>
+      <p:sp>
+        <p:nvSpPr>
+          <p:cNvPr id="33" name="TextBox 32"/>
+          <p:cNvSpPr txBox="1"/>
+          <p:nvPr/>
+        </p:nvSpPr>
+        <p:spPr>
+          <a:xfrm>
+            <a:off x="1238250" y="5619750"/>
+            <a:ext cx="3611880" cy="647700"/>
+          </a:xfrm>
+          <a:prstGeom prst="rect">
+            <a:avLst/>
+          </a:prstGeom>
+          <a:noFill/>
+        </p:spPr>
+        <p:txBody>
+          <a:bodyPr wrap="square" lIns="0" rIns="0" tIns="0" bIns="0" anchor="ctr">
+            <a:spAutoFit/>
+          </a:bodyPr>
+          <a:lstStyle/>
+          <a:p>
+            <a:pPr algn="l">
+              <a:lnSpc>
+                <a:spcPct val="115000"/>
+              </a:lnSpc>
+            </a:pPr>
+            <a:r>
+              <a:rPr sz="1875" b="1">
+                <a:solidFill>
+                  <a:srgbClr val="0D2B5E"/>
+                </a:solidFill>
+                <a:latin typeface="Pretendard"/>
+                <a:ea typeface="Pretendard"/>
+                <a:cs typeface="Pretendard"/>
+              </a:rPr>
+              <a:t>SQL 로도 — CTAS</a:t>
+            </a:r>
+          </a:p>
+        </p:txBody>
+      </p:sp>
+      <p:sp>
+        <p:nvSpPr>
+          <p:cNvPr id="34" name="Rounded Rectangle 33"/>
+          <p:cNvSpPr/>
+          <p:nvPr/>
+        </p:nvSpPr>
+        <p:spPr>
+          <a:xfrm>
+            <a:off x="4983480" y="5619750"/>
+            <a:ext cx="7322820" cy="647700"/>
+          </a:xfrm>
+          <a:prstGeom prst="roundRect">
+            <a:avLst>
+              <a:gd name="adj" fmla="val 5882"/>
+            </a:avLst>
+          </a:prstGeom>
+          <a:solidFill>
+            <a:srgbClr val="FAFBFD"/>
+          </a:solidFill>
+          <a:ln w="9525">
+            <a:solidFill>
+              <a:srgbClr val="DCE1E8"/>
+            </a:solidFill>
+          </a:ln>
+          <a:effectLst/>
+        </p:spPr>
+        <p:txBody>
+          <a:bodyPr rtlCol="0" anchor="ctr" wrap="square"/>
+          <a:lstStyle/>
+          <a:p>
+            <a:pPr algn="ctr"/>
+          </a:p>
+        </p:txBody>
+      </p:sp>
+      <p:sp>
+        <p:nvSpPr>
+          <p:cNvPr id="35" name="TextBox 34"/>
+          <p:cNvSpPr txBox="1"/>
+          <p:nvPr/>
+        </p:nvSpPr>
+        <p:spPr>
+          <a:xfrm>
+            <a:off x="5078730" y="5619750"/>
+            <a:ext cx="7132320" cy="647700"/>
+          </a:xfrm>
+          <a:prstGeom prst="rect">
+            <a:avLst/>
+          </a:prstGeom>
+          <a:noFill/>
+        </p:spPr>
+        <p:txBody>
+          <a:bodyPr wrap="square" lIns="0" rIns="0" tIns="0" bIns="0" anchor="ctr">
+            <a:spAutoFit/>
+          </a:bodyPr>
+          <a:lstStyle/>
+          <a:p>
+            <a:pPr algn="ctr">
+              <a:lnSpc>
+                <a:spcPct val="115000"/>
+              </a:lnSpc>
+            </a:pPr>
+            <a:r>
+              <a:rPr sz="1875" b="0">
+                <a:solidFill>
+                  <a:srgbClr val="3D3D3D"/>
+                </a:solidFill>
+                <a:latin typeface="Pretendard"/>
+                <a:ea typeface="Pretendard"/>
+                <a:cs typeface="Pretendard"/>
+              </a:rPr>
+              <a:t>CREATE OR REPLACE TABLE lake.db.daily_revenue</a:t>
+            </a:r>
+          </a:p>
+          <a:p>
+            <a:pPr algn="ctr">
+              <a:lnSpc>
+                <a:spcPct val="115000"/>
+              </a:lnSpc>
+            </a:pPr>
+            <a:r>
+              <a:rPr sz="1875" b="0">
+                <a:solidFill>
+                  <a:srgbClr val="3D3D3D"/>
+                </a:solidFill>
+                <a:latin typeface="Pretendard"/>
+                <a:ea typeface="Pretendard"/>
+                <a:cs typeface="Pretendard"/>
+              </a:rPr>
+              <a:t>USING iceberg AS SELECT …</a:t>
+            </a:r>
+          </a:p>
+        </p:txBody>
+      </p:sp>
+      <p:sp>
+        <p:nvSpPr>
+          <p:cNvPr id="36" name="Rounded Rectangle 35"/>
+          <p:cNvSpPr/>
+          <p:nvPr/>
+        </p:nvSpPr>
+        <p:spPr>
+          <a:xfrm>
+            <a:off x="12344400" y="5619750"/>
+            <a:ext cx="4800600" cy="647700"/>
+          </a:xfrm>
+          <a:prstGeom prst="roundRect">
+            <a:avLst>
+              <a:gd name="adj" fmla="val 5882"/>
+            </a:avLst>
+          </a:prstGeom>
+          <a:solidFill>
+            <a:srgbClr val="FAFBFD"/>
+          </a:solidFill>
+          <a:ln w="9525">
+            <a:solidFill>
+              <a:srgbClr val="DCE1E8"/>
+            </a:solidFill>
+          </a:ln>
+          <a:effectLst/>
+        </p:spPr>
+        <p:txBody>
+          <a:bodyPr rtlCol="0" anchor="ctr" wrap="square"/>
+          <a:lstStyle/>
+          <a:p>
+            <a:pPr algn="ctr"/>
+          </a:p>
+        </p:txBody>
+      </p:sp>
+      <p:sp>
+        <p:nvSpPr>
+          <p:cNvPr id="37" name="TextBox 36"/>
+          <p:cNvSpPr txBox="1"/>
+          <p:nvPr/>
+        </p:nvSpPr>
+        <p:spPr>
+          <a:xfrm>
+            <a:off x="12439650" y="5619750"/>
+            <a:ext cx="4610100" cy="647700"/>
+          </a:xfrm>
+          <a:prstGeom prst="rect">
+            <a:avLst/>
+          </a:prstGeom>
+          <a:noFill/>
+        </p:spPr>
+        <p:txBody>
+          <a:bodyPr wrap="square" lIns="0" rIns="0" tIns="0" bIns="0" anchor="ctr">
+            <a:spAutoFit/>
+          </a:bodyPr>
+          <a:lstStyle/>
+          <a:p>
+            <a:pPr algn="ctr">
+              <a:lnSpc>
+                <a:spcPct val="115000"/>
+              </a:lnSpc>
+            </a:pPr>
+            <a:r>
+              <a:rPr sz="1875" b="0">
+                <a:solidFill>
+                  <a:srgbClr val="3D3D3D"/>
+                </a:solidFill>
+                <a:latin typeface="Pretendard"/>
+                <a:ea typeface="Pretendard"/>
+                <a:cs typeface="Pretendard"/>
+              </a:rPr>
+              <a:t>113000 · 1155000 · 46000</a:t>
+            </a:r>
+          </a:p>
+          <a:p>
+            <a:pPr algn="ctr">
+              <a:lnSpc>
+                <a:spcPct val="115000"/>
+              </a:lnSpc>
+            </a:pPr>
+            <a:r>
+              <a:rPr sz="1875" b="0">
+                <a:solidFill>
+                  <a:srgbClr val="3D3D3D"/>
+                </a:solidFill>
+                <a:latin typeface="Pretendard"/>
+                <a:ea typeface="Pretendard"/>
+                <a:cs typeface="Pretendard"/>
+              </a:rPr>
+              <a:t>4-4 Trino CTAS 형태</a:t>
+            </a:r>
+          </a:p>
+        </p:txBody>
+      </p:sp>
+      <p:sp>
+        <p:nvSpPr>
+          <p:cNvPr id="38" name="TextBox 37"/>
+          <p:cNvSpPr txBox="1"/>
+          <p:nvPr/>
+        </p:nvSpPr>
+        <p:spPr>
+          <a:xfrm>
+            <a:off x="1143000" y="7620000"/>
+            <a:ext cx="16002000" cy="342900"/>
+          </a:xfrm>
+          <a:prstGeom prst="rect">
+            <a:avLst/>
+          </a:prstGeom>
+          <a:noFill/>
+        </p:spPr>
+        <p:txBody>
+          <a:bodyPr wrap="square" lIns="0" rIns="0" tIns="0" bIns="0" anchor="t">
+            <a:spAutoFit/>
+          </a:bodyPr>
+          <a:lstStyle/>
+          <a:p>
+            <a:pPr algn="l">
+              <a:lnSpc>
+                <a:spcPct val="100000"/>
+              </a:lnSpc>
+            </a:pPr>
+            <a:r>
+              <a:rPr sz="1875" b="1">
+                <a:solidFill>
+                  <a:srgbClr val="7D7D7D"/>
+                </a:solidFill>
+                <a:latin typeface="Pretendard"/>
+                <a:ea typeface="Pretendard"/>
+                <a:cs typeface="Pretendard"/>
+              </a:rPr>
+              <a:t>처음 만들 때 WARN version hint 스택이 지나감(무시) — MinIO warehouse/lake/db/product_sales/ 에 parquet 1개</a:t>
+            </a:r>
+          </a:p>
+        </p:txBody>
+      </p:sp>
+      <p:sp>
+        <p:nvSpPr>
+          <p:cNvPr id="39" name="Rectangle 38"/>
+          <p:cNvSpPr/>
+          <p:nvPr/>
+        </p:nvSpPr>
+        <p:spPr>
+          <a:xfrm>
+            <a:off x="1143000" y="8058150"/>
+            <a:ext cx="16002000" cy="9525"/>
+          </a:xfrm>
+          <a:prstGeom prst="rect">
+            <a:avLst/>
+          </a:prstGeom>
+          <a:solidFill>
+            <a:srgbClr val="DCE1E8"/>
           </a:solidFill>
           <a:ln>
             <a:noFill/>
@@ -14238,137 +14254,7 @@
       </p:sp>
       <p:sp>
         <p:nvSpPr>
-          <p:cNvPr id="27" name="TextBox 26"/>
-          <p:cNvSpPr txBox="1"/>
-          <p:nvPr/>
-        </p:nvSpPr>
-        <p:spPr>
-          <a:xfrm>
-            <a:off x="14249400" y="4171950"/>
-            <a:ext cx="2895600" cy="419100"/>
-          </a:xfrm>
-          <a:prstGeom prst="rect">
-            <a:avLst/>
-          </a:prstGeom>
-          <a:noFill/>
-        </p:spPr>
-        <p:txBody>
-          <a:bodyPr wrap="square" lIns="0" rIns="0" tIns="0" bIns="0" anchor="t">
-            <a:spAutoFit/>
-          </a:bodyPr>
-          <a:lstStyle/>
-          <a:p>
-            <a:pPr algn="ctr">
-              <a:lnSpc>
-                <a:spcPct val="100000"/>
-              </a:lnSpc>
-            </a:pPr>
-            <a:r>
-              <a:rPr sz="2475" b="1">
-                <a:solidFill>
-                  <a:srgbClr val="FFFFFF"/>
-                </a:solidFill>
-                <a:latin typeface="Pretendard"/>
-                <a:ea typeface="Pretendard"/>
-                <a:cs typeface="Pretendard"/>
-              </a:rPr>
-              <a:t>5. 처방</a:t>
-            </a:r>
-          </a:p>
-        </p:txBody>
-      </p:sp>
-      <p:sp>
-        <p:nvSpPr>
-          <p:cNvPr id="28" name="TextBox 27"/>
-          <p:cNvSpPr txBox="1"/>
-          <p:nvPr/>
-        </p:nvSpPr>
-        <p:spPr>
-          <a:xfrm>
-            <a:off x="14458950" y="5143500"/>
-            <a:ext cx="2476500" cy="1524000"/>
-          </a:xfrm>
-          <a:prstGeom prst="rect">
-            <a:avLst/>
-          </a:prstGeom>
-          <a:noFill/>
-        </p:spPr>
-        <p:txBody>
-          <a:bodyPr wrap="square" lIns="0" rIns="0" tIns="0" bIns="0" anchor="t">
-            <a:spAutoFit/>
-          </a:bodyPr>
-          <a:lstStyle/>
-          <a:p>
-            <a:pPr algn="ctr">
-              <a:lnSpc>
-                <a:spcPct val="146000"/>
-              </a:lnSpc>
-            </a:pPr>
-            <a:r>
-              <a:rPr sz="2100" b="0">
-                <a:solidFill>
-                  <a:srgbClr val="3D3D3D"/>
-                </a:solidFill>
-                <a:latin typeface="Pretendard"/>
-                <a:ea typeface="Pretendard"/>
-                <a:cs typeface="Pretendard"/>
-              </a:rPr>
-              <a:t>show(</a:t>
-            </a:r>
-          </a:p>
-          <a:p>
-            <a:pPr algn="ctr">
-              <a:lnSpc>
-                <a:spcPct val="146000"/>
-              </a:lnSpc>
-            </a:pPr>
-            <a:r>
-              <a:rPr sz="2100" b="0">
-                <a:solidFill>
-                  <a:srgbClr val="3D3D3D"/>
-                </a:solidFill>
-                <a:latin typeface="Pretendard"/>
-                <a:ea typeface="Pretendard"/>
-                <a:cs typeface="Pretendard"/>
-              </a:rPr>
-              <a:t>truncate=False)</a:t>
-            </a:r>
-          </a:p>
-        </p:txBody>
-      </p:sp>
-      <p:sp>
-        <p:nvSpPr>
-          <p:cNvPr id="29" name="Rectangle 28"/>
-          <p:cNvSpPr/>
-          <p:nvPr/>
-        </p:nvSpPr>
-        <p:spPr>
-          <a:xfrm>
-            <a:off x="1143000" y="8058150"/>
-            <a:ext cx="16002000" cy="9525"/>
-          </a:xfrm>
-          <a:prstGeom prst="rect">
-            <a:avLst/>
-          </a:prstGeom>
-          <a:solidFill>
-            <a:srgbClr val="DCE1E8"/>
-          </a:solidFill>
-          <a:ln>
-            <a:noFill/>
-          </a:ln>
-          <a:effectLst/>
-        </p:spPr>
-        <p:txBody>
-          <a:bodyPr rtlCol="0" anchor="ctr" wrap="square"/>
-          <a:lstStyle/>
-          <a:p>
-            <a:pPr algn="ctr"/>
-          </a:p>
-        </p:txBody>
-      </p:sp>
-      <p:sp>
-        <p:nvSpPr>
-          <p:cNvPr id="30" name="TextBox 29"/>
+          <p:cNvPr id="40" name="TextBox 39"/>
           <p:cNvSpPr txBox="1"/>
           <p:nvPr/>
         </p:nvSpPr>
@@ -14409,7 +14295,7 @@
       </p:sp>
       <p:sp>
         <p:nvSpPr>
-          <p:cNvPr id="31" name="TextBox 30"/>
+          <p:cNvPr id="41" name="TextBox 40"/>
           <p:cNvSpPr txBox="1"/>
           <p:nvPr/>
         </p:nvSpPr>
@@ -14468,7 +14354,7 @@
       <p:grpSpPr/>
       <p:sp>
         <p:nvSpPr>
-          <p:cNvPr id="2" name="Oval 1"/>
+          <p:cNvPr id="2" name="deckgen:decor"/>
           <p:cNvSpPr/>
           <p:nvPr/>
         </p:nvSpPr>
@@ -14498,7 +14384,7 @@
       </p:sp>
       <p:sp>
         <p:nvSpPr>
-          <p:cNvPr id="3" name="Oval 2"/>
+          <p:cNvPr id="3" name="deckgen:decor"/>
           <p:cNvSpPr/>
           <p:nvPr/>
         </p:nvSpPr>
@@ -14528,7 +14414,7 @@
       </p:sp>
       <p:sp>
         <p:nvSpPr>
-          <p:cNvPr id="4" name="Oval 3"/>
+          <p:cNvPr id="4" name="deckgen:decor"/>
           <p:cNvSpPr/>
           <p:nvPr/>
         </p:nvSpPr>
@@ -14850,7 +14736,7 @@
                 <a:ea typeface="Pretendard"/>
                 <a:cs typeface="Pretendard"/>
               </a:rPr>
-              <a:t>결과를 대조 — 5-5 에서 만들 데이터 마트의 뼈대가 된다</a:t>
+              <a:t>결과를 대조 — 5-5 에서 만들 데이터 마트의 뼈대</a:t>
             </a:r>
           </a:p>
         </p:txBody>
@@ -15037,7 +14923,7 @@
                 <a:ea typeface="Pretendard"/>
                 <a:cs typeface="Pretendard"/>
               </a:rPr>
-              <a:t>products.join(orders, on="product_id", how="left_anti") — 이 데이터에선 0행</a:t>
+              <a:t>products.join(orders, on="product_id", how="left_anti") — 0행</a:t>
             </a:r>
           </a:p>
         </p:txBody>
@@ -15224,7 +15110,7 @@
                 <a:ea typeface="Pretendard"/>
                 <a:cs typeface="Pretendard"/>
               </a:rPr>
-              <a:t>total_amount * 100.0 / SUM(total_amount) OVER () — 합이 100 에 가까워야</a:t>
+              <a:t>monitor 70.8 · keyboard 24.0 · mouse 5.3 — 합 100.1(반올림)</a:t>
             </a:r>
           </a:p>
         </p:txBody>
@@ -15340,7 +15226,7 @@
                 <a:ea typeface="Pretendard"/>
                 <a:cs typeface="Pretendard"/>
               </a:rPr>
-              <a:t>0행이면</a:t>
+              <a:t>제목 줄만</a:t>
             </a:r>
           </a:p>
           <a:p>
@@ -15358,7 +15244,7 @@
                 <a:ea typeface="Pretendard"/>
                 <a:cs typeface="Pretendard"/>
               </a:rPr>
-              <a:t>정답</a:t>
+              <a:t>0행이면 정답</a:t>
             </a:r>
           </a:p>
         </p:txBody>
